--- a/courses/ai-native/sessions/s10.pptx
+++ b/courses/ai-native/sessions/s10.pptx
@@ -563,7 +563,7 @@
             <a:pPr lvl="0"/>
             <a:r>
               <a:rPr lang="ko-KR" sz="1200"/>
-              <a:t>수강생에게 묻는다 — 코드를 고쳐 테스트를 통과시키면 무엇이 남는가? 다음 과제에서 같은 실패가 다시 난다.</a:t>
+              <a:t>수강생에게 묻는다 — 코드가 원인이면 코드 수정으로 충분할 수 있다. 입력 문서가 원인이라면 코드만 수정했을 때 다음 작업에 어떤 문제가 남는가?</a:t>
             </a:r>
           </a:p>
         </p:txBody>
@@ -788,7 +788,7 @@
             <a:pPr lvl="0"/>
             <a:r>
               <a:rPr lang="ko-KR" sz="1200"/>
-              <a:t>수강생에게 묻는다 — 상한을 늘리면 성공률이 오르는가? 환경 오류가 아니면 오르지 않는다.</a:t>
+              <a:t>수강생에게 묻는다 — 상한을 늘리기 전에 무엇을 확인할 것인가? 이전 시도에서 바꾼 내용과 실패 원인을 확인하게 한다.</a:t>
             </a:r>
           </a:p>
         </p:txBody>
@@ -931,7 +931,14 @@
             <a:pPr lvl="0"/>
             <a:r>
               <a:rPr lang="ko-KR" sz="1200"/>
-              <a:t>LLM은 모든 실패를 "프롬프트를 더 구체적으로"로 답한다. 점검 1·3으로 되돌린다.</a:t>
+              <a:t>실패 기록이 없으면 원인을 확정하지 않게 한다. 별첨은 교육용 관찰에 따른 진단 예시이며 실제 수강생의 실행 결과를 대신하지 않는다.</a:t>
+            </a:r>
+          </a:p>
+          <a:p>
+            <a:pPr lvl="0"/>
+            <a:r>
+              <a:rPr lang="ko-KR" sz="1200"/>
+              <a:t>LLM이 근거 없이 "프롬프트를 더 구체적으로"라고 제안하면 점검 1·3으로 되돌린다.</a:t>
             </a:r>
           </a:p>
           <a:p>
@@ -1067,7 +1074,7 @@
             <a:pPr lvl="0"/>
             <a:r>
               <a:rPr lang="ko-KR" sz="1200"/>
-              <a:t>세 실패는 모두 회차 상태로 적용을 가르는 규칙에서 나온다. 수강생의 답이 다른 실패를 들어도 근거가 서면 맞는 답이다.</a:t>
+              <a:t>이 표는 교육용 관찰을 가정한 답안이다. 앞의 두 실패는 회차 상태별 적용 규칙의 누락, 마지막은 도구 호출 오류다. 실제 진단은 실행 기록에 근거해야 한다.</a:t>
             </a:r>
           </a:p>
           <a:p>
@@ -1210,14 +1217,14 @@
             <a:pPr lvl="0"/>
             <a:r>
               <a:rPr lang="ko-KR" sz="1200"/>
-              <a:t>보완의 핵심은 실패가 가리킨 빈칸을 메우는 것이다. 코드를 고친 것으로 끝내면 다음 기능에서 같은 실패가 난다.</a:t>
+              <a:t>입력 문서가 원인인 실패는 문서와 코드를 함께 보완해야 한다. 코드 수정만으로 끝내지 않는 이유를 설명하게 한다.</a:t>
             </a:r>
           </a:p>
           <a:p>
             <a:pPr lvl="0"/>
             <a:r>
               <a:rPr lang="ko-KR" sz="1200"/>
-              <a:t>재시도 기록을 하네스에 더하는 것이 수강생에게 가장 낯설다. 센서는 판정만 하고 횟수는 남기지 않는다는 점을 짚는다.</a:t>
+              <a:t>검사 도구에 따라 실행 횟수의 기록 여부가 다르다. 사용 환경에서 시도 횟수와 실패 이유를 어디에 남기는지 확인하게 한다.</a:t>
             </a:r>
           </a:p>
         </p:txBody>
@@ -1367,7 +1374,7 @@
             <a:pPr lvl="0"/>
             <a:r>
               <a:rPr lang="ko-KR" sz="1200"/>
-              <a:t>수강생에게 묻는다 — 재시도로 풀리는 실패와 풀리지 않는 실패를 어떻게 가르는가? 입력이 같을 때 결과가 바뀔 수 있는지로 가른다.</a:t>
+              <a:t>수강생에게 묻는다 — 재시도하기 전에 어떤 근거를 확인해야 하는가? 도구의 오류 메시지와 실행 기록을 본다. 결과가 달라졌다는 사실만으로 환경 오류라고 단정하지 않는다.</a:t>
             </a:r>
           </a:p>
         </p:txBody>
@@ -1428,7 +1435,7 @@
             <a:pPr lvl="0"/>
             <a:r>
               <a:rPr lang="ko-KR" sz="1200"/>
-              <a:t>네 유형은 과정의 정리다. 원전의 분류가 아니며, 수업에서는 이름보다 가르는 두 질문을 외우게 한다.</a:t>
+              <a:t>네 유형은 과정의 정리다. 원전의 분류가 아니며, 유형 이름보다 어떤 근거로 진단했는지 설명하게 한다.</a:t>
             </a:r>
           </a:p>
           <a:p>
@@ -1592,7 +1599,7 @@
             <a:pPr lvl="0"/>
             <a:r>
               <a:rPr lang="ko-KR" sz="1200"/>
-              <a:t>"메시지를 읽고 1회 고쳐 본다"가 "세션 09. 검증 하네스·결과 점검·피드백"의 조종 루프다. 그 한 번이 듣지 않으면 유형을 다시 본다.</a:t>
+              <a:t>실패 원인을 수정한 뒤 다시 검사하는 것이 "세션 09. 검증 하네스·결과 점검·피드백"의 조종 루프다. 같은 실패가 반복되면 진단을 재검토한다.</a:t>
             </a:r>
           </a:p>
         </p:txBody>
@@ -1817,7 +1824,7 @@
             <a:pPr lvl="0"/>
             <a:r>
               <a:rPr lang="ko-KR" sz="1200"/>
-              <a:t>수강생에게 묻는다 — 지금 쓰는 에이전트에서 실패한 실행의 기록을 다시 열어 볼 수 있는가? 대개 화면을 닫으면 사라진다.</a:t>
+              <a:t>수강생에게 묻는다 — 지금 쓰는 에이전트에서 실패한 실행의 기록을 다시 열어 볼 수 있는가? 저장 여부와 보관 기간을 확인하게 한다.</a:t>
             </a:r>
           </a:p>
         </p:txBody>
@@ -3580,17 +3587,16 @@
           </p:nvPr>
         </p:nvGraphicFramePr>
         <p:xfrm>
-          <a:off x="1761046" y="2112010"/>
-          <a:ext cx="5608320" cy="3873500"/>
+          <a:off x="1536256" y="2112010"/>
+          <a:ext cx="6057900" cy="3873500"/>
         </p:xfrm>
         <a:graphic>
           <a:graphicData uri="http://schemas.openxmlformats.org/drawingml/2006/table">
             <a:tbl>
               <a:tblPr/>
               <a:tblGrid>
-                <a:gridCol w="2037080"/>
-                <a:gridCol w="1953260"/>
-                <a:gridCol w="1617980"/>
+                <a:gridCol w="2540000"/>
+                <a:gridCol w="3517900"/>
               </a:tblGrid>
               <a:tr h="288000">
                 <a:tc>
@@ -3611,7 +3617,7 @@
                           <a:ea typeface="맑은 고딕" panose="020B0503020000020004" pitchFamily="34" charset="-127"/>
                           <a:cs typeface="맑은 고딕"/>
                         </a:rPr>
-                        <a:t>물음</a:t>
+                        <a:t>확인할 질문</a:t>
                       </a:r>
                     </a:p>
                   </a:txBody>
@@ -3673,77 +3679,7 @@
                           <a:ea typeface="맑은 고딕" panose="020B0503020000020004" pitchFamily="34" charset="-127"/>
                           <a:cs typeface="맑은 고딕"/>
                         </a:rPr>
-                        <a:t>아니라면</a:t>
-                      </a:r>
-                    </a:p>
-                  </a:txBody>
-                  <a:tcPr marL="6750" marR="6750" marT="6750" marB="0" anchor="ctr">
-                    <a:lnL w="9525" cap="flat" cmpd="sng" algn="ctr">
-                      <a:solidFill>
-                        <a:schemeClr val="bg1">
-                          <a:lumMod val="50000"/>
-                        </a:schemeClr>
-                      </a:solidFill>
-                      <a:prstDash val="solid"/>
-                      <a:round/>
-                      <a:headEnd type="none" w="med" len="med"/>
-                      <a:tailEnd type="none" w="med" len="med"/>
-                    </a:lnL>
-                    <a:lnR w="9525" cap="flat" cmpd="sng" algn="ctr">
-                      <a:solidFill>
-                        <a:schemeClr val="bg1">
-                          <a:lumMod val="50000"/>
-                        </a:schemeClr>
-                      </a:solidFill>
-                      <a:prstDash val="solid"/>
-                      <a:round/>
-                      <a:headEnd type="none" w="med" len="med"/>
-                      <a:tailEnd type="none" w="med" len="med"/>
-                    </a:lnR>
-                    <a:lnT w="9525" cap="flat" cmpd="sng" algn="ctr">
-                      <a:solidFill>
-                        <a:schemeClr val="tx1"/>
-                      </a:solidFill>
-                      <a:prstDash val="solid"/>
-                      <a:round/>
-                      <a:headEnd type="none" w="med" len="med"/>
-                      <a:tailEnd type="none" w="med" len="med"/>
-                    </a:lnT>
-                    <a:lnB w="9525" cap="flat" cmpd="sng" algn="ctr">
-                      <a:solidFill>
-                        <a:schemeClr val="bg1">
-                          <a:lumMod val="50000"/>
-                        </a:schemeClr>
-                      </a:solidFill>
-                      <a:prstDash val="solid"/>
-                      <a:round/>
-                      <a:headEnd type="none" w="med" len="med"/>
-                      <a:tailEnd type="none" w="med" len="med"/>
-                    </a:lnB>
-                    <a:solidFill>
-                      <a:srgbClr val="002060"/>
-                    </a:solidFill>
-                  </a:tcPr>
-                </a:tc>
-                <a:tc>
-                  <a:txBody>
-                    <a:bodyPr/>
-                    <a:lstStyle/>
-                    <a:p>
-                      <a:pPr algn="ctr" fontAlgn="ctr">
-                        <a:buNone/>
-                      </a:pPr>
-                      <a:r>
-                        <a:rPr lang="ko-KR" altLang="en-US" sz="1000" b="1" i="0" u="none" strike="noStrike" dirty="0" err="1">
-                          <a:solidFill>
-                            <a:schemeClr val="bg1"/>
-                          </a:solidFill>
-                          <a:effectLst/>
-                          <a:latin typeface="맑은 고딕" panose="020B0503020000020004" pitchFamily="34" charset="-127"/>
-                          <a:ea typeface="맑은 고딕" panose="020B0503020000020004" pitchFamily="34" charset="-127"/>
-                          <a:cs typeface="맑은 고딕"/>
-                        </a:rPr>
-                        <a:t>그렇다면</a:t>
+                        <a:t>확인 결과에 따른 대응</a:t>
                       </a:r>
                     </a:p>
                   </a:txBody>
@@ -3815,7 +3751,7 @@
                           <a:ea typeface="맑은 고딕" panose="020B0503020000020004" pitchFamily="34" charset="-127"/>
                           <a:cs typeface="맑은 고딕"/>
                         </a:rPr>
-                        <a:t>다시 돌리면 달라지는가?</a:t>
+                        <a:t>도구·환경 오류가 기록에 있는가?</a:t>
                       </a:r>
                     </a:p>
                   </a:txBody>
@@ -3869,63 +3805,7 @@
                           <a:ea typeface="맑은 고딕" panose="020B0503020000020004" pitchFamily="34" charset="-127"/>
                           <a:cs typeface="맑은 고딕"/>
                         </a:rPr>
-                        <a:t>다음 물음으로</a:t>
-                      </a:r>
-                    </a:p>
-                  </a:txBody>
-                  <a:tcPr marL="81005" marR="6750" marT="6750" marB="0" anchor="ctr">
-                    <a:lnL>
-                      <a:noFill/>
-                    </a:lnL>
-                    <a:lnR>
-                      <a:noFill/>
-                    </a:lnR>
-                    <a:lnT w="9525" cap="flat" cmpd="sng" algn="ctr">
-                      <a:solidFill>
-                        <a:schemeClr val="bg1">
-                          <a:lumMod val="50000"/>
-                        </a:schemeClr>
-                      </a:solidFill>
-                      <a:prstDash val="solid"/>
-                      <a:round/>
-                      <a:headEnd type="none" w="med" len="med"/>
-                      <a:tailEnd type="none" w="med" len="med"/>
-                    </a:lnT>
-                    <a:lnB w="9525" cap="flat" cmpd="sng" algn="ctr">
-                      <a:solidFill>
-                        <a:schemeClr val="bg1">
-                          <a:lumMod val="50000"/>
-                        </a:schemeClr>
-                      </a:solidFill>
-                      <a:prstDash val="solid"/>
-                      <a:round/>
-                      <a:headEnd type="none" w="med" len="med"/>
-                      <a:tailEnd type="none" w="med" len="med"/>
-                    </a:lnB>
-                    <a:solidFill>
-                      <a:srgbClr val="FFFFFF"/>
-                    </a:solidFill>
-                  </a:tcPr>
-                </a:tc>
-                <a:tc>
-                  <a:txBody>
-                    <a:bodyPr/>
-                    <a:lstStyle/>
-                    <a:p>
-                      <a:pPr algn="l" fontAlgn="ctr">
-                        <a:buNone/>
-                      </a:pPr>
-                      <a:r>
-                        <a:rPr lang="ko-KR" altLang="en-US" sz="1000" b="0" i="0" u="none" strike="noStrike" dirty="0">
-                          <a:solidFill>
-                            <a:srgbClr val="000000"/>
-                          </a:solidFill>
-                          <a:effectLst/>
-                          <a:latin typeface="맑은 고딕" panose="020B0503020000020004" pitchFamily="34" charset="-127"/>
-                          <a:ea typeface="맑은 고딕" panose="020B0503020000020004" pitchFamily="34" charset="-127"/>
-                          <a:cs typeface="맑은 고딕"/>
-                        </a:rPr>
-                        <a:t>환경 오류 — 재시도</a:t>
+                        <a:t>복구 여부를 확인하고 재시도를 판단한다</a:t>
                       </a:r>
                     </a:p>
                   </a:txBody>
@@ -3983,7 +3863,7 @@
                           <a:ea typeface="맑은 고딕" panose="020B0503020000020004" pitchFamily="34" charset="-127"/>
                           <a:cs typeface="맑은 고딕"/>
                         </a:rPr>
-                        <a:t>기대값이 옳은가?</a:t>
+                        <a:t>기대값이 업무 규칙과 맞는가?</a:t>
                       </a:r>
                     </a:p>
                   </a:txBody>
@@ -4037,63 +3917,7 @@
                           <a:ea typeface="맑은 고딕" panose="020B0503020000020004" pitchFamily="34" charset="-127"/>
                           <a:cs typeface="맑은 고딕"/>
                         </a:rPr>
-                        <a:t>수용 기준을 고친다</a:t>
-                      </a:r>
-                    </a:p>
-                  </a:txBody>
-                  <a:tcPr marL="81005" marR="6750" marT="6750" marB="0" anchor="ctr">
-                    <a:lnL>
-                      <a:noFill/>
-                    </a:lnL>
-                    <a:lnR>
-                      <a:noFill/>
-                    </a:lnR>
-                    <a:lnT w="9525" cap="flat" cmpd="sng" algn="ctr">
-                      <a:solidFill>
-                        <a:schemeClr val="bg1">
-                          <a:lumMod val="50000"/>
-                        </a:schemeClr>
-                      </a:solidFill>
-                      <a:prstDash val="solid"/>
-                      <a:round/>
-                      <a:headEnd type="none" w="med" len="med"/>
-                      <a:tailEnd type="none" w="med" len="med"/>
-                    </a:lnT>
-                    <a:lnB w="9525" cap="flat" cmpd="sng" algn="ctr">
-                      <a:solidFill>
-                        <a:schemeClr val="bg1">
-                          <a:lumMod val="50000"/>
-                        </a:schemeClr>
-                      </a:solidFill>
-                      <a:prstDash val="solid"/>
-                      <a:round/>
-                      <a:headEnd type="none" w="med" len="med"/>
-                      <a:tailEnd type="none" w="med" len="med"/>
-                    </a:lnB>
-                    <a:solidFill>
-                      <a:srgbClr val="FFFFFF"/>
-                    </a:solidFill>
-                  </a:tcPr>
-                </a:tc>
-                <a:tc>
-                  <a:txBody>
-                    <a:bodyPr/>
-                    <a:lstStyle/>
-                    <a:p>
-                      <a:pPr algn="l" fontAlgn="ctr">
-                        <a:buNone/>
-                      </a:pPr>
-                      <a:r>
-                        <a:rPr lang="ko-KR" altLang="en-US" sz="1000" b="0" i="0" u="none" strike="noStrike" dirty="0">
-                          <a:solidFill>
-                            <a:srgbClr val="000000"/>
-                          </a:solidFill>
-                          <a:effectLst/>
-                          <a:latin typeface="맑은 고딕" panose="020B0503020000020004" pitchFamily="34" charset="-127"/>
-                          <a:ea typeface="맑은 고딕" panose="020B0503020000020004" pitchFamily="34" charset="-127"/>
-                          <a:cs typeface="맑은 고딕"/>
-                        </a:rPr>
-                        <a:t>다음 물음으로</a:t>
+                        <a:t>다르면 업무 담당자와 수용 기준을 고친다</a:t>
                       </a:r>
                     </a:p>
                   </a:txBody>
@@ -4151,7 +3975,7 @@
                           <a:ea typeface="맑은 고딕" panose="020B0503020000020004" pitchFamily="34" charset="-127"/>
                           <a:cs typeface="맑은 고딕"/>
                         </a:rPr>
-                        <a:t>맥락에 그 규칙이 있는가?</a:t>
+                        <a:t>필요한 규칙을 읽을 수 있었는가?</a:t>
                       </a:r>
                     </a:p>
                   </a:txBody>
@@ -4205,63 +4029,7 @@
                           <a:ea typeface="맑은 고딕" panose="020B0503020000020004" pitchFamily="34" charset="-127"/>
                           <a:cs typeface="맑은 고딕"/>
                         </a:rPr>
-                        <a:t>맥락 파일·모델을 고친다</a:t>
-                      </a:r>
-                    </a:p>
-                  </a:txBody>
-                  <a:tcPr marL="81005" marR="6750" marT="6750" marB="0" anchor="ctr">
-                    <a:lnL>
-                      <a:noFill/>
-                    </a:lnL>
-                    <a:lnR>
-                      <a:noFill/>
-                    </a:lnR>
-                    <a:lnT w="9525" cap="flat" cmpd="sng" algn="ctr">
-                      <a:solidFill>
-                        <a:schemeClr val="bg1">
-                          <a:lumMod val="50000"/>
-                        </a:schemeClr>
-                      </a:solidFill>
-                      <a:prstDash val="solid"/>
-                      <a:round/>
-                      <a:headEnd type="none" w="med" len="med"/>
-                      <a:tailEnd type="none" w="med" len="med"/>
-                    </a:lnT>
-                    <a:lnB w="9525" cap="flat" cmpd="sng" algn="ctr">
-                      <a:solidFill>
-                        <a:schemeClr val="bg1">
-                          <a:lumMod val="50000"/>
-                        </a:schemeClr>
-                      </a:solidFill>
-                      <a:prstDash val="solid"/>
-                      <a:round/>
-                      <a:headEnd type="none" w="med" len="med"/>
-                      <a:tailEnd type="none" w="med" len="med"/>
-                    </a:lnB>
-                    <a:solidFill>
-                      <a:srgbClr val="FFFFFF"/>
-                    </a:solidFill>
-                  </a:tcPr>
-                </a:tc>
-                <a:tc>
-                  <a:txBody>
-                    <a:bodyPr/>
-                    <a:lstStyle/>
-                    <a:p>
-                      <a:pPr algn="l" fontAlgn="ctr">
-                        <a:buNone/>
-                      </a:pPr>
-                      <a:r>
-                        <a:rPr lang="ko-KR" altLang="en-US" sz="1000" b="0" i="0" u="none" strike="noStrike" dirty="0">
-                          <a:solidFill>
-                            <a:srgbClr val="000000"/>
-                          </a:solidFill>
-                          <a:effectLst/>
-                          <a:latin typeface="맑은 고딕" panose="020B0503020000020004" pitchFamily="34" charset="-127"/>
-                          <a:ea typeface="맑은 고딕" panose="020B0503020000020004" pitchFamily="34" charset="-127"/>
-                          <a:cs typeface="맑은 고딕"/>
-                        </a:rPr>
-                        <a:t>다음 물음으로</a:t>
+                        <a:t>빠졌거나 다르면 맥락 문서를 고친다</a:t>
                       </a:r>
                     </a:p>
                   </a:txBody>
@@ -4319,7 +4087,7 @@
                           <a:ea typeface="맑은 고딕" panose="020B0503020000020004" pitchFamily="34" charset="-127"/>
                           <a:cs typeface="맑은 고딕"/>
                         </a:rPr>
-                        <a:t>경계가 막은 것인가?</a:t>
+                        <a:t>권한 경계에 막혔는가?</a:t>
                       </a:r>
                     </a:p>
                   </a:txBody>
@@ -4373,63 +4141,7 @@
                           <a:ea typeface="맑은 고딕" panose="020B0503020000020004" pitchFamily="34" charset="-127"/>
                           <a:cs typeface="맑은 고딕"/>
                         </a:rPr>
-                        <a:t>작업을 쪼갠다</a:t>
-                      </a:r>
-                    </a:p>
-                  </a:txBody>
-                  <a:tcPr marL="81005" marR="6750" marT="6750" marB="0" anchor="ctr">
-                    <a:lnL>
-                      <a:noFill/>
-                    </a:lnL>
-                    <a:lnR>
-                      <a:noFill/>
-                    </a:lnR>
-                    <a:lnT w="9525" cap="flat" cmpd="sng" algn="ctr">
-                      <a:solidFill>
-                        <a:schemeClr val="bg1">
-                          <a:lumMod val="50000"/>
-                        </a:schemeClr>
-                      </a:solidFill>
-                      <a:prstDash val="solid"/>
-                      <a:round/>
-                      <a:headEnd type="none" w="med" len="med"/>
-                      <a:tailEnd type="none" w="med" len="med"/>
-                    </a:lnT>
-                    <a:lnB w="9525" cap="flat" cmpd="sng" algn="ctr">
-                      <a:solidFill>
-                        <a:schemeClr val="bg1">
-                          <a:lumMod val="50000"/>
-                        </a:schemeClr>
-                      </a:solidFill>
-                      <a:prstDash val="solid"/>
-                      <a:round/>
-                      <a:headEnd type="none" w="med" len="med"/>
-                      <a:tailEnd type="none" w="med" len="med"/>
-                    </a:lnB>
-                    <a:solidFill>
-                      <a:srgbClr val="FFFFFF"/>
-                    </a:solidFill>
-                  </a:tcPr>
-                </a:tc>
-                <a:tc>
-                  <a:txBody>
-                    <a:bodyPr/>
-                    <a:lstStyle/>
-                    <a:p>
-                      <a:pPr algn="l" fontAlgn="ctr">
-                        <a:buNone/>
-                      </a:pPr>
-                      <a:r>
-                        <a:rPr lang="ko-KR" altLang="en-US" sz="1000" b="0" i="0" u="none" strike="noStrike" dirty="0">
-                          <a:solidFill>
-                            <a:srgbClr val="000000"/>
-                          </a:solidFill>
-                          <a:effectLst/>
-                          <a:latin typeface="맑은 고딕" panose="020B0503020000020004" pitchFamily="34" charset="-127"/>
-                          <a:ea typeface="맑은 고딕" panose="020B0503020000020004" pitchFamily="34" charset="-127"/>
-                          <a:cs typeface="맑은 고딕"/>
-                        </a:rPr>
-                        <a:t>위임 계약을 고친다</a:t>
+                        <a:t>의도한 제한인지 확인하고 위임 범위를 검토한다</a:t>
                       </a:r>
                     </a:p>
                   </a:txBody>
@@ -4517,7 +4229,7 @@
                 <a:latin typeface="맑은 고딕"/>
                 <a:ea typeface="맑은 고딕"/>
               </a:rPr>
-              <a:t>센서가 가리킨 실패를 </a:t>
+              <a:t>검사 실패가 곧 코드만의 문제라는 뜻은 아니다. </a:t>
             </a:r>
             <a:r>
               <a:rPr sz="1800" b="1">
@@ -4527,7 +4239,7 @@
                 <a:latin typeface="맑은 고딕"/>
                 <a:ea typeface="맑은 고딕"/>
               </a:rPr>
-              <a:t>원인이 된 결정까지</a:t>
+              <a:t>기대값·맥락·권한 경계</a:t>
             </a:r>
             <a:r>
               <a:rPr sz="1800" b="0">
@@ -4537,7 +4249,7 @@
                 <a:latin typeface="맑은 고딕"/>
                 <a:ea typeface="맑은 고딕"/>
               </a:rPr>
-              <a:t> 거슬러 올린다. 고치는 자리는 대개 코드가 아니다.</a:t>
+              <a:t>를 확인해 원인이 있는 부분을 수정한다.</a:t>
             </a:r>
           </a:p>
         </p:txBody>
@@ -4696,6 +4408,16 @@
               <a:buChar char=""/>
             </a:pPr>
             <a:r>
+              <a:rPr sz="1800" b="1">
+                <a:solidFill>
+                  <a:srgbClr val="000000"/>
+                </a:solidFill>
+                <a:latin typeface="맑은 고딕"/>
+                <a:ea typeface="맑은 고딕"/>
+              </a:rPr>
+              <a:t>입력 점검</a:t>
+            </a:r>
+            <a:r>
               <a:rPr sz="1800" b="0">
                 <a:solidFill>
                   <a:srgbClr val="000000"/>
@@ -4703,27 +4425,17 @@
                 <a:latin typeface="맑은 고딕"/>
                 <a:ea typeface="맑은 고딕"/>
               </a:rPr>
-              <a:t>순서가 중요하다. </a:t>
-            </a:r>
-            <a:r>
-              <a:rPr sz="1800" b="1">
-                <a:solidFill>
-                  <a:srgbClr val="000000"/>
-                </a:solidFill>
-                <a:latin typeface="맑은 고딕"/>
-                <a:ea typeface="맑은 고딕"/>
-              </a:rPr>
-              <a:t>기대값 → 맥락 → 경계</a:t>
-            </a:r>
-            <a:r>
-              <a:rPr sz="1800" b="0">
-                <a:solidFill>
-                  <a:srgbClr val="000000"/>
-                </a:solidFill>
-                <a:latin typeface="맑은 고딕"/>
-                <a:ea typeface="맑은 고딕"/>
-              </a:rPr>
-              <a:t>의 차례로 묻고, 코드는 그 결정이 고쳐진 뒤에 다시 만든다.</a:t>
+              <a:t> —</a:t>
+            </a:r>
+            <a:r>
+              <a:rPr sz="1600" b="0">
+                <a:solidFill>
+                  <a:srgbClr val="000000"/>
+                </a:solidFill>
+                <a:latin typeface="맑은 고딕"/>
+                <a:ea typeface="맑은 고딕"/>
+              </a:rPr>
+              <a:t> 기대값이 잘못되었다면 먼저 확정하고, 맥락과 위임 범위를 그 기준에 맞춘다.</a:t>
             </a:r>
           </a:p>
           <a:p>
@@ -4739,6 +4451,16 @@
               <a:buChar char=""/>
             </a:pPr>
             <a:r>
+              <a:rPr sz="1800" b="1">
+                <a:solidFill>
+                  <a:srgbClr val="000000"/>
+                </a:solidFill>
+                <a:latin typeface="맑은 고딕"/>
+                <a:ea typeface="맑은 고딕"/>
+              </a:rPr>
+              <a:t>구현 점검</a:t>
+            </a:r>
+            <a:r>
               <a:rPr sz="1800" b="0">
                 <a:solidFill>
                   <a:srgbClr val="000000"/>
@@ -4746,27 +4468,17 @@
                 <a:latin typeface="맑은 고딕"/>
                 <a:ea typeface="맑은 고딕"/>
               </a:rPr>
-              <a:t>고친 결정은 </a:t>
-            </a:r>
-            <a:r>
-              <a:rPr sz="1800" b="1">
-                <a:solidFill>
-                  <a:srgbClr val="000000"/>
-                </a:solidFill>
-                <a:latin typeface="맑은 고딕"/>
-                <a:ea typeface="맑은 고딕"/>
-              </a:rPr>
-              <a:t>다음 과제에서도</a:t>
-            </a:r>
-            <a:r>
-              <a:rPr sz="1800" b="0">
-                <a:solidFill>
-                  <a:srgbClr val="000000"/>
-                </a:solidFill>
-                <a:latin typeface="맑은 고딕"/>
-                <a:ea typeface="맑은 고딕"/>
-              </a:rPr>
-              <a:t> 같은 실패를 막는다. 코드만 고치면 그 효과가 없다.</a:t>
+              <a:t> —</a:t>
+            </a:r>
+            <a:r>
+              <a:rPr sz="1600" b="0">
+                <a:solidFill>
+                  <a:srgbClr val="000000"/>
+                </a:solidFill>
+                <a:latin typeface="맑은 고딕"/>
+                <a:ea typeface="맑은 고딕"/>
+              </a:rPr>
+              <a:t> 입력과 환경이 올바르면 코드와 검사 자체의 결함을 확인한다. 여전히 수행하기 어렵다면 작업을 나누거나 사람이 맡는다.</a:t>
             </a:r>
           </a:p>
           <a:p>
@@ -4782,6 +4494,16 @@
               <a:buChar char=""/>
             </a:pPr>
             <a:r>
+              <a:rPr sz="1800" b="1">
+                <a:solidFill>
+                  <a:srgbClr val="000000"/>
+                </a:solidFill>
+                <a:latin typeface="맑은 고딕"/>
+                <a:ea typeface="맑은 고딕"/>
+              </a:rPr>
+              <a:t>수정 후 검증</a:t>
+            </a:r>
+            <a:r>
               <a:rPr sz="1800" b="0">
                 <a:solidFill>
                   <a:srgbClr val="000000"/>
@@ -4789,27 +4511,17 @@
                 <a:latin typeface="맑은 고딕"/>
                 <a:ea typeface="맑은 고딕"/>
               </a:rPr>
-              <a:t>되돌릴 자리가 여럿이면 </a:t>
-            </a:r>
-            <a:r>
-              <a:rPr sz="1800" b="1">
-                <a:solidFill>
-                  <a:srgbClr val="000000"/>
-                </a:solidFill>
-                <a:latin typeface="맑은 고딕"/>
-                <a:ea typeface="맑은 고딕"/>
-              </a:rPr>
-              <a:t>가장 위의 것</a:t>
-            </a:r>
-            <a:r>
-              <a:rPr sz="1800" b="0">
-                <a:solidFill>
-                  <a:srgbClr val="000000"/>
-                </a:solidFill>
-                <a:latin typeface="맑은 고딕"/>
-                <a:ea typeface="맑은 고딕"/>
-              </a:rPr>
-              <a:t>부터 고친다. 명세가 틀린 채로 맥락을 고치면 둘 다 틀린다.</a:t>
+              <a:t> —</a:t>
+            </a:r>
+            <a:r>
+              <a:rPr sz="1600" b="0">
+                <a:solidFill>
+                  <a:srgbClr val="000000"/>
+                </a:solidFill>
+                <a:latin typeface="맑은 고딕"/>
+                <a:ea typeface="맑은 고딕"/>
+              </a:rPr>
+              <a:t> 고친 입력과 코드로 같은 수용 테스트를 실행해, 기대한 동작을 회복했는지 확인한다.</a:t>
             </a:r>
           </a:p>
         </p:txBody>
@@ -5042,7 +4754,7 @@
                 <a:latin typeface="맑은 고딕"/>
                 <a:ea typeface="맑은 고딕"/>
               </a:rPr>
-              <a:t>멈춤과 되돌림의 조건을 미리 그려 두면, 실패한 자리에서 </a:t>
+              <a:t>작업 상태 기계는 </a:t>
             </a:r>
             <a:r>
               <a:rPr sz="1800" b="1">
@@ -5052,7 +4764,7 @@
                 <a:latin typeface="맑은 고딕"/>
                 <a:ea typeface="맑은 고딕"/>
               </a:rPr>
-              <a:t>무엇을 할지 즉흥으로 정하지 않는다</a:t>
+              <a:t>진행·검증·사람 확인·종료의 조건</a:t>
             </a:r>
             <a:r>
               <a:rPr sz="1800" b="0">
@@ -5062,7 +4774,7 @@
                 <a:latin typeface="맑은 고딕"/>
                 <a:ea typeface="맑은 고딕"/>
               </a:rPr>
-              <a:t>.</a:t>
+              <a:t>을 정한다. 실패했을 때 계속 수정할지, 사람에게 넘길지 일관되게 판단할 수 있다.</a:t>
             </a:r>
           </a:p>
           <a:p>
@@ -5085,7 +4797,7 @@
                 <a:latin typeface="맑은 고딕"/>
                 <a:ea typeface="맑은 고딕"/>
               </a:rPr>
-              <a:t>두 가지 끝</a:t>
+              <a:t>완료와 중단</a:t>
             </a:r>
             <a:r>
               <a:rPr sz="1800" b="0">
@@ -5105,7 +4817,7 @@
                 <a:latin typeface="맑은 고딕"/>
                 <a:ea typeface="맑은 고딕"/>
               </a:rPr>
-              <a:t> 완료는 센서의 증거로, 중단은 사람의 판단으로 닿는다. 둘 다 정상이다.</a:t>
+              <a:t> 정한 검사를 통과하면 완료한다. 상한이나 멈출 조건에 닿으면 사람이 기록을 확인해 재개 또는 중단을 결정한다.</a:t>
             </a:r>
           </a:p>
           <a:p>
@@ -5128,7 +4840,7 @@
                 <a:latin typeface="맑은 고딕"/>
                 <a:ea typeface="맑은 고딕"/>
               </a:rPr>
-              <a:t>사람 확인에서 갈린다</a:t>
+              <a:t>재개와 재위임</a:t>
             </a:r>
             <a:r>
               <a:rPr sz="1800" b="0">
@@ -5148,47 +4860,7 @@
                 <a:latin typeface="맑은 고딕"/>
                 <a:ea typeface="맑은 고딕"/>
               </a:rPr>
-              <a:t> 환경 오류면 이어 가고, 그 밖의 유형이면 결정을 고쳐 </a:t>
-            </a:r>
-            <a:r>
-              <a:rPr sz="1600" b="1">
-                <a:solidFill>
-                  <a:srgbClr val="000000"/>
-                </a:solidFill>
-                <a:latin typeface="맑은 고딕"/>
-                <a:ea typeface="맑은 고딕"/>
-              </a:rPr>
-              <a:t>새 과제로 다시 맡긴다</a:t>
-            </a:r>
-            <a:r>
-              <a:rPr sz="1600" b="0">
-                <a:solidFill>
-                  <a:srgbClr val="000000"/>
-                </a:solidFill>
-                <a:latin typeface="맑은 고딕"/>
-                <a:ea typeface="맑은 고딕"/>
-              </a:rPr>
-              <a:t>. 상태를 적어 두면 에이전트의 보고도 </a:t>
-            </a:r>
-            <a:r>
-              <a:rPr sz="1600" b="1">
-                <a:solidFill>
-                  <a:srgbClr val="000000"/>
-                </a:solidFill>
-                <a:latin typeface="맑은 고딕"/>
-                <a:ea typeface="맑은 고딕"/>
-              </a:rPr>
-              <a:t>같은 말</a:t>
-            </a:r>
-            <a:r>
-              <a:rPr sz="1600" b="0">
-                <a:solidFill>
-                  <a:srgbClr val="000000"/>
-                </a:solidFill>
-                <a:latin typeface="맑은 고딕"/>
-                <a:ea typeface="맑은 고딕"/>
-              </a:rPr>
-              <a:t>로 돌아온다.</a:t>
+              <a:t> 환경을 복구한 경우에는 저장된 진행에서 이어 간다. 명세나 맥락을 바꿨다면 기존 결과의 재사용 범위를 확인하고, 고친 입력으로 새 과제를 맡긴다.</a:t>
             </a:r>
           </a:p>
         </p:txBody>
@@ -5482,7 +5154,7 @@
                 <a:latin typeface="맑은 고딕"/>
                 <a:ea typeface="맑은 고딕"/>
               </a:rPr>
-              <a:t>에이전트는 저장소에 있는 것을 보고 배운다. 그래서 </a:t>
+              <a:t>기존의 잘못된 패턴이 반복되면, 코드가 </a:t>
             </a:r>
             <a:r>
               <a:rPr sz="1800" b="1">
@@ -5492,7 +5164,7 @@
                 <a:latin typeface="맑은 고딕"/>
                 <a:ea typeface="맑은 고딕"/>
               </a:rPr>
-              <a:t>한 번 들어온 나쁜 패턴은 복제된다</a:t>
+              <a:t>의도한 구조와 규칙에서 점차 벗어날 수 있다</a:t>
             </a:r>
             <a:r>
               <a:rPr sz="1800" b="0">
@@ -5525,7 +5197,7 @@
                 <a:latin typeface="맑은 고딕"/>
                 <a:ea typeface="맑은 고딕"/>
               </a:rPr>
-              <a:t>에이전트는 저장소에 이미 있는 패턴을 복제한다 — </a:t>
+              <a:t>Codex는 저장소의 </a:t>
             </a:r>
             <a:r>
               <a:rPr sz="1800" b="1">
@@ -5535,7 +5207,7 @@
                 <a:latin typeface="맑은 고딕"/>
                 <a:ea typeface="맑은 고딕"/>
               </a:rPr>
-              <a:t>고르지 않거나 최선이 아닌 것까지</a:t>
+              <a:t>일관되지 않거나 바람직하지 않은 패턴까지</a:t>
             </a:r>
             <a:r>
               <a:rPr sz="1800" b="0">
@@ -5545,7 +5217,7 @@
                 <a:latin typeface="맑은 고딕"/>
                 <a:ea typeface="맑은 고딕"/>
               </a:rPr>
-              <a:t> 복제하므로 시간이 지나면 반드시 </a:t>
+              <a:t> 복제하므로, 시간이 지나면 필연적으로 </a:t>
             </a:r>
             <a:r>
               <a:rPr sz="1800" b="1">
@@ -5565,7 +5237,7 @@
                 <a:latin typeface="맑은 고딕"/>
                 <a:ea typeface="맑은 고딕"/>
               </a:rPr>
-              <a:t>로 이어진다</a:t>
+              <a:t>가 생긴다</a:t>
             </a:r>
             <a:r>
               <a:rPr sz="1000" b="0">
@@ -5585,7 +5257,27 @@
                 <a:latin typeface="맑은 고딕"/>
                 <a:ea typeface="맑은 고딕"/>
               </a:rPr>
-              <a:t>"Codex replicates patterns that already exist in the repository—even uneven or suboptimal ones. Over time, this inevitably leads to drift.", [Lopopolo 2026]</a:t>
+              <a:t>"Codex replicates patterns that already exist in the repository—even uneven or suboptimal ones. Over time, this inevitably leads to drift."</a:t>
+            </a:r>
+            <a:r>
+              <a:rPr sz="1000" b="0">
+                <a:solidFill>
+                  <a:srgbClr val="000000"/>
+                </a:solidFill>
+                <a:latin typeface="맑은 고딕"/>
+                <a:ea typeface="맑은 고딕"/>
+              </a:rPr>
+              <a:t>, </a:t>
+            </a:r>
+            <a:r>
+              <a:rPr sz="1000" b="0">
+                <a:solidFill>
+                  <a:srgbClr val="000000"/>
+                </a:solidFill>
+                <a:latin typeface="맑은 고딕"/>
+                <a:ea typeface="맑은 고딕"/>
+              </a:rPr>
+              <a:t>[Lopopolo 2026]</a:t>
             </a:r>
           </a:p>
           <a:p>
@@ -5618,7 +5310,7 @@
                 <a:latin typeface="맑은 고딕"/>
                 <a:ea typeface="맑은 고딕"/>
               </a:rPr>
-              <a:t>(주의 20%)</a:t>
+              <a:t>(주간 업무의 20%)</a:t>
             </a:r>
             <a:r>
               <a:rPr sz="1600" b="0">
@@ -5628,7 +5320,7 @@
                 <a:latin typeface="맑은 고딕"/>
                 <a:ea typeface="맑은 고딕"/>
               </a:rPr>
-              <a:t>을 AI가 남긴 지저분한 코드를 치우는 데 썼지만 당연하게도 그 방식은 </a:t>
+              <a:t>을 AI가 남긴 조잡한 코드 정리에 썼지만, </a:t>
             </a:r>
             <a:r>
               <a:rPr sz="1600" b="1">
@@ -5638,7 +5330,7 @@
                 <a:latin typeface="맑은 고딕"/>
                 <a:ea typeface="맑은 고딕"/>
               </a:rPr>
-              <a:t>확장되지 않았다</a:t>
+              <a:t>작업량이 늘자 유지할 수 없었다</a:t>
             </a:r>
             <a:r>
               <a:rPr sz="1000" b="0">
@@ -5721,7 +5413,7 @@
                 <a:latin typeface="맑은 고딕"/>
                 <a:ea typeface="맑은 고딕"/>
               </a:rPr>
-              <a:t>을 저장소에 직접 적어 넣고 </a:t>
+              <a:t>을 저장소에 명시하고, </a:t>
             </a:r>
             <a:r>
               <a:rPr sz="1600" b="1">
@@ -5731,7 +5423,7 @@
                 <a:latin typeface="맑은 고딕"/>
                 <a:ea typeface="맑은 고딕"/>
               </a:rPr>
-              <a:t>주기적으로 정리하는 과정</a:t>
+              <a:t>정기적으로 코드를 정리하는 절차</a:t>
             </a:r>
             <a:r>
               <a:rPr sz="1600" b="0">
@@ -5741,7 +5433,7 @@
                 <a:latin typeface="맑은 고딕"/>
                 <a:ea typeface="맑은 고딕"/>
               </a:rPr>
-              <a:t>을 만들었다</a:t>
+              <a:t>를 만들었다</a:t>
             </a:r>
             <a:r>
               <a:rPr sz="1000" b="0">
@@ -5797,6 +5489,16 @@
               <a:buChar char=""/>
             </a:pPr>
             <a:r>
+              <a:rPr sz="1800" b="1">
+                <a:solidFill>
+                  <a:srgbClr val="000000"/>
+                </a:solidFill>
+                <a:latin typeface="맑은 고딕"/>
+                <a:ea typeface="맑은 고딕"/>
+              </a:rPr>
+              <a:t>발견의 어려움</a:t>
+            </a:r>
+            <a:r>
               <a:rPr sz="1800" b="0">
                 <a:solidFill>
                   <a:srgbClr val="000000"/>
@@ -5804,27 +5506,17 @@
                 <a:latin typeface="맑은 고딕"/>
                 <a:ea typeface="맑은 고딕"/>
               </a:rPr>
-              <a:t>표류는 실패로 드러나지 않는다. 테스트는 녹색이고 </a:t>
-            </a:r>
-            <a:r>
-              <a:rPr sz="1800" b="1">
-                <a:solidFill>
-                  <a:srgbClr val="000000"/>
-                </a:solidFill>
-                <a:latin typeface="맑은 고딕"/>
-                <a:ea typeface="맑은 고딕"/>
-              </a:rPr>
-              <a:t>코드만 조금씩 나빠진다</a:t>
-            </a:r>
-            <a:r>
-              <a:rPr sz="1800" b="0">
-                <a:solidFill>
-                  <a:srgbClr val="000000"/>
-                </a:solidFill>
-                <a:latin typeface="맑은 고딕"/>
-                <a:ea typeface="맑은 고딕"/>
-              </a:rPr>
-              <a:t>.</a:t>
+              <a:t> —</a:t>
+            </a:r>
+            <a:r>
+              <a:rPr sz="1600" b="0">
+                <a:solidFill>
+                  <a:srgbClr val="000000"/>
+                </a:solidFill>
+                <a:latin typeface="맑은 고딕"/>
+                <a:ea typeface="맑은 고딕"/>
+              </a:rPr>
+              <a:t> 기능 테스트가 통과해도 중복이나 불필요한 의존은 늘어날 수 있다.</a:t>
             </a:r>
           </a:p>
           <a:p>
@@ -5840,6 +5532,16 @@
               <a:buChar char=""/>
             </a:pPr>
             <a:r>
+              <a:rPr sz="1800" b="1">
+                <a:solidFill>
+                  <a:srgbClr val="000000"/>
+                </a:solidFill>
+                <a:latin typeface="맑은 고딕"/>
+                <a:ea typeface="맑은 고딕"/>
+              </a:rPr>
+              <a:t>정리 방법</a:t>
+            </a:r>
+            <a:r>
               <a:rPr sz="1800" b="0">
                 <a:solidFill>
                   <a:srgbClr val="000000"/>
@@ -5847,47 +5549,17 @@
                 <a:latin typeface="맑은 고딕"/>
                 <a:ea typeface="맑은 고딕"/>
               </a:rPr>
-              <a:t>사람이 손으로 치우는 방식은 에이전트의 속도를 따라가지 못한다. 규칙은 </a:t>
-            </a:r>
-            <a:r>
-              <a:rPr sz="1800" b="1">
-                <a:solidFill>
-                  <a:srgbClr val="000000"/>
-                </a:solidFill>
-                <a:latin typeface="맑은 고딕"/>
-                <a:ea typeface="맑은 고딕"/>
-              </a:rPr>
-              <a:t>맥락 파일과 센서</a:t>
-            </a:r>
-            <a:r>
-              <a:rPr sz="1800" b="0">
-                <a:solidFill>
-                  <a:srgbClr val="000000"/>
-                </a:solidFill>
-                <a:latin typeface="맑은 고딕"/>
-                <a:ea typeface="맑은 고딕"/>
-              </a:rPr>
-              <a:t>에 적고, 정리는 </a:t>
-            </a:r>
-            <a:r>
-              <a:rPr sz="1800" b="1">
-                <a:solidFill>
-                  <a:srgbClr val="000000"/>
-                </a:solidFill>
-                <a:latin typeface="맑은 고딕"/>
-                <a:ea typeface="맑은 고딕"/>
-              </a:rPr>
-              <a:t>주기로 돌린다</a:t>
-            </a:r>
-            <a:r>
-              <a:rPr sz="1800" b="0">
-                <a:solidFill>
-                  <a:srgbClr val="000000"/>
-                </a:solidFill>
-                <a:latin typeface="맑은 고딕"/>
-                <a:ea typeface="맑은 고딕"/>
-              </a:rPr>
-              <a:t>.</a:t>
+              <a:t> —</a:t>
+            </a:r>
+            <a:r>
+              <a:rPr sz="1600" b="0">
+                <a:solidFill>
+                  <a:srgbClr val="000000"/>
+                </a:solidFill>
+                <a:latin typeface="맑은 고딕"/>
+                <a:ea typeface="맑은 고딕"/>
+              </a:rPr>
+              <a:t> 규칙을 문서와 검사에 반영하고, 작은 정리 작업을 주기적으로 수행한다.</a:t>
             </a:r>
           </a:p>
           <a:p>
@@ -5903,6 +5575,16 @@
               <a:buChar char=""/>
             </a:pPr>
             <a:r>
+              <a:rPr sz="1800" b="1">
+                <a:solidFill>
+                  <a:srgbClr val="000000"/>
+                </a:solidFill>
+                <a:latin typeface="맑은 고딕"/>
+                <a:ea typeface="맑은 고딕"/>
+              </a:rPr>
+              <a:t>"주문한다"의 예</a:t>
+            </a:r>
+            <a:r>
               <a:rPr sz="1800" b="0">
                 <a:solidFill>
                   <a:srgbClr val="000000"/>
@@ -5910,7 +5592,17 @@
                 <a:latin typeface="맑은 고딕"/>
                 <a:ea typeface="맑은 고딕"/>
               </a:rPr>
-              <a:t>"주문한다"에서 정리의 대상은 중복된 테스트 대역과 쓰이지 않는 설정이다. 한 번에 하나씩 작업 단위로 맡긴다.</a:t>
+              <a:t> —</a:t>
+            </a:r>
+            <a:r>
+              <a:rPr sz="1600" b="0">
+                <a:solidFill>
+                  <a:srgbClr val="000000"/>
+                </a:solidFill>
+                <a:latin typeface="맑은 고딕"/>
+                <a:ea typeface="맑은 고딕"/>
+              </a:rPr>
+              <a:t> 중복된 테스트 대역과 미사용 설정을 정리한 뒤 수용 테스트로 기존 동작을 확인한다.</a:t>
             </a:r>
           </a:p>
         </p:txBody>
@@ -6096,7 +5788,7 @@
           </p:nvPr>
         </p:nvGraphicFramePr>
         <p:xfrm>
-          <a:off x="1579436" y="2112010"/>
+          <a:off x="1579436" y="2386330"/>
           <a:ext cx="5971540" cy="3873500"/>
         </p:xfrm>
         <a:graphic>
@@ -6259,7 +5951,7 @@
                           <a:ea typeface="맑은 고딕" panose="020B0503020000020004" pitchFamily="34" charset="-127"/>
                           <a:cs typeface="맑은 고딕"/>
                         </a:rPr>
-                        <a:t>막는 자리</a:t>
+                        <a:t>방지 방법</a:t>
                       </a:r>
                     </a:p>
                   </a:txBody>
@@ -6835,7 +6527,7 @@
         <p:spPr>
           <a:xfrm>
             <a:off x="365760" y="960120"/>
-            <a:ext cx="8412480" cy="781278"/>
+            <a:ext cx="8412480" cy="1038316"/>
           </a:xfrm>
           <a:prstGeom prst="rect">
             <a:avLst/>
@@ -6865,7 +6557,7 @@
                 <a:latin typeface="맑은 고딕"/>
                 <a:ea typeface="맑은 고딕"/>
               </a:rPr>
-              <a:t>상한 없는 재시도는 </a:t>
+              <a:t>원인을 확인하지 않고 재시도를 반복하면 </a:t>
             </a:r>
             <a:r>
               <a:rPr sz="1800" b="1">
@@ -6875,7 +6567,7 @@
                 <a:latin typeface="맑은 고딕"/>
                 <a:ea typeface="맑은 고딕"/>
               </a:rPr>
-              <a:t>비용만 쌓는다</a:t>
+              <a:t>시간과 비용을 낭비할 수 있다</a:t>
             </a:r>
             <a:r>
               <a:rPr sz="1800" b="0">
@@ -6885,7 +6577,7 @@
                 <a:latin typeface="맑은 고딕"/>
                 <a:ea typeface="맑은 고딕"/>
               </a:rPr>
-              <a:t>. 그보다 나쁜 것은 실패를 통과로 바꾸는 것이다.</a:t>
+              <a:t>. 통과시키려고 기대값을 바꾸거나 테스트를 건너뛰면 문제 자체가 숨겨진다.</a:t>
             </a:r>
           </a:p>
         </p:txBody>
@@ -6969,7 +6661,7 @@
         </p:nvSpPr>
         <p:spPr>
           <a:xfrm>
-            <a:off x="365760" y="1813560"/>
+            <a:off x="365760" y="2087880"/>
             <a:ext cx="8412480" cy="222250"/>
           </a:xfrm>
           <a:prstGeom prst="rect">
@@ -6999,7 +6691,7 @@
                 <a:latin typeface="맑은 고딕"/>
                 <a:ea typeface="맑은 고딕"/>
               </a:rPr>
-              <a:t>두 관행과 막는 자리</a:t>
+              <a:t>실패를 반복하거나 숨기는 관행과 방지 방법</a:t>
             </a:r>
           </a:p>
         </p:txBody>
@@ -7018,7 +6710,7 @@
         </p:nvSpPr>
         <p:spPr>
           <a:xfrm>
-            <a:off x="365760" y="3492610"/>
+            <a:off x="365760" y="3766930"/>
             <a:ext cx="8412480" cy="1435556"/>
           </a:xfrm>
           <a:prstGeom prst="rect">
@@ -7044,6 +6736,16 @@
               <a:buChar char=""/>
             </a:pPr>
             <a:r>
+              <a:rPr sz="1800" b="1">
+                <a:solidFill>
+                  <a:srgbClr val="000000"/>
+                </a:solidFill>
+                <a:latin typeface="맑은 고딕"/>
+                <a:ea typeface="맑은 고딕"/>
+              </a:rPr>
+              <a:t>검증 기준의 보호</a:t>
+            </a:r>
+            <a:r>
               <a:rPr sz="1800" b="0">
                 <a:solidFill>
                   <a:srgbClr val="000000"/>
@@ -7051,27 +6753,17 @@
                 <a:latin typeface="맑은 고딕"/>
                 <a:ea typeface="맑은 고딕"/>
               </a:rPr>
-              <a:t>셋 다 </a:t>
-            </a:r>
-            <a:r>
-              <a:rPr sz="1800" b="1">
-                <a:solidFill>
-                  <a:srgbClr val="000000"/>
-                </a:solidFill>
-                <a:latin typeface="맑은 고딕"/>
-                <a:ea typeface="맑은 고딕"/>
-              </a:rPr>
-              <a:t>사람이 보기 전에</a:t>
-            </a:r>
-            <a:r>
-              <a:rPr sz="1800" b="0">
-                <a:solidFill>
-                  <a:srgbClr val="000000"/>
-                </a:solidFill>
-                <a:latin typeface="맑은 고딕"/>
-                <a:ea typeface="맑은 고딕"/>
-              </a:rPr>
-              <a:t> 일어난다. 그래서 가드레일과 센서가 겹쳐 있어야 한다.</a:t>
+              <a:t> —</a:t>
+            </a:r>
+            <a:r>
+              <a:rPr sz="1600" b="0">
+                <a:solidFill>
+                  <a:srgbClr val="000000"/>
+                </a:solidFill>
+                <a:latin typeface="맑은 고딕"/>
+                <a:ea typeface="맑은 고딕"/>
+              </a:rPr>
+              <a:t> 기대값 변경과 테스트 비활성화를 제한하고, 건너뛴 검사가 있는지도 확인한다.</a:t>
             </a:r>
           </a:p>
           <a:p>
@@ -7087,6 +6779,16 @@
               <a:buChar char=""/>
             </a:pPr>
             <a:r>
+              <a:rPr sz="1800" b="1">
+                <a:solidFill>
+                  <a:srgbClr val="000000"/>
+                </a:solidFill>
+                <a:latin typeface="맑은 고딕"/>
+                <a:ea typeface="맑은 고딕"/>
+              </a:rPr>
+              <a:t>실행 비용의 확인</a:t>
+            </a:r>
+            <a:r>
               <a:rPr sz="1800" b="0">
                 <a:solidFill>
                   <a:srgbClr val="000000"/>
@@ -7094,27 +6796,17 @@
                 <a:latin typeface="맑은 고딕"/>
                 <a:ea typeface="맑은 고딕"/>
               </a:rPr>
-              <a:t>재시도의 기록이 없으면 무한 재시도는 </a:t>
-            </a:r>
-            <a:r>
-              <a:rPr sz="1800" b="1">
-                <a:solidFill>
-                  <a:srgbClr val="000000"/>
-                </a:solidFill>
-                <a:latin typeface="맑은 고딕"/>
-                <a:ea typeface="맑은 고딕"/>
-              </a:rPr>
-              <a:t>비싼 성공</a:t>
-            </a:r>
-            <a:r>
-              <a:rPr sz="1800" b="0">
-                <a:solidFill>
-                  <a:srgbClr val="000000"/>
-                </a:solidFill>
-                <a:latin typeface="맑은 고딕"/>
-                <a:ea typeface="맑은 고딕"/>
-              </a:rPr>
-              <a:t>처럼 보인다. 멈춘 횟수와 이유를 남긴다.</a:t>
+              <a:t> —</a:t>
+            </a:r>
+            <a:r>
+              <a:rPr sz="1600" b="0">
+                <a:solidFill>
+                  <a:srgbClr val="000000"/>
+                </a:solidFill>
+                <a:latin typeface="맑은 고딕"/>
+                <a:ea typeface="맑은 고딕"/>
+              </a:rPr>
+              <a:t> 최종 통과 여부와 함께 시도 횟수·소요 시간·중단 이유를 남긴다. 마지막 성공만으로 전체 실행을 평가하지 않는다.</a:t>
             </a:r>
           </a:p>
         </p:txBody>
@@ -7354,7 +7046,7 @@
                 <a:latin typeface="맑은 고딕"/>
                 <a:ea typeface="맑은 고딕"/>
               </a:rPr>
-              <a:t>개발에서는 되는데 </a:t>
+              <a:t>중단되었을 때 진행 상황을 복원할 수 없는 작업은 </a:t>
             </a:r>
             <a:r>
               <a:rPr sz="1800" b="1">
@@ -7364,7 +7056,7 @@
                 <a:latin typeface="맑은 고딕"/>
                 <a:ea typeface="맑은 고딕"/>
               </a:rPr>
-              <a:t>운영에서 무너지는</a:t>
+              <a:t>실행 시간이 길어질수록 복구 부담이 커진다</a:t>
             </a:r>
             <a:r>
               <a:rPr sz="1800" b="0">
@@ -7374,7 +7066,7 @@
                 <a:latin typeface="맑은 고딕"/>
                 <a:ea typeface="맑은 고딕"/>
               </a:rPr>
-              <a:t> 흐름이 있다. 끊기면 진행이 사라지는 작업이다.</a:t>
+              <a:t>.</a:t>
             </a:r>
           </a:p>
           <a:p>
@@ -7457,7 +7149,27 @@
                 <a:latin typeface="맑은 고딕"/>
                 <a:ea typeface="맑은 고딕"/>
               </a:rPr>
-              <a:t>"Ignoring durability in agent workflows is an anti-pattern we've seen across many teams, resulting in systems that work in development but fail in production.", [Thoughtworks 2026]</a:t>
+              <a:t>"Ignoring durability in agent workflows is an anti-pattern we've seen across many teams, resulting in systems that work in development but fail in production."</a:t>
+            </a:r>
+            <a:r>
+              <a:rPr sz="1000" b="0">
+                <a:solidFill>
+                  <a:srgbClr val="000000"/>
+                </a:solidFill>
+                <a:latin typeface="맑은 고딕"/>
+                <a:ea typeface="맑은 고딕"/>
+              </a:rPr>
+              <a:t>, </a:t>
+            </a:r>
+            <a:r>
+              <a:rPr sz="1000" b="0">
+                <a:solidFill>
+                  <a:srgbClr val="000000"/>
+                </a:solidFill>
+                <a:latin typeface="맑은 고딕"/>
+                <a:ea typeface="맑은 고딕"/>
+              </a:rPr>
+              <a:t>[Thoughtworks 2026]</a:t>
             </a:r>
           </a:p>
           <a:p>
@@ -7576,6 +7288,16 @@
               <a:buChar char=""/>
             </a:pPr>
             <a:r>
+              <a:rPr sz="1800" b="1">
+                <a:solidFill>
+                  <a:srgbClr val="000000"/>
+                </a:solidFill>
+                <a:latin typeface="맑은 고딕"/>
+                <a:ea typeface="맑은 고딕"/>
+              </a:rPr>
+              <a:t>중단에 대한 대비</a:t>
+            </a:r>
+            <a:r>
               <a:rPr sz="1800" b="0">
                 <a:solidFill>
                   <a:srgbClr val="000000"/>
@@ -7583,47 +7305,17 @@
                 <a:latin typeface="맑은 고딕"/>
                 <a:ea typeface="맑은 고딕"/>
               </a:rPr>
-              <a:t>끊김은 네트워크·시간 초과·사람의 중단으로 온다. </a:t>
-            </a:r>
-            <a:r>
-              <a:rPr sz="1800" b="1">
-                <a:solidFill>
-                  <a:srgbClr val="000000"/>
-                </a:solidFill>
-                <a:latin typeface="맑은 고딕"/>
-                <a:ea typeface="맑은 고딕"/>
-              </a:rPr>
-              <a:t>다시 돌리면 되는 작업</a:t>
-            </a:r>
-            <a:r>
-              <a:rPr sz="1800" b="0">
-                <a:solidFill>
-                  <a:srgbClr val="000000"/>
-                </a:solidFill>
-                <a:latin typeface="맑은 고딕"/>
-                <a:ea typeface="맑은 고딕"/>
-              </a:rPr>
-              <a:t>과 </a:t>
-            </a:r>
-            <a:r>
-              <a:rPr sz="1800" b="1">
-                <a:solidFill>
-                  <a:srgbClr val="000000"/>
-                </a:solidFill>
-                <a:latin typeface="맑은 고딕"/>
-                <a:ea typeface="맑은 고딕"/>
-              </a:rPr>
-              <a:t>처음부터 해야 하는 작업</a:t>
-            </a:r>
-            <a:r>
-              <a:rPr sz="1800" b="0">
-                <a:solidFill>
-                  <a:srgbClr val="000000"/>
-                </a:solidFill>
-                <a:latin typeface="맑은 고딕"/>
-                <a:ea typeface="맑은 고딕"/>
-              </a:rPr>
-              <a:t>의 값은 다르다.</a:t>
+              <a:t> —</a:t>
+            </a:r>
+            <a:r>
+              <a:rPr sz="1600" b="0">
+                <a:solidFill>
+                  <a:srgbClr val="000000"/>
+                </a:solidFill>
+                <a:latin typeface="맑은 고딕"/>
+                <a:ea typeface="맑은 고딕"/>
+              </a:rPr>
+              <a:t> 네트워크 오류·시간 초과·사람의 중단에 대비해 코드와 진행 기록을 저장한다. 재개할 때 이미 완료한 작업을 확인한다.</a:t>
             </a:r>
           </a:p>
           <a:p>
@@ -7639,6 +7331,16 @@
               <a:buChar char=""/>
             </a:pPr>
             <a:r>
+              <a:rPr sz="1800" b="1">
+                <a:solidFill>
+                  <a:srgbClr val="000000"/>
+                </a:solidFill>
+                <a:latin typeface="맑은 고딕"/>
+                <a:ea typeface="맑은 고딕"/>
+              </a:rPr>
+              <a:t>재개에 필요한 이해</a:t>
+            </a:r>
+            <a:r>
               <a:rPr sz="1800" b="0">
                 <a:solidFill>
                   <a:srgbClr val="000000"/>
@@ -7646,27 +7348,17 @@
                 <a:latin typeface="맑은 고딕"/>
                 <a:ea typeface="맑은 고딕"/>
               </a:rPr>
-              <a:t>속도가 올라가면 사람이 </a:t>
-            </a:r>
-            <a:r>
-              <a:rPr sz="1800" b="1">
-                <a:solidFill>
-                  <a:srgbClr val="000000"/>
-                </a:solidFill>
-                <a:latin typeface="맑은 고딕"/>
-                <a:ea typeface="맑은 고딕"/>
-              </a:rPr>
-              <a:t>코드를 모르는 채로</a:t>
-            </a:r>
-            <a:r>
-              <a:rPr sz="1800" b="0">
-                <a:solidFill>
-                  <a:srgbClr val="000000"/>
-                </a:solidFill>
-                <a:latin typeface="맑은 고딕"/>
-                <a:ea typeface="맑은 고딕"/>
-              </a:rPr>
-              <a:t> 쌓인다. 정리와 리뷰를 같이 올리지 않으면 다음 과제의 판단이 흐려진다.</a:t>
+              <a:t> —</a:t>
+            </a:r>
+            <a:r>
+              <a:rPr sz="1600" b="0">
+                <a:solidFill>
+                  <a:srgbClr val="000000"/>
+                </a:solidFill>
+                <a:latin typeface="맑은 고딕"/>
+                <a:ea typeface="맑은 고딕"/>
+              </a:rPr>
+              <a:t> 기록뿐 아니라 설계 의도도 남아 있어야 한다. 생성된 코드를 검토하지 않으면, 다음 사람이 변경의 이유와 영향을 파악하기 어렵다.</a:t>
             </a:r>
           </a:p>
         </p:txBody>
@@ -7899,7 +7591,7 @@
                 <a:latin typeface="맑은 고딕"/>
                 <a:ea typeface="맑은 고딕"/>
               </a:rPr>
-              <a:t>실습 9의 하네스 배치로 </a:t>
+              <a:t>실습 9의 하네스로 </a:t>
             </a:r>
             <a:r>
               <a:rPr sz="1600" b="1">
@@ -7919,7 +7611,7 @@
                 <a:latin typeface="맑은 고딕"/>
                 <a:ea typeface="맑은 고딕"/>
               </a:rPr>
-              <a:t>를 진행하고, 드러난 실패를 LLM과 함께 진단해 되돌릴 자리를 정하고 점검 항목으로 완성하십시오.</a:t>
+              <a:t>를 진행하고, 실행 기록과 입력을 LLM에 제공해 실패 원인과 복구 방법을 검토하십시오.</a:t>
             </a:r>
           </a:p>
           <a:p>
@@ -8015,6 +7707,26 @@
               </a:rPr>
               <a:t>작업 명세서</a:t>
             </a:r>
+            <a:r>
+              <a:rPr sz="1400" b="0">
+                <a:solidFill>
+                  <a:srgbClr val="000000"/>
+                </a:solidFill>
+                <a:latin typeface="맑은 고딕"/>
+                <a:ea typeface="맑은 고딕"/>
+              </a:rPr>
+              <a:t>, </a:t>
+            </a:r>
+            <a:r>
+              <a:rPr sz="1400" b="1">
+                <a:solidFill>
+                  <a:srgbClr val="000000"/>
+                </a:solidFill>
+                <a:latin typeface="맑은 고딕"/>
+                <a:ea typeface="맑은 고딕"/>
+              </a:rPr>
+              <a:t>실패한 실행의 테스트 출력·도구 호출 기록</a:t>
+            </a:r>
           </a:p>
           <a:p>
             <a:pPr lvl="2" marL="723900" indent="-368300">
@@ -8057,7 +7769,7 @@
                 <a:latin typeface="맑은 고딕"/>
                 <a:ea typeface="맑은 고딕"/>
               </a:rPr>
-              <a:t>① "배송지를 변경한다를 맡겼더니 </a:t>
+              <a:t>① "'배송지를 변경한다'의 </a:t>
             </a:r>
             <a:r>
               <a:rPr sz="1400" b="1">
@@ -8067,7 +7779,7 @@
                 <a:latin typeface="맑은 고딕"/>
                 <a:ea typeface="맑은 고딕"/>
               </a:rPr>
-              <a:t>회차 상태별 적용이 틀렸다</a:t>
+              <a:t>실행 기록과 입력</a:t>
             </a:r>
             <a:r>
               <a:rPr sz="1400" b="0">
@@ -8077,7 +7789,7 @@
                 <a:latin typeface="맑은 고딕"/>
                 <a:ea typeface="맑은 고딕"/>
               </a:rPr>
-              <a:t>. 이 실패를 명세 결함·맥락 누락·환경 오류·모델 한계로 </a:t>
+              <a:t>을 비교해 실패 원인을 진단해줘. </a:t>
             </a:r>
             <a:r>
               <a:rPr sz="1400" b="1">
@@ -8087,7 +7799,7 @@
                 <a:latin typeface="맑은 고딕"/>
                 <a:ea typeface="맑은 고딕"/>
               </a:rPr>
-              <a:t>진단하고 근거</a:t>
+              <a:t>관찰한 사실과 추정을 구분</a:t>
             </a:r>
             <a:r>
               <a:rPr sz="1400" b="0">
@@ -8097,7 +7809,7 @@
                 <a:latin typeface="맑은 고딕"/>
                 <a:ea typeface="맑은 고딕"/>
               </a:rPr>
-              <a:t>를 적어줘."</a:t>
+              <a:t>하고, 근거가 없으면 추가로 확인할 것을 적어줘."</a:t>
             </a:r>
           </a:p>
           <a:p>
@@ -8118,7 +7830,7 @@
                 <a:latin typeface="맑은 고딕"/>
                 <a:ea typeface="맑은 고딕"/>
               </a:rPr>
-              <a:t>② "진단한 실패마다 </a:t>
+              <a:t>② "실패마다 </a:t>
             </a:r>
             <a:r>
               <a:rPr sz="1400" b="1">
@@ -8128,17 +7840,7 @@
                 <a:latin typeface="맑은 고딕"/>
                 <a:ea typeface="맑은 고딕"/>
               </a:rPr>
-              <a:t>되돌릴 자리</a:t>
-            </a:r>
-            <a:r>
-              <a:rPr sz="1000" b="0">
-                <a:solidFill>
-                  <a:srgbClr val="000000"/>
-                </a:solidFill>
-                <a:latin typeface="맑은 고딕"/>
-                <a:ea typeface="맑은 고딕"/>
-              </a:rPr>
-              <a:t>(명세·맥락·경계·하네스)</a:t>
+              <a:t>수정할 입력·코드·환경과 재검증 방법</a:t>
             </a:r>
             <a:r>
               <a:rPr sz="1400" b="0">
@@ -8148,27 +7850,7 @@
                 <a:latin typeface="맑은 고딕"/>
                 <a:ea typeface="맑은 고딕"/>
               </a:rPr>
-              <a:t>와 다시 맡길 입력을 적고, 작업의 </a:t>
-            </a:r>
-            <a:r>
-              <a:rPr sz="1400" b="1">
-                <a:solidFill>
-                  <a:srgbClr val="000000"/>
-                </a:solidFill>
-                <a:latin typeface="맑은 고딕"/>
-                <a:ea typeface="맑은 고딕"/>
-              </a:rPr>
-              <a:t>상태와 전이</a:t>
-            </a:r>
-            <a:r>
-              <a:rPr sz="1400" b="0">
-                <a:solidFill>
-                  <a:srgbClr val="000000"/>
-                </a:solidFill>
-                <a:latin typeface="맑은 고딕"/>
-                <a:ea typeface="맑은 고딕"/>
-              </a:rPr>
-              <a:t>를 상태 기계로 그려줘."</a:t>
+              <a:t>을 적고, 재개·중단 조건을 작업 상태 기계로 그려줘."</a:t>
             </a:r>
           </a:p>
           <a:p>
@@ -8242,7 +7924,7 @@
                 <a:latin typeface="맑은 고딕"/>
                 <a:ea typeface="맑은 고딕"/>
               </a:rPr>
-              <a:t> 다시 돌리면 달라지는지로 환경 오류를 먼저 갈랐는가?</a:t>
+              <a:t> 도구 오류와 입력의 누락·불일치를 기록으로 확인했는가?</a:t>
             </a:r>
           </a:p>
           <a:p>
@@ -8293,37 +7975,7 @@
                 <a:latin typeface="맑은 고딕"/>
                 <a:ea typeface="맑은 고딕"/>
               </a:rPr>
-              <a:t> 진단의 근거가 </a:t>
-            </a:r>
-            <a:r>
-              <a:rPr sz="1200" b="1">
-                <a:solidFill>
-                  <a:srgbClr val="000000"/>
-                </a:solidFill>
-                <a:latin typeface="맑은 고딕"/>
-                <a:ea typeface="맑은 고딕"/>
-              </a:rPr>
-              <a:t>본 것</a:t>
-            </a:r>
-            <a:r>
-              <a:rPr sz="1000" b="0">
-                <a:solidFill>
-                  <a:srgbClr val="000000"/>
-                </a:solidFill>
-                <a:latin typeface="맑은 고딕"/>
-                <a:ea typeface="맑은 고딕"/>
-              </a:rPr>
-              <a:t>(센서 출력·추적)</a:t>
-            </a:r>
-            <a:r>
-              <a:rPr sz="1200" b="0">
-                <a:solidFill>
-                  <a:srgbClr val="000000"/>
-                </a:solidFill>
-                <a:latin typeface="맑은 고딕"/>
-                <a:ea typeface="맑은 고딕"/>
-              </a:rPr>
-              <a:t>인가, 짐작인가?</a:t>
+              <a:t> 테스트 출력·추적에서 확인한 사실과 추정을 구분했는가?</a:t>
             </a:r>
           </a:p>
           <a:p>
@@ -8354,7 +8006,7 @@
                 <a:latin typeface="맑은 고딕"/>
                 <a:ea typeface="맑은 고딕"/>
               </a:rPr>
-              <a:t>되돌릴 자리</a:t>
+              <a:t>수정 대상</a:t>
             </a:r>
             <a:r>
               <a:rPr sz="1400" b="0">
@@ -8374,27 +8026,7 @@
                 <a:latin typeface="맑은 고딕"/>
                 <a:ea typeface="맑은 고딕"/>
               </a:rPr>
-              <a:t> 코드가 아니라 </a:t>
-            </a:r>
-            <a:r>
-              <a:rPr sz="1200" b="1">
-                <a:solidFill>
-                  <a:srgbClr val="000000"/>
-                </a:solidFill>
-                <a:latin typeface="맑은 고딕"/>
-                <a:ea typeface="맑은 고딕"/>
-              </a:rPr>
-              <a:t>결정</a:t>
-            </a:r>
-            <a:r>
-              <a:rPr sz="1200" b="0">
-                <a:solidFill>
-                  <a:srgbClr val="000000"/>
-                </a:solidFill>
-                <a:latin typeface="맑은 고딕"/>
-                <a:ea typeface="맑은 고딕"/>
-              </a:rPr>
-              <a:t>을 고쳤는가?</a:t>
+              <a:t> 명세·맥락·경계·하네스·코드 중 원인이 있는 부분을 골랐는가?</a:t>
             </a:r>
           </a:p>
           <a:p>
@@ -8425,7 +8057,7 @@
                 <a:latin typeface="맑은 고딕"/>
                 <a:ea typeface="맑은 고딕"/>
               </a:rPr>
-              <a:t>순서</a:t>
+              <a:t>재검증</a:t>
             </a:r>
             <a:r>
               <a:rPr sz="1400" b="0">
@@ -8445,7 +8077,7 @@
                 <a:latin typeface="맑은 고딕"/>
                 <a:ea typeface="맑은 고딕"/>
               </a:rPr>
-              <a:t> 기대값 → 맥락 → 경계의 차례로 물었는가?</a:t>
+              <a:t> 고친 뒤 같은 수용 기준을 충족하는지 확인하는가?</a:t>
             </a:r>
           </a:p>
           <a:p>
@@ -8527,7 +8159,7 @@
                 <a:latin typeface="맑은 고딕"/>
                 <a:ea typeface="맑은 고딕"/>
               </a:rPr>
-              <a:t>이어 가기</a:t>
+              <a:t>재개</a:t>
             </a:r>
             <a:r>
               <a:rPr sz="1400" b="0">
@@ -8547,27 +8179,7 @@
                 <a:latin typeface="맑은 고딕"/>
                 <a:ea typeface="맑은 고딕"/>
               </a:rPr>
-              <a:t> 끊긴 작업을 처음이 아니라 </a:t>
-            </a:r>
-            <a:r>
-              <a:rPr sz="1200" b="1">
-                <a:solidFill>
-                  <a:srgbClr val="000000"/>
-                </a:solidFill>
-                <a:latin typeface="맑은 고딕"/>
-                <a:ea typeface="맑은 고딕"/>
-              </a:rPr>
-              <a:t>이어서</a:t>
-            </a:r>
-            <a:r>
-              <a:rPr sz="1200" b="0">
-                <a:solidFill>
-                  <a:srgbClr val="000000"/>
-                </a:solidFill>
-                <a:latin typeface="맑은 고딕"/>
-                <a:ea typeface="맑은 고딕"/>
-              </a:rPr>
-              <a:t> 진행할 수 있는가?</a:t>
+              <a:t> 저장한 진행과 새로 검증할 범위를 구분했는가?</a:t>
             </a:r>
           </a:p>
           <a:p>
@@ -8838,7 +8450,7 @@
                 <a:latin typeface="맑은 고딕"/>
                 <a:ea typeface="맑은 고딕"/>
               </a:rPr>
-              <a:t>실패는 다시 돌릴 일이 아니라 </a:t>
+              <a:t>실패하면 </a:t>
             </a:r>
             <a:r>
               <a:rPr sz="1800" b="1">
@@ -8848,7 +8460,7 @@
                 <a:latin typeface="맑은 고딕"/>
                 <a:ea typeface="맑은 고딕"/>
               </a:rPr>
-              <a:t>무엇이 빠졌는지 가리키는 신호</a:t>
+              <a:t>기록과 입력으로 원인을 확인하고</a:t>
             </a:r>
             <a:r>
               <a:rPr sz="1800" b="0">
@@ -8858,7 +8470,7 @@
                 <a:latin typeface="맑은 고딕"/>
                 <a:ea typeface="맑은 고딕"/>
               </a:rPr>
-              <a:t>이며, 고칠 자리는 대개 코드가 아니다.</a:t>
+              <a:t>, 필요한 부분을 수정한 뒤 다시 검증한다.</a:t>
             </a:r>
           </a:p>
           <a:p>
@@ -8902,7 +8514,7 @@
                 <a:latin typeface="맑은 고딕"/>
                 <a:ea typeface="맑은 고딕"/>
               </a:rPr>
-              <a:t>네 유형</a:t>
+              <a:t>원인 진단</a:t>
             </a:r>
             <a:r>
               <a:rPr sz="1800" b="0">
@@ -8922,7 +8534,7 @@
                 <a:latin typeface="맑은 고딕"/>
                 <a:ea typeface="맑은 고딕"/>
               </a:rPr>
-              <a:t> 명세 결함·맥락 누락·환경 오류·모델 한계로 가른다</a:t>
+              <a:t> 명세·맥락·환경·모델의 문제를 실행 기록에 근거해 구분한다</a:t>
             </a:r>
           </a:p>
           <a:p>
@@ -8945,7 +8557,7 @@
                 <a:latin typeface="맑은 고딕"/>
                 <a:ea typeface="맑은 고딕"/>
               </a:rPr>
-              <a:t>두 질문</a:t>
+              <a:t>재시도와 재검증</a:t>
             </a:r>
             <a:r>
               <a:rPr sz="1800" b="0">
@@ -8965,7 +8577,7 @@
                 <a:latin typeface="맑은 고딕"/>
                 <a:ea typeface="맑은 고딕"/>
               </a:rPr>
-              <a:t> 다시 돌리면 달라지는가, 사람이 정할 것이 빠졌는가</a:t>
+              <a:t> 같은 요청의 반복과 원인 수정 후의 검증을 구분하고 상한을 둔다</a:t>
             </a:r>
           </a:p>
           <a:p>
@@ -8988,7 +8600,7 @@
                 <a:latin typeface="맑은 고딕"/>
                 <a:ea typeface="맑은 고딕"/>
               </a:rPr>
-              <a:t>재시도</a:t>
+              <a:t>진행 저장</a:t>
             </a:r>
             <a:r>
               <a:rPr sz="1800" b="0">
@@ -9008,7 +8620,7 @@
                 <a:latin typeface="맑은 고딕"/>
                 <a:ea typeface="맑은 고딕"/>
               </a:rPr>
-              <a:t> 환경 오류에만 쓰고 상한에서 멈춘다</a:t>
+              <a:t> 작업 단위로 검증하고, 커밋과 진행 기록으로 재개할 지점을 남긴다</a:t>
             </a:r>
           </a:p>
           <a:p>
@@ -9031,7 +8643,7 @@
                 <a:latin typeface="맑은 고딕"/>
                 <a:ea typeface="맑은 고딕"/>
               </a:rPr>
-              <a:t>누적</a:t>
+              <a:t>추적</a:t>
             </a:r>
             <a:r>
               <a:rPr sz="1800" b="0">
@@ -9051,7 +8663,7 @@
                 <a:latin typeface="맑은 고딕"/>
                 <a:ea typeface="맑은 고딕"/>
               </a:rPr>
-              <a:t> 에이전트는 상태를 지니므로 실패가 빨리 드러나야 한다</a:t>
+              <a:t> 읽은 자료와 도구 호출·결과를 보관해 실패한 실행을 검토한다</a:t>
             </a:r>
           </a:p>
           <a:p>
@@ -9074,7 +8686,7 @@
                 <a:latin typeface="맑은 고딕"/>
                 <a:ea typeface="맑은 고딕"/>
               </a:rPr>
-              <a:t>이어 가기</a:t>
+              <a:t>표류 관리</a:t>
             </a:r>
             <a:r>
               <a:rPr sz="1800" b="0">
@@ -9094,93 +8706,7 @@
                 <a:latin typeface="맑은 고딕"/>
                 <a:ea typeface="맑은 고딕"/>
               </a:rPr>
-              <a:t> 커밋과 진행 기록으로 처음이 아니라 중간에서 잇는다</a:t>
-            </a:r>
-          </a:p>
-          <a:p>
-            <a:pPr lvl="2" marL="723900" indent="-368300">
-              <a:spcBef>
-                <a:spcPts val="600"/>
-              </a:spcBef>
-              <a:spcAft>
-                <a:spcPts val="600"/>
-              </a:spcAft>
-              <a:buSzPct val="90000"/>
-              <a:buFont typeface="Wingdings" pitchFamily="2" charset="2"/>
-              <a:buChar char=""/>
-            </a:pPr>
-            <a:r>
-              <a:rPr sz="1800" b="1">
-                <a:solidFill>
-                  <a:srgbClr val="000000"/>
-                </a:solidFill>
-                <a:latin typeface="맑은 고딕"/>
-                <a:ea typeface="맑은 고딕"/>
-              </a:rPr>
-              <a:t>추적</a:t>
-            </a:r>
-            <a:r>
-              <a:rPr sz="1800" b="0">
-                <a:solidFill>
-                  <a:srgbClr val="000000"/>
-                </a:solidFill>
-                <a:latin typeface="맑은 고딕"/>
-                <a:ea typeface="맑은 고딕"/>
-              </a:rPr>
-              <a:t> —</a:t>
-            </a:r>
-            <a:r>
-              <a:rPr sz="1600" b="0">
-                <a:solidFill>
-                  <a:srgbClr val="000000"/>
-                </a:solidFill>
-                <a:latin typeface="맑은 고딕"/>
-                <a:ea typeface="맑은 고딕"/>
-              </a:rPr>
-              <a:t> 무엇을 읽고 무엇을 불렀는지가 남아야 진단된다</a:t>
-            </a:r>
-          </a:p>
-          <a:p>
-            <a:pPr lvl="2" marL="723900" indent="-368300">
-              <a:spcBef>
-                <a:spcPts val="600"/>
-              </a:spcBef>
-              <a:spcAft>
-                <a:spcPts val="600"/>
-              </a:spcAft>
-              <a:buSzPct val="90000"/>
-              <a:buFont typeface="Wingdings" pitchFamily="2" charset="2"/>
-              <a:buChar char=""/>
-            </a:pPr>
-            <a:r>
-              <a:rPr sz="1800" b="1">
-                <a:solidFill>
-                  <a:srgbClr val="000000"/>
-                </a:solidFill>
-                <a:latin typeface="맑은 고딕"/>
-                <a:ea typeface="맑은 고딕"/>
-              </a:rPr>
-              <a:t>표류</a:t>
-            </a:r>
-            <a:r>
-              <a:rPr sz="1800" b="0">
-                <a:solidFill>
-                  <a:srgbClr val="000000"/>
-                </a:solidFill>
-                <a:latin typeface="맑은 고딕"/>
-                <a:ea typeface="맑은 고딕"/>
-              </a:rPr>
-              <a:t> —</a:t>
-            </a:r>
-            <a:r>
-              <a:rPr sz="1600" b="0">
-                <a:solidFill>
-                  <a:srgbClr val="000000"/>
-                </a:solidFill>
-                <a:latin typeface="맑은 고딕"/>
-                <a:ea typeface="맑은 고딕"/>
-              </a:rPr>
-              <a:t> 복제된 패턴은 정리를 주기로 돌려 되돌린다</a:t>
+              <a:t> 규칙을 문서와 검사에 반영하고, 작은 정리 작업을 주기적으로 수행한다</a:t>
             </a:r>
           </a:p>
           <a:p>
@@ -9450,18 +8976,18 @@
           </p:nvPr>
         </p:nvGraphicFramePr>
         <p:xfrm>
-          <a:off x="412306" y="2112010"/>
-          <a:ext cx="8305800" cy="3873500"/>
+          <a:off x="435166" y="2112010"/>
+          <a:ext cx="8260080" cy="3873500"/>
         </p:xfrm>
         <a:graphic>
           <a:graphicData uri="http://schemas.openxmlformats.org/drawingml/2006/table">
             <a:tbl>
               <a:tblPr/>
               <a:tblGrid>
-                <a:gridCol w="2557780"/>
+                <a:gridCol w="2595880"/>
                 <a:gridCol w="947420"/>
                 <a:gridCol w="2679700"/>
-                <a:gridCol w="2120900"/>
+                <a:gridCol w="2037080"/>
               </a:tblGrid>
               <a:tr h="288000">
                 <a:tc>
@@ -10204,7 +9730,7 @@
                           <a:ea typeface="맑은 고딕" panose="020B0503020000020004" pitchFamily="34" charset="-127"/>
                           <a:cs typeface="맑은 고딕"/>
                         </a:rPr>
-                        <a:t>배송 시스템 호출이 한 번 실패했다</a:t>
+                        <a:t>배송 시스템 호출이 실패했다</a:t>
                       </a:r>
                     </a:p>
                   </a:txBody>
@@ -10314,7 +9840,7 @@
                           <a:ea typeface="맑은 고딕" panose="020B0503020000020004" pitchFamily="34" charset="-127"/>
                           <a:cs typeface="맑은 고딕"/>
                         </a:rPr>
-                        <a:t>같은 입력에 두 번째는 성공한다</a:t>
+                        <a:t>호출 기록에 연결 오류가 남았다</a:t>
                       </a:r>
                     </a:p>
                   </a:txBody>
@@ -10370,7 +9896,7 @@
                           <a:ea typeface="맑은 고딕" panose="020B0503020000020004" pitchFamily="34" charset="-127"/>
                           <a:cs typeface="맑은 고딕"/>
                         </a:rPr>
-                        <a:t>없음 — 상한 안에서 재시도</a:t>
+                        <a:t>환경 복구 후 재시도 판단</a:t>
                       </a:r>
                     </a:p>
                   </a:txBody>
@@ -10458,7 +9984,7 @@
                 <a:latin typeface="맑은 고딕"/>
                 <a:ea typeface="맑은 고딕"/>
               </a:rPr>
-              <a:t>"배송지를 변경한다"에서 드러난 실패는 셋이고, 그중 </a:t>
+              <a:t>"배송지를 변경한다"의 실패는 </a:t>
             </a:r>
             <a:r>
               <a:rPr sz="1800" b="1">
@@ -10468,7 +9994,7 @@
                 <a:latin typeface="맑은 고딕"/>
                 <a:ea typeface="맑은 고딕"/>
               </a:rPr>
-              <a:t>재시도로 푸는 것은 하나</a:t>
+              <a:t>관찰한 결과와 입력 문서를 비교</a:t>
             </a:r>
             <a:r>
               <a:rPr sz="1800" b="0">
@@ -10478,7 +10004,7 @@
                 <a:latin typeface="맑은 고딕"/>
                 <a:ea typeface="맑은 고딕"/>
               </a:rPr>
-              <a:t>다. 나머지 둘은 명세와 맥락으로 되돌린다.</a:t>
+              <a:t>해 진단한다. 명세·맥락의 보완과 환경 복구를 구분한다.</a:t>
             </a:r>
           </a:p>
         </p:txBody>
@@ -10644,7 +10170,7 @@
                 <a:latin typeface="맑은 고딕"/>
                 <a:ea typeface="맑은 고딕"/>
               </a:rPr>
-              <a:t>고치는 순서</a:t>
+              <a:t>입력 보완</a:t>
             </a:r>
             <a:r>
               <a:rPr sz="1800" b="0">
@@ -10664,7 +10190,7 @@
                 <a:latin typeface="맑은 고딕"/>
                 <a:ea typeface="맑은 고딕"/>
               </a:rPr>
-              <a:t> 작업 명세서의 예를 먼저 더하고, 그 예가 가리키는 상태 기계를 맞춘다.</a:t>
+              <a:t> 작업 명세서에 빠진 예를 추가하고, 상태 기계에 회차별 적용 범위를 반영한다.</a:t>
             </a:r>
           </a:p>
           <a:p>
@@ -10687,7 +10213,7 @@
                 <a:latin typeface="맑은 고딕"/>
                 <a:ea typeface="맑은 고딕"/>
               </a:rPr>
-              <a:t>다시 맡길 입력</a:t>
+              <a:t>재위임과 재개</a:t>
             </a:r>
             <a:r>
               <a:rPr sz="1800" b="0">
@@ -10707,27 +10233,7 @@
                 <a:latin typeface="맑은 고딕"/>
                 <a:ea typeface="맑은 고딕"/>
               </a:rPr>
-              <a:t> 고친 명세와 맥락으로 </a:t>
-            </a:r>
-            <a:r>
-              <a:rPr sz="1600" b="1">
-                <a:solidFill>
-                  <a:srgbClr val="000000"/>
-                </a:solidFill>
-                <a:latin typeface="맑은 고딕"/>
-                <a:ea typeface="맑은 고딕"/>
-              </a:rPr>
-              <a:t>새 과제</a:t>
-            </a:r>
-            <a:r>
-              <a:rPr sz="1600" b="0">
-                <a:solidFill>
-                  <a:srgbClr val="000000"/>
-                </a:solidFill>
-                <a:latin typeface="맑은 고딕"/>
-                <a:ea typeface="맑은 고딕"/>
-              </a:rPr>
-              <a:t>를 만든다. 멈춘 과제를 이어 가지 않는다.</a:t>
+              <a:t> 입력을 고쳤다면 새 과제로 맡기고 수용 테스트로 확인한다. 환경 오류라면 기존 진행을 확인하고 재개할 수 있다.</a:t>
             </a:r>
           </a:p>
         </p:txBody>
@@ -10982,7 +10488,7 @@
                 <a:latin typeface="맑은 고딕"/>
                 <a:ea typeface="맑은 고딕"/>
               </a:rPr>
-              <a:t>"배송지를 변경한다"의 작업도 </a:t>
+              <a:t>"배송지를 변경한다"에서도 </a:t>
             </a:r>
             <a:r>
               <a:rPr sz="1400" b="1">
@@ -10992,7 +10498,7 @@
                 <a:latin typeface="맑은 고딕"/>
                 <a:ea typeface="맑은 고딕"/>
               </a:rPr>
-              <a:t>완료와 중단의 두 끝</a:t>
+              <a:t>검사 통과·반복 상한·사람의 판단이 필요한 조건</a:t>
             </a:r>
             <a:r>
               <a:rPr sz="1400" b="0">
@@ -11002,7 +10508,7 @@
                 <a:latin typeface="맑은 고딕"/>
                 <a:ea typeface="맑은 고딕"/>
               </a:rPr>
-              <a:t>을 가진다. 멈춤의 조건은 상한과 판정할 수 없는 결정이다.</a:t>
+              <a:t>을 정해 작업의 종료와 재개를 관리한다.</a:t>
             </a:r>
           </a:p>
           <a:p>
@@ -11025,7 +10531,7 @@
                 <a:latin typeface="맑은 고딕"/>
                 <a:ea typeface="맑은 고딕"/>
               </a:rPr>
-              <a:t>멈출 조건 둘</a:t>
+              <a:t>사람에게 넘기는 조건</a:t>
             </a:r>
             <a:r>
               <a:rPr sz="1400" b="0">
@@ -11045,7 +10551,7 @@
                 <a:latin typeface="맑은 고딕"/>
                 <a:ea typeface="맑은 고딕"/>
               </a:rPr>
-              <a:t> 같은 실패 3회와 공휴일 규칙처럼 사람이 정할 결정이다.</a:t>
+              <a:t> 같은 실패가 세 번 반복되거나, 공휴일 규칙처럼 미정인 업무 판단에 닿으면 멈춘다.</a:t>
             </a:r>
           </a:p>
           <a:p>
@@ -11068,7 +10574,7 @@
                 <a:latin typeface="맑은 고딕"/>
                 <a:ea typeface="맑은 고딕"/>
               </a:rPr>
-              <a:t>사람 확인에서 갈린다</a:t>
+              <a:t>다음 실행의 입력</a:t>
             </a:r>
             <a:r>
               <a:rPr sz="1400" b="0">
@@ -11088,7 +10594,7 @@
                 <a:latin typeface="맑은 고딕"/>
                 <a:ea typeface="맑은 고딕"/>
               </a:rPr>
-              <a:t> 환경 오류는 이어 가고, 명세·맥락의 결함은 고쳐 새로 맡긴다.</a:t>
+              <a:t> 환경 복구 후에는 진행 기록을 읽고 재개한다. 명세·맥락을 고쳤다면 고친 입력과 검증 기준으로 새 과제를 맡긴다.</a:t>
             </a:r>
           </a:p>
         </p:txBody>
@@ -11107,7 +10613,7 @@
         </p:nvSpPr>
         <p:spPr>
           <a:xfrm>
-            <a:off x="365760" y="1910232"/>
+            <a:off x="365760" y="2341475"/>
             <a:ext cx="8412480" cy="201168"/>
           </a:xfrm>
           <a:prstGeom prst="rect">
@@ -11151,8 +10657,8 @@
         </p:blipFill>
         <p:spPr>
           <a:xfrm>
-            <a:off x="685800" y="2147976"/>
-            <a:ext cx="7772400" cy="1215537"/>
+            <a:off x="782515" y="2579219"/>
+            <a:ext cx="7578969" cy="1211140"/>
           </a:xfrm>
           <a:prstGeom prst="rect">
             <a:avLst/>
@@ -11464,7 +10970,7 @@
                 <a:latin typeface="맑은 고딕"/>
                 <a:ea typeface="맑은 고딕"/>
               </a:rPr>
-              <a:t> 실패가 가리킨 빈칸이다. 수용 기준과 테스트가 함께 늘어난다.</a:t>
+              <a:t> 배송 시스템에 변경을 알려야 한다는 규칙을 수용 기준과 테스트에 반영한다.</a:t>
             </a:r>
           </a:p>
           <a:p>
@@ -11540,7 +11046,7 @@
                 <a:latin typeface="맑은 고딕"/>
                 <a:ea typeface="맑은 고딕"/>
               </a:rPr>
-              <a:t> 예정·배송 요청됨·배송중·배송됨에서 무엇이 달라지는지 한 줄씩.</a:t>
+              <a:t> 예정·배송 요청됨·배송중·배송됨에서 배송지 변경이 어떻게 적용되는지 명시한다.</a:t>
             </a:r>
           </a:p>
         </p:txBody>
@@ -12052,7 +11558,7 @@
                 <a:latin typeface="맑은 고딕"/>
                 <a:ea typeface="맑은 고딕"/>
               </a:rPr>
-              <a:t>센서가 빨간불을 켠 다음에 할 일은 </a:t>
+              <a:t>작업이 실패하면 </a:t>
             </a:r>
             <a:r>
               <a:rPr sz="1800" b="1">
@@ -12062,7 +11568,7 @@
                 <a:latin typeface="맑은 고딕"/>
                 <a:ea typeface="맑은 고딕"/>
               </a:rPr>
-              <a:t>다시 돌리는 것이 아니라 무엇이 빠졌는지 찾는 것</a:t>
+              <a:t>실행 기록과 입력을 확인해 원인을 찾고</a:t>
             </a:r>
             <a:r>
               <a:rPr sz="1800" b="0">
@@ -12072,7 +11578,7 @@
                 <a:latin typeface="맑은 고딕"/>
                 <a:ea typeface="맑은 고딕"/>
               </a:rPr>
-              <a:t>이다.</a:t>
+              <a:t>, 재시도할지 입력을 고칠지 판단한다.</a:t>
             </a:r>
           </a:p>
           <a:p>
@@ -12138,7 +11644,7 @@
                 <a:latin typeface="맑은 고딕"/>
                 <a:ea typeface="맑은 고딕"/>
               </a:rPr>
-              <a:t>유형별로 </a:t>
+              <a:t>원인에 따라 </a:t>
             </a:r>
             <a:r>
               <a:rPr sz="1800" b="1">
@@ -12148,7 +11654,7 @@
                 <a:latin typeface="맑은 고딕"/>
                 <a:ea typeface="맑은 고딕"/>
               </a:rPr>
-              <a:t>재시도·멈춤·되돌림·상위 결정 재검토</a:t>
+              <a:t>재시도·중단·되돌림·결정 재검토</a:t>
             </a:r>
             <a:r>
               <a:rPr sz="1800" b="0">
@@ -12174,6 +11680,16 @@
               <a:buChar char=""/>
             </a:pPr>
             <a:r>
+              <a:rPr sz="1800" b="1">
+                <a:solidFill>
+                  <a:srgbClr val="000000"/>
+                </a:solidFill>
+                <a:latin typeface="맑은 고딕"/>
+                <a:ea typeface="맑은 고딕"/>
+              </a:rPr>
+              <a:t>오류 누적</a:t>
+            </a:r>
+            <a:r>
               <a:rPr sz="1800" b="0">
                 <a:solidFill>
                   <a:srgbClr val="000000"/>
@@ -12181,7 +11697,7 @@
                 <a:latin typeface="맑은 고딕"/>
                 <a:ea typeface="맑은 고딕"/>
               </a:rPr>
-              <a:t>에이전트가 </a:t>
+              <a:t>을 줄이도록 검증하고, </a:t>
             </a:r>
             <a:r>
               <a:rPr sz="1800" b="1">
@@ -12191,7 +11707,7 @@
                 <a:latin typeface="맑은 고딕"/>
                 <a:ea typeface="맑은 고딕"/>
               </a:rPr>
-              <a:t>상태를 지니고 오류가 누적된다</a:t>
+              <a:t>커밋과 진행 기록</a:t>
             </a:r>
             <a:r>
               <a:rPr sz="1800" b="0">
@@ -12201,27 +11717,7 @@
                 <a:latin typeface="맑은 고딕"/>
                 <a:ea typeface="맑은 고딕"/>
               </a:rPr>
-              <a:t>는 것을 알고, 끊긴 작업을 처음이 아니라 </a:t>
-            </a:r>
-            <a:r>
-              <a:rPr sz="1800" b="1">
-                <a:solidFill>
-                  <a:srgbClr val="000000"/>
-                </a:solidFill>
-                <a:latin typeface="맑은 고딕"/>
-                <a:ea typeface="맑은 고딕"/>
-              </a:rPr>
-              <a:t>이어서</a:t>
-            </a:r>
-            <a:r>
-              <a:rPr sz="1800" b="0">
-                <a:solidFill>
-                  <a:srgbClr val="000000"/>
-                </a:solidFill>
-                <a:latin typeface="맑은 고딕"/>
-                <a:ea typeface="맑은 고딕"/>
-              </a:rPr>
-              <a:t> 진행한다.</a:t>
+              <a:t>으로 끊긴 작업을 이어 간다.</a:t>
             </a:r>
           </a:p>
           <a:p>
@@ -12244,7 +11740,7 @@
                 <a:latin typeface="맑은 고딕"/>
                 <a:ea typeface="맑은 고딕"/>
               </a:rPr>
-              <a:t>추적</a:t>
+              <a:t>추적 기록</a:t>
             </a:r>
             <a:r>
               <a:rPr sz="1800" b="0">
@@ -12254,7 +11750,7 @@
                 <a:latin typeface="맑은 고딕"/>
                 <a:ea typeface="맑은 고딕"/>
               </a:rPr>
-              <a:t>으로 무엇을 보고 그렇게 했는지 되짚어 실패의 자리를 찾는다.</a:t>
+              <a:t>에서 읽은 자료와 도구 호출을 확인해 실패의 원인을 찾는다.</a:t>
             </a:r>
           </a:p>
           <a:p>
@@ -12277,7 +11773,7 @@
                 <a:latin typeface="맑은 고딕"/>
                 <a:ea typeface="맑은 고딕"/>
               </a:rPr>
-              <a:t>센서의 실패에서 </a:t>
+              <a:t>코드뿐 아니라 </a:t>
             </a:r>
             <a:r>
               <a:rPr sz="1800" b="1">
@@ -12287,7 +11783,7 @@
                 <a:latin typeface="맑은 고딕"/>
                 <a:ea typeface="맑은 고딕"/>
               </a:rPr>
-              <a:t>원인이 된 결정</a:t>
+              <a:t>명세·맥락·경계·하네스</a:t>
             </a:r>
             <a:r>
               <a:rPr sz="1800" b="0">
@@ -12297,7 +11793,7 @@
                 <a:latin typeface="맑은 고딕"/>
                 <a:ea typeface="맑은 고딕"/>
               </a:rPr>
-              <a:t>까지 거슬러 올라 그 자리를 고친다.</a:t>
+              <a:t>에 원인이 있는지 확인하고 수정한다.</a:t>
             </a:r>
           </a:p>
           <a:p>
@@ -12363,7 +11859,7 @@
                 <a:latin typeface="맑은 고딕"/>
                 <a:ea typeface="맑은 고딕"/>
               </a:rPr>
-              <a:t>에이전트가 있는 패턴을 복제해 생기는 </a:t>
+              <a:t>기존의 잘못된 패턴이 반복되어 생기는 </a:t>
             </a:r>
             <a:r>
               <a:rPr sz="1800" b="1">
@@ -12383,7 +11879,7 @@
                 <a:latin typeface="맑은 고딕"/>
                 <a:ea typeface="맑은 고딕"/>
               </a:rPr>
-              <a:t>를 정리 작업으로 되돌린다.</a:t>
+              <a:t>를 정기적인 코드 정리로 줄인다.</a:t>
             </a:r>
           </a:p>
         </p:txBody>
@@ -12611,7 +12107,7 @@
                 <a:latin typeface="맑은 고딕"/>
                 <a:ea typeface="맑은 고딕"/>
               </a:rPr>
-              <a:t>같은 입력으로 다시 돌리면 </a:t>
+              <a:t>명세나 맥락에 원인이 있다면 </a:t>
             </a:r>
             <a:r>
               <a:rPr sz="1800" b="1">
@@ -12621,7 +12117,7 @@
                 <a:latin typeface="맑은 고딕"/>
                 <a:ea typeface="맑은 고딕"/>
               </a:rPr>
-              <a:t>빠진 것은 그대로 빠져 있다</a:t>
+              <a:t>다시 실행하는 것만으로는 원인이 해결되지 않는다</a:t>
             </a:r>
             <a:r>
               <a:rPr sz="1800" b="0">
@@ -12631,7 +12127,7 @@
                 <a:latin typeface="맑은 고딕"/>
                 <a:ea typeface="맑은 고딕"/>
               </a:rPr>
-              <a:t>. 모델이 다르게 답할 확률만 다시 굴린 것이다.</a:t>
+              <a:t>. 결과가 달라져도 같은 문제가 다시 생길 수 있다.</a:t>
             </a:r>
           </a:p>
           <a:p>
@@ -12697,7 +12193,7 @@
                 <a:latin typeface="맑은 고딕"/>
                 <a:ea typeface="맑은 고딕"/>
               </a:rPr>
-              <a:t>세 번의 시도는 모두 </a:t>
+              <a:t>세 번 모두 </a:t>
             </a:r>
             <a:r>
               <a:rPr sz="1800" b="1">
@@ -12707,7 +12203,7 @@
                 <a:latin typeface="맑은 고딕"/>
                 <a:ea typeface="맑은 고딕"/>
               </a:rPr>
-              <a:t>같은 맥락과 같은 명세</a:t>
+              <a:t>같은 명세와 상태 기계</a:t>
             </a:r>
             <a:r>
               <a:rPr sz="1800" b="0">
@@ -12717,7 +12213,7 @@
                 <a:latin typeface="맑은 고딕"/>
                 <a:ea typeface="맑은 고딕"/>
               </a:rPr>
-              <a:t>를 읽었다. 그 안에 없는 규칙은 네 번째에도 없다.</a:t>
+              <a:t>를 읽었다. 두 문서의 불일치를 고치지 않으면 재결제의 동작을 계속 잘못 구현할 수 있다.</a:t>
             </a:r>
           </a:p>
           <a:p>
@@ -12733,6 +12229,16 @@
               <a:buChar char=""/>
             </a:pPr>
             <a:r>
+              <a:rPr sz="1800" b="1">
+                <a:solidFill>
+                  <a:srgbClr val="000000"/>
+                </a:solidFill>
+                <a:latin typeface="맑은 고딕"/>
+                <a:ea typeface="맑은 고딕"/>
+              </a:rPr>
+              <a:t>일시적인 도구 오류</a:t>
+            </a:r>
+            <a:r>
               <a:rPr sz="1800" b="0">
                 <a:solidFill>
                   <a:srgbClr val="000000"/>
@@ -12740,37 +12246,7 @@
                 <a:latin typeface="맑은 고딕"/>
                 <a:ea typeface="맑은 고딕"/>
               </a:rPr>
-              <a:t>재시도가 듣는 실패도 있다. 네트워크가 끊겼거나 도구가 한 번 실패한 경우다 —</a:t>
-            </a:r>
-            <a:r>
-              <a:rPr sz="1600" b="0">
-                <a:solidFill>
-                  <a:srgbClr val="000000"/>
-                </a:solidFill>
-                <a:latin typeface="맑은 고딕"/>
-                <a:ea typeface="맑은 고딕"/>
-              </a:rPr>
-              <a:t> </a:t>
-            </a:r>
-            <a:r>
-              <a:rPr sz="1600" b="1">
-                <a:solidFill>
-                  <a:srgbClr val="000000"/>
-                </a:solidFill>
-                <a:latin typeface="맑은 고딕"/>
-                <a:ea typeface="맑은 고딕"/>
-              </a:rPr>
-              <a:t>입력이 바뀌지 않아도 결과가 바뀔 수 있는 것</a:t>
-            </a:r>
-            <a:r>
-              <a:rPr sz="1600" b="0">
-                <a:solidFill>
-                  <a:srgbClr val="000000"/>
-                </a:solidFill>
-                <a:latin typeface="맑은 고딕"/>
-                <a:ea typeface="맑은 고딕"/>
-              </a:rPr>
-              <a:t>만 그렇다.</a:t>
+              <a:t>는 원인이 다르다. 네트워크가 복구되었다면 같은 요청을 다시 실행해 작업을 이어 갈 수 있다.</a:t>
             </a:r>
           </a:p>
           <a:p>
@@ -12786,6 +12262,16 @@
               <a:buChar char=""/>
             </a:pPr>
             <a:r>
+              <a:rPr sz="1800" b="1">
+                <a:solidFill>
+                  <a:srgbClr val="000000"/>
+                </a:solidFill>
+                <a:latin typeface="맑은 고딕"/>
+                <a:ea typeface="맑은 고딕"/>
+              </a:rPr>
+              <a:t>먼저 확인할 것</a:t>
+            </a:r>
+            <a:r>
               <a:rPr sz="1800" b="0">
                 <a:solidFill>
                   <a:srgbClr val="000000"/>
@@ -12793,17 +12279,17 @@
                 <a:latin typeface="맑은 고딕"/>
                 <a:ea typeface="맑은 고딕"/>
               </a:rPr>
-              <a:t>그래서 실패를 만나면 먼저 묻는다. </a:t>
-            </a:r>
-            <a:r>
-              <a:rPr sz="1800" b="1">
-                <a:solidFill>
-                  <a:srgbClr val="000000"/>
-                </a:solidFill>
-                <a:latin typeface="맑은 고딕"/>
-                <a:ea typeface="맑은 고딕"/>
-              </a:rPr>
-              <a:t>더 열심히 할 일인가, 무엇이 빠졌는가?</a:t>
+              <a:t> —</a:t>
+            </a:r>
+            <a:r>
+              <a:rPr sz="1600" b="0">
+                <a:solidFill>
+                  <a:srgbClr val="000000"/>
+                </a:solidFill>
+                <a:latin typeface="맑은 고딕"/>
+                <a:ea typeface="맑은 고딕"/>
+              </a:rPr>
+              <a:t> 도구가 실패했는지, 기대한 결과가 잘못됐는지, 필요한 규칙을 빠뜨렸는지 실행 기록과 입력을 함께 살핀다.</a:t>
             </a:r>
           </a:p>
         </p:txBody>
@@ -12989,8 +12475,8 @@
           </p:nvPr>
         </p:nvGraphicFramePr>
         <p:xfrm>
-          <a:off x="770446" y="2112010"/>
-          <a:ext cx="7589520" cy="3873500"/>
+          <a:off x="630746" y="2112010"/>
+          <a:ext cx="7868920" cy="3873500"/>
         </p:xfrm>
         <a:graphic>
           <a:graphicData uri="http://schemas.openxmlformats.org/drawingml/2006/table">
@@ -12998,8 +12484,8 @@
               <a:tblPr/>
               <a:tblGrid>
                 <a:gridCol w="947420"/>
-                <a:gridCol w="1897380"/>
                 <a:gridCol w="2512060"/>
+                <a:gridCol w="2176780"/>
                 <a:gridCol w="2232660"/>
               </a:tblGrid>
               <a:tr h="288000">
@@ -13083,7 +12569,7 @@
                           <a:ea typeface="맑은 고딕" panose="020B0503020000020004" pitchFamily="34" charset="-127"/>
                           <a:cs typeface="맑은 고딕"/>
                         </a:rPr>
-                        <a:t>빠진 것</a:t>
+                        <a:t>확인할 원인</a:t>
                       </a:r>
                     </a:p>
                   </a:txBody>
@@ -13153,7 +12639,7 @@
                           <a:ea typeface="맑은 고딕" panose="020B0503020000020004" pitchFamily="34" charset="-127"/>
                           <a:cs typeface="맑은 고딕"/>
                         </a:rPr>
-                        <a:t>드러나는 모습</a:t>
+                        <a:t>확인할 근거</a:t>
                       </a:r>
                     </a:p>
                   </a:txBody>
@@ -13349,7 +12835,7 @@
                           <a:ea typeface="맑은 고딕" panose="020B0503020000020004" pitchFamily="34" charset="-127"/>
                           <a:cs typeface="맑은 고딕"/>
                         </a:rPr>
-                        <a:t>사람이 정할 결정</a:t>
+                        <a:t>규칙·기대값이 미정이거나 잘못됨</a:t>
                       </a:r>
                     </a:p>
                   </a:txBody>
@@ -13405,7 +12891,7 @@
                           <a:ea typeface="맑은 고딕" panose="020B0503020000020004" pitchFamily="34" charset="-127"/>
                           <a:cs typeface="맑은 고딕"/>
                         </a:rPr>
-                        <a:t>센서는 통과하는데 기대와 다르다</a:t>
+                        <a:t>요구와 수용 기준의 불일치</a:t>
                       </a:r>
                     </a:p>
                   </a:txBody>
@@ -13461,7 +12947,7 @@
                           <a:ea typeface="맑은 고딕" panose="020B0503020000020004" pitchFamily="34" charset="-127"/>
                           <a:cs typeface="맑은 고딕"/>
                         </a:rPr>
-                        <a:t>작업 명세서로 되돌린다</a:t>
+                        <a:t>업무 담당자와 명세를 고친다</a:t>
                       </a:r>
                     </a:p>
                   </a:txBody>
@@ -13573,7 +13059,7 @@
                           <a:ea typeface="맑은 고딕" panose="020B0503020000020004" pitchFamily="34" charset="-127"/>
                           <a:cs typeface="맑은 고딕"/>
                         </a:rPr>
-                        <a:t>판단을 바꾸는 지식</a:t>
+                        <a:t>필요한 지식이 없거나 서로 다름</a:t>
                       </a:r>
                     </a:p>
                   </a:txBody>
@@ -13629,7 +13115,7 @@
                           <a:ea typeface="맑은 고딕" panose="020B0503020000020004" pitchFamily="34" charset="-127"/>
                           <a:cs typeface="맑은 고딕"/>
                         </a:rPr>
-                        <a:t>이름·구조를 지어낸다</a:t>
+                        <a:t>명세와 모델·문서의 불일치</a:t>
                       </a:r>
                     </a:p>
                   </a:txBody>
@@ -13685,7 +13171,7 @@
                           <a:ea typeface="맑은 고딕" panose="020B0503020000020004" pitchFamily="34" charset="-127"/>
                           <a:cs typeface="맑은 고딕"/>
                         </a:rPr>
-                        <a:t>맥락 파일로 되돌린다</a:t>
+                        <a:t>맥락 자료를 보완한다</a:t>
                       </a:r>
                     </a:p>
                   </a:txBody>
@@ -13797,7 +13283,7 @@
                           <a:ea typeface="맑은 고딕" panose="020B0503020000020004" pitchFamily="34" charset="-127"/>
                           <a:cs typeface="맑은 고딕"/>
                         </a:rPr>
-                        <a:t>없음 — 도구가 실패했다</a:t>
+                        <a:t>도구·네트워크 등 실행 환경</a:t>
                       </a:r>
                     </a:p>
                   </a:txBody>
@@ -13853,7 +13339,7 @@
                           <a:ea typeface="맑은 고딕" panose="020B0503020000020004" pitchFamily="34" charset="-127"/>
                           <a:cs typeface="맑은 고딕"/>
                         </a:rPr>
-                        <a:t>같은 입력에 결과가 다르다</a:t>
+                        <a:t>오류 메시지와 호출 기록</a:t>
                       </a:r>
                     </a:p>
                   </a:txBody>
@@ -13909,7 +13395,7 @@
                           <a:ea typeface="맑은 고딕" panose="020B0503020000020004" pitchFamily="34" charset="-127"/>
                           <a:cs typeface="맑은 고딕"/>
                         </a:rPr>
-                        <a:t>상한 안에서 재시도한다</a:t>
+                        <a:t>환경을 확인하고 재시도한다</a:t>
                       </a:r>
                     </a:p>
                   </a:txBody>
@@ -14021,7 +13507,7 @@
                           <a:ea typeface="맑은 고딕" panose="020B0503020000020004" pitchFamily="34" charset="-127"/>
                           <a:cs typeface="맑은 고딕"/>
                         </a:rPr>
-                        <a:t>과제에 비한 능력</a:t>
+                        <a:t>과제 수행 능력의 부족 가능성</a:t>
                       </a:r>
                     </a:p>
                   </a:txBody>
@@ -14077,7 +13563,7 @@
                           <a:ea typeface="맑은 고딕" panose="020B0503020000020004" pitchFamily="34" charset="-127"/>
                           <a:cs typeface="맑은 고딕"/>
                         </a:rPr>
-                        <a:t>상한까지 같은 실패를 되풀이한다</a:t>
+                        <a:t>입력·환경 점검 뒤에도 실패</a:t>
                       </a:r>
                     </a:p>
                   </a:txBody>
@@ -14133,7 +13619,7 @@
                           <a:ea typeface="맑은 고딕" panose="020B0503020000020004" pitchFamily="34" charset="-127"/>
                           <a:cs typeface="맑은 고딕"/>
                         </a:rPr>
-                        <a:t>작업을 쪼개거나 사람이 한다</a:t>
+                        <a:t>작업을 나누거나 사람이 한다</a:t>
                       </a:r>
                     </a:p>
                   </a:txBody>
@@ -14221,7 +13707,7 @@
                 <a:latin typeface="맑은 고딕"/>
                 <a:ea typeface="맑은 고딕"/>
               </a:rPr>
-              <a:t>실패는 </a:t>
+              <a:t>실패의 원인이 </a:t>
             </a:r>
             <a:r>
               <a:rPr sz="1800" b="1">
@@ -14231,7 +13717,7 @@
                 <a:latin typeface="맑은 고딕"/>
                 <a:ea typeface="맑은 고딕"/>
               </a:rPr>
-              <a:t>무엇이 빠졌는가</a:t>
+              <a:t>명세·맥락·실행 환경·모델의 수행 능력</a:t>
             </a:r>
             <a:r>
               <a:rPr sz="1800" b="0">
@@ -14241,7 +13727,7 @@
                 <a:latin typeface="맑은 고딕"/>
                 <a:ea typeface="맑은 고딕"/>
               </a:rPr>
-              <a:t>로 갈린다. 빠진 것이 다르면 고칠 자리도 다르다.</a:t>
+              <a:t> 중 어디에 있는지에 따라 대응이 달라진다.</a:t>
             </a:r>
           </a:p>
         </p:txBody>
@@ -14400,6 +13886,16 @@
               <a:buChar char=""/>
             </a:pPr>
             <a:r>
+              <a:rPr sz="1800" b="1">
+                <a:solidFill>
+                  <a:srgbClr val="000000"/>
+                </a:solidFill>
+                <a:latin typeface="맑은 고딕"/>
+                <a:ea typeface="맑은 고딕"/>
+              </a:rPr>
+              <a:t>기록에 근거한 진단</a:t>
+            </a:r>
+            <a:r>
               <a:rPr sz="1800" b="0">
                 <a:solidFill>
                   <a:srgbClr val="000000"/>
@@ -14407,7 +13903,7 @@
                 <a:latin typeface="맑은 고딕"/>
                 <a:ea typeface="맑은 고딕"/>
               </a:rPr>
-              <a:t>네 유형을 가르는 질문은 둘이다 —</a:t>
+              <a:t> —</a:t>
             </a:r>
             <a:r>
               <a:rPr sz="1600" b="0">
@@ -14417,47 +13913,7 @@
                 <a:latin typeface="맑은 고딕"/>
                 <a:ea typeface="맑은 고딕"/>
               </a:rPr>
-              <a:t> </a:t>
-            </a:r>
-            <a:r>
-              <a:rPr sz="1600" b="1">
-                <a:solidFill>
-                  <a:srgbClr val="000000"/>
-                </a:solidFill>
-                <a:latin typeface="맑은 고딕"/>
-                <a:ea typeface="맑은 고딕"/>
-              </a:rPr>
-              <a:t>다시 돌리면 달라지는가</a:t>
-            </a:r>
-            <a:r>
-              <a:rPr sz="1600" b="0">
-                <a:solidFill>
-                  <a:srgbClr val="000000"/>
-                </a:solidFill>
-                <a:latin typeface="맑은 고딕"/>
-                <a:ea typeface="맑은 고딕"/>
-              </a:rPr>
-              <a:t>, 그리고 </a:t>
-            </a:r>
-            <a:r>
-              <a:rPr sz="1600" b="1">
-                <a:solidFill>
-                  <a:srgbClr val="000000"/>
-                </a:solidFill>
-                <a:latin typeface="맑은 고딕"/>
-                <a:ea typeface="맑은 고딕"/>
-              </a:rPr>
-              <a:t>사람이 정할 것이 빠졌는가</a:t>
-            </a:r>
-            <a:r>
-              <a:rPr sz="1600" b="0">
-                <a:solidFill>
-                  <a:srgbClr val="000000"/>
-                </a:solidFill>
-                <a:latin typeface="맑은 고딕"/>
-                <a:ea typeface="맑은 고딕"/>
-              </a:rPr>
-              <a:t>.</a:t>
+              <a:t> 도구 오류와 입력 문서의 불일치를 먼저 확인한다. 실패가 반복된다는 이유만으로 모델 한계라고 단정하지 않는다.</a:t>
             </a:r>
           </a:p>
           <a:p>
@@ -14473,6 +13929,16 @@
               <a:buChar char=""/>
             </a:pPr>
             <a:r>
+              <a:rPr sz="1800" b="1">
+                <a:solidFill>
+                  <a:srgbClr val="000000"/>
+                </a:solidFill>
+                <a:latin typeface="맑은 고딕"/>
+                <a:ea typeface="맑은 고딕"/>
+              </a:rPr>
+              <a:t>진단이 어려운 경우</a:t>
+            </a:r>
+            <a:r>
               <a:rPr sz="1800" b="0">
                 <a:solidFill>
                   <a:srgbClr val="000000"/>
@@ -14480,27 +13946,17 @@
                 <a:latin typeface="맑은 고딕"/>
                 <a:ea typeface="맑은 고딕"/>
               </a:rPr>
-              <a:t>유형을 먼저 정하지 않으면 모든 실패가 재시도로 간다. 가장 싸 보이지만 </a:t>
-            </a:r>
-            <a:r>
-              <a:rPr sz="1800" b="1">
-                <a:solidFill>
-                  <a:srgbClr val="000000"/>
-                </a:solidFill>
-                <a:latin typeface="맑은 고딕"/>
-                <a:ea typeface="맑은 고딕"/>
-              </a:rPr>
-              <a:t>가장 늦게 드러나는</a:t>
-            </a:r>
-            <a:r>
-              <a:rPr sz="1800" b="0">
-                <a:solidFill>
-                  <a:srgbClr val="000000"/>
-                </a:solidFill>
-                <a:latin typeface="맑은 고딕"/>
-                <a:ea typeface="맑은 고딕"/>
-              </a:rPr>
-              <a:t> 대응이다.</a:t>
+              <a:t> —</a:t>
+            </a:r>
+            <a:r>
+              <a:rPr sz="1600" b="0">
+                <a:solidFill>
+                  <a:srgbClr val="000000"/>
+                </a:solidFill>
+                <a:latin typeface="맑은 고딕"/>
+                <a:ea typeface="맑은 고딕"/>
+              </a:rPr>
+              <a:t> 부족한 증거와 추가로 확인할 사항을 남긴다. 원인을 모른 채 재시도 횟수만 늘리지 않는다.</a:t>
             </a:r>
           </a:p>
         </p:txBody>
@@ -15311,7 +14767,7 @@
                           <a:ea typeface="맑은 고딕" panose="020B0503020000020004" pitchFamily="34" charset="-127"/>
                           <a:cs typeface="맑은 고딕"/>
                         </a:rPr>
-                        <a:t>둘 중 무엇이 옳은지는 사람이 정한다</a:t>
+                        <a:t>확정한 업무 규칙은 재결제를 허용한다</a:t>
                       </a:r>
                     </a:p>
                   </a:txBody>
@@ -15367,7 +14823,7 @@
                           <a:ea typeface="맑은 고딕" panose="020B0503020000020004" pitchFamily="34" charset="-127"/>
                           <a:cs typeface="맑은 고딕"/>
                         </a:rPr>
-                        <a:t>명세 결함</a:t>
+                        <a:t>맥락 누락·불일치</a:t>
                       </a:r>
                     </a:p>
                   </a:txBody>
@@ -15455,7 +14911,7 @@
                 <a:latin typeface="맑은 고딕"/>
                 <a:ea typeface="맑은 고딕"/>
               </a:rPr>
-              <a:t>거절 뒤 재결제의 실패는 </a:t>
+              <a:t>거절 뒤 재결제의 실패에서는 </a:t>
             </a:r>
             <a:r>
               <a:rPr sz="1800" b="1">
@@ -15465,7 +14921,7 @@
                 <a:latin typeface="맑은 고딕"/>
                 <a:ea typeface="맑은 고딕"/>
               </a:rPr>
-              <a:t>명세 결함</a:t>
+              <a:t>수용 기준과 상태 기계가 일치하지 않았다</a:t>
             </a:r>
             <a:r>
               <a:rPr sz="1800" b="0">
@@ -15475,7 +14931,7 @@
                 <a:latin typeface="맑은 고딕"/>
                 <a:ea typeface="맑은 고딕"/>
               </a:rPr>
-              <a:t>이었다. 수용 기준과 맥락이 서로 다른 말을 하고 있었다.</a:t>
+              <a:t>. 이미 정한 업무 규칙이 맥락 문서에 빠져 있었던 것이다.</a:t>
             </a:r>
           </a:p>
         </p:txBody>
@@ -15609,7 +15065,7 @@
         <p:spPr>
           <a:xfrm>
             <a:off x="365760" y="3492610"/>
-            <a:ext cx="8412480" cy="2089833"/>
+            <a:ext cx="8412480" cy="2346871"/>
           </a:xfrm>
           <a:prstGeom prst="rect">
             <a:avLst/>
@@ -15634,6 +15090,16 @@
               <a:buChar char=""/>
             </a:pPr>
             <a:r>
+              <a:rPr sz="1800" b="1">
+                <a:solidFill>
+                  <a:srgbClr val="000000"/>
+                </a:solidFill>
+                <a:latin typeface="맑은 고딕"/>
+                <a:ea typeface="맑은 고딕"/>
+              </a:rPr>
+              <a:t>원인 확인</a:t>
+            </a:r>
+            <a:r>
               <a:rPr sz="1800" b="0">
                 <a:solidFill>
                   <a:srgbClr val="000000"/>
@@ -15641,27 +15107,17 @@
                 <a:latin typeface="맑은 고딕"/>
                 <a:ea typeface="맑은 고딕"/>
               </a:rPr>
-              <a:t>에이전트는 틀리지 않았다. </a:t>
-            </a:r>
-            <a:r>
-              <a:rPr sz="1800" b="1">
-                <a:solidFill>
-                  <a:srgbClr val="000000"/>
-                </a:solidFill>
-                <a:latin typeface="맑은 고딕"/>
-                <a:ea typeface="맑은 고딕"/>
-              </a:rPr>
-              <a:t>준 모델을 따랐고</a:t>
-            </a:r>
-            <a:r>
-              <a:rPr sz="1800" b="0">
-                <a:solidFill>
-                  <a:srgbClr val="000000"/>
-                </a:solidFill>
-                <a:latin typeface="맑은 고딕"/>
-                <a:ea typeface="맑은 고딕"/>
-              </a:rPr>
-              <a:t>, 그 모델에 규칙이 없었다.</a:t>
+              <a:t> —</a:t>
+            </a:r>
+            <a:r>
+              <a:rPr sz="1600" b="0">
+                <a:solidFill>
+                  <a:srgbClr val="000000"/>
+                </a:solidFill>
+                <a:latin typeface="맑은 고딕"/>
+                <a:ea typeface="맑은 고딕"/>
+              </a:rPr>
+              <a:t> 에이전트가 읽은 상태 기계에는 거절 뒤에도 결제대기를 유지한다는 규칙이 없었다. 코드만 고치면 같은 자료를 읽는 다음 작업에서도 문제가 반복될 수 있다.</a:t>
             </a:r>
           </a:p>
           <a:p>
@@ -15677,6 +15133,16 @@
               <a:buChar char=""/>
             </a:pPr>
             <a:r>
+              <a:rPr sz="1800" b="1">
+                <a:solidFill>
+                  <a:srgbClr val="000000"/>
+                </a:solidFill>
+                <a:latin typeface="맑은 고딕"/>
+                <a:ea typeface="맑은 고딕"/>
+              </a:rPr>
+              <a:t>입력 수정</a:t>
+            </a:r>
+            <a:r>
               <a:rPr sz="1800" b="0">
                 <a:solidFill>
                   <a:srgbClr val="000000"/>
@@ -15684,27 +15150,17 @@
                 <a:latin typeface="맑은 고딕"/>
                 <a:ea typeface="맑은 고딕"/>
               </a:rPr>
-              <a:t>고칠 자리는 코드가 아니라 </a:t>
-            </a:r>
-            <a:r>
-              <a:rPr sz="1800" b="1">
-                <a:solidFill>
-                  <a:srgbClr val="000000"/>
-                </a:solidFill>
-                <a:latin typeface="맑은 고딕"/>
-                <a:ea typeface="맑은 고딕"/>
-              </a:rPr>
-              <a:t>상태 기계와 그것을 가리키는 작업 명세서</a:t>
-            </a:r>
-            <a:r>
-              <a:rPr sz="1800" b="0">
-                <a:solidFill>
-                  <a:srgbClr val="000000"/>
-                </a:solidFill>
-                <a:latin typeface="맑은 고딕"/>
-                <a:ea typeface="맑은 고딕"/>
-              </a:rPr>
-              <a:t>다. 고친 뒤 같은 테스트가 한 번에 통과한다.</a:t>
+              <a:t> —</a:t>
+            </a:r>
+            <a:r>
+              <a:rPr sz="1600" b="0">
+                <a:solidFill>
+                  <a:srgbClr val="000000"/>
+                </a:solidFill>
+                <a:latin typeface="맑은 고딕"/>
+                <a:ea typeface="맑은 고딕"/>
+              </a:rPr>
+              <a:t> 상태 기계에 빠진 전이를 반영하고 작업 명세서의 참조도 확인한다. 이후 구현을 고쳐 같은 수용 테스트로 검증한다.</a:t>
             </a:r>
           </a:p>
           <a:p>
@@ -15720,6 +15176,16 @@
               <a:buChar char=""/>
             </a:pPr>
             <a:r>
+              <a:rPr sz="1800" b="1">
+                <a:solidFill>
+                  <a:srgbClr val="000000"/>
+                </a:solidFill>
+                <a:latin typeface="맑은 고딕"/>
+                <a:ea typeface="맑은 고딕"/>
+              </a:rPr>
+              <a:t>반복 제한</a:t>
+            </a:r>
+            <a:r>
               <a:rPr sz="1800" b="0">
                 <a:solidFill>
                   <a:srgbClr val="000000"/>
@@ -15727,27 +15193,17 @@
                 <a:latin typeface="맑은 고딕"/>
                 <a:ea typeface="맑은 고딕"/>
               </a:rPr>
-              <a:t>이 실패가 비싸지 않았던 이유는 </a:t>
-            </a:r>
-            <a:r>
-              <a:rPr sz="1800" b="1">
-                <a:solidFill>
-                  <a:srgbClr val="000000"/>
-                </a:solidFill>
-                <a:latin typeface="맑은 고딕"/>
-                <a:ea typeface="맑은 고딕"/>
-              </a:rPr>
-              <a:t>센서가 세 번째 시도에서 멈춰 세웠기</a:t>
-            </a:r>
-            <a:r>
-              <a:rPr sz="1800" b="0">
-                <a:solidFill>
-                  <a:srgbClr val="000000"/>
-                </a:solidFill>
-                <a:latin typeface="맑은 고딕"/>
-                <a:ea typeface="맑은 고딕"/>
-              </a:rPr>
-              <a:t> 때문이다.</a:t>
+              <a:t> —</a:t>
+            </a:r>
+            <a:r>
+              <a:rPr sz="1600" b="0">
+                <a:solidFill>
+                  <a:srgbClr val="000000"/>
+                </a:solidFill>
+                <a:latin typeface="맑은 고딕"/>
+                <a:ea typeface="맑은 고딕"/>
+              </a:rPr>
+              <a:t> 같은 실패가 세 번 반복되어 실행을 멈췄다. 센서 결과와 시도 횟수가 원인을 재검토하는 근거가 됐다.</a:t>
             </a:r>
           </a:p>
         </p:txBody>
@@ -15933,8 +15389,8 @@
           </p:nvPr>
         </p:nvGraphicFramePr>
         <p:xfrm>
-          <a:off x="1621346" y="1837690"/>
-          <a:ext cx="5887720" cy="3873500"/>
+          <a:off x="1523556" y="2112010"/>
+          <a:ext cx="6083300" cy="3873500"/>
         </p:xfrm>
         <a:graphic>
           <a:graphicData uri="http://schemas.openxmlformats.org/drawingml/2006/table">
@@ -15942,7 +15398,7 @@
               <a:tblPr/>
               <a:tblGrid>
                 <a:gridCol w="1673860"/>
-                <a:gridCol w="2260600"/>
+                <a:gridCol w="2456180"/>
                 <a:gridCol w="1953260"/>
               </a:tblGrid>
               <a:tr h="288000">
@@ -16168,7 +15624,7 @@
                           <a:ea typeface="맑은 고딕" panose="020B0503020000020004" pitchFamily="34" charset="-127"/>
                           <a:cs typeface="맑은 고딕"/>
                         </a:rPr>
-                        <a:t>도구 호출 오류</a:t>
+                        <a:t>일시적 도구 오류</a:t>
                       </a:r>
                     </a:p>
                   </a:txBody>
@@ -16222,7 +15678,7 @@
                           <a:ea typeface="맑은 고딕" panose="020B0503020000020004" pitchFamily="34" charset="-127"/>
                           <a:cs typeface="맑은 고딕"/>
                         </a:rPr>
-                        <a:t>상한 안에서 재시도</a:t>
+                        <a:t>복구·중복 실행 여부를 확인한다</a:t>
                       </a:r>
                     </a:p>
                   </a:txBody>
@@ -16390,7 +15846,7 @@
                           <a:ea typeface="맑은 고딕" panose="020B0503020000020004" pitchFamily="34" charset="-127"/>
                           <a:cs typeface="맑은 고딕"/>
                         </a:rPr>
-                        <a:t>메시지를 읽고 1회 고쳐 본다</a:t>
+                        <a:t>원인을 수정하고 다시 검사한다</a:t>
                       </a:r>
                     </a:p>
                   </a:txBody>
@@ -16840,7 +16296,7 @@
         <p:spPr>
           <a:xfrm>
             <a:off x="365760" y="960120"/>
-            <a:ext cx="8412480" cy="524240"/>
+            <a:ext cx="8412480" cy="781278"/>
           </a:xfrm>
           <a:prstGeom prst="rect">
             <a:avLst/>
@@ -16863,6 +16319,16 @@
               <a:buNone/>
             </a:pPr>
             <a:r>
+              <a:rPr sz="1800" b="1">
+                <a:solidFill>
+                  <a:srgbClr val="000000"/>
+                </a:solidFill>
+                <a:latin typeface="맑은 고딕"/>
+                <a:ea typeface="맑은 고딕"/>
+              </a:rPr>
+              <a:t>같은 요청의 재시도</a:t>
+            </a:r>
+            <a:r>
               <a:rPr sz="1800" b="0">
                 <a:solidFill>
                   <a:srgbClr val="000000"/>
@@ -16870,7 +16336,7 @@
                 <a:latin typeface="맑은 고딕"/>
                 <a:ea typeface="맑은 고딕"/>
               </a:rPr>
-              <a:t>재시도는 </a:t>
+              <a:t>와 </a:t>
             </a:r>
             <a:r>
               <a:rPr sz="1800" b="1">
@@ -16880,7 +16346,7 @@
                 <a:latin typeface="맑은 고딕"/>
                 <a:ea typeface="맑은 고딕"/>
               </a:rPr>
-              <a:t>환경 오류에만</a:t>
+              <a:t>실패 원인을 수정한 뒤의 재검증</a:t>
             </a:r>
             <a:r>
               <a:rPr sz="1800" b="0">
@@ -16890,7 +16356,7 @@
                 <a:latin typeface="맑은 고딕"/>
                 <a:ea typeface="맑은 고딕"/>
               </a:rPr>
-              <a:t> 값을 한다. 나머지에서는 토큰과 시간만 쓴다.</a:t>
+              <a:t>을 구분한다. 어느 쪽이든 반복 횟수와 중단 조건을 정해야 한다.</a:t>
             </a:r>
           </a:p>
         </p:txBody>
@@ -16974,7 +16440,7 @@
         </p:nvSpPr>
         <p:spPr>
           <a:xfrm>
-            <a:off x="365760" y="1539240"/>
+            <a:off x="365760" y="1813560"/>
             <a:ext cx="8412480" cy="222250"/>
           </a:xfrm>
           <a:prstGeom prst="rect">
@@ -17023,7 +16489,7 @@
         </p:nvSpPr>
         <p:spPr>
           <a:xfrm>
-            <a:off x="365760" y="3506290"/>
+            <a:off x="365760" y="3780610"/>
             <a:ext cx="8412480" cy="1435556"/>
           </a:xfrm>
           <a:prstGeom prst="rect">
@@ -17049,6 +16515,16 @@
               <a:buChar char=""/>
             </a:pPr>
             <a:r>
+              <a:rPr sz="1800" b="1">
+                <a:solidFill>
+                  <a:srgbClr val="000000"/>
+                </a:solidFill>
+                <a:latin typeface="맑은 고딕"/>
+                <a:ea typeface="맑은 고딕"/>
+              </a:rPr>
+              <a:t>시도 기록</a:t>
+            </a:r>
+            <a:r>
               <a:rPr sz="1800" b="0">
                 <a:solidFill>
                   <a:srgbClr val="000000"/>
@@ -17056,27 +16532,17 @@
                 <a:latin typeface="맑은 고딕"/>
                 <a:ea typeface="맑은 고딕"/>
               </a:rPr>
-              <a:t>상한은 </a:t>
-            </a:r>
-            <a:r>
-              <a:rPr sz="1800" b="1">
-                <a:solidFill>
-                  <a:srgbClr val="000000"/>
-                </a:solidFill>
-                <a:latin typeface="맑은 고딕"/>
-                <a:ea typeface="맑은 고딕"/>
-              </a:rPr>
-              <a:t>숫자보다 기록</a:t>
-            </a:r>
-            <a:r>
-              <a:rPr sz="1800" b="0">
-                <a:solidFill>
-                  <a:srgbClr val="000000"/>
-                </a:solidFill>
-                <a:latin typeface="맑은 고딕"/>
-                <a:ea typeface="맑은 고딕"/>
-              </a:rPr>
-              <a:t>이 중요하다. 세 번을 어디에 썼는지 남아야 다음 판단이 선다.</a:t>
+              <a:t> —</a:t>
+            </a:r>
+            <a:r>
+              <a:rPr sz="1600" b="0">
+                <a:solidFill>
+                  <a:srgbClr val="000000"/>
+                </a:solidFill>
+                <a:latin typeface="맑은 고딕"/>
+                <a:ea typeface="맑은 고딕"/>
+              </a:rPr>
+              <a:t> 무엇을 바꿨고 결과가 어땠는지 남긴다. 횟수만 알아서는 같은 수정을 반복했는지 판단할 수 없다.</a:t>
             </a:r>
           </a:p>
           <a:p>
@@ -17092,6 +16558,16 @@
               <a:buChar char=""/>
             </a:pPr>
             <a:r>
+              <a:rPr sz="1800" b="1">
+                <a:solidFill>
+                  <a:srgbClr val="000000"/>
+                </a:solidFill>
+                <a:latin typeface="맑은 고딕"/>
+                <a:ea typeface="맑은 고딕"/>
+              </a:rPr>
+              <a:t>멈춘 뒤의 처리</a:t>
+            </a:r>
+            <a:r>
               <a:rPr sz="1800" b="0">
                 <a:solidFill>
                   <a:srgbClr val="000000"/>
@@ -17099,27 +16575,17 @@
                 <a:latin typeface="맑은 고딕"/>
                 <a:ea typeface="맑은 고딕"/>
               </a:rPr>
-              <a:t>멈춤은 실패가 아니라 </a:t>
-            </a:r>
-            <a:r>
-              <a:rPr sz="1800" b="1">
-                <a:solidFill>
-                  <a:srgbClr val="000000"/>
-                </a:solidFill>
-                <a:latin typeface="맑은 고딕"/>
-                <a:ea typeface="맑은 고딕"/>
-              </a:rPr>
-              <a:t>설계된 종료</a:t>
-            </a:r>
-            <a:r>
-              <a:rPr sz="1800" b="0">
-                <a:solidFill>
-                  <a:srgbClr val="000000"/>
-                </a:solidFill>
-                <a:latin typeface="맑은 고딕"/>
-                <a:ea typeface="맑은 고딕"/>
-              </a:rPr>
-              <a:t>다. 사람에게 넘길 자리를 미리 정해 둔 것이다.</a:t>
+              <a:t> —</a:t>
+            </a:r>
+            <a:r>
+              <a:rPr sz="1600" b="0">
+                <a:solidFill>
+                  <a:srgbClr val="000000"/>
+                </a:solidFill>
+                <a:latin typeface="맑은 고딕"/>
+                <a:ea typeface="맑은 고딕"/>
+              </a:rPr>
+              <a:t> 상한에 닿으면 기록을 사람에게 전달한다. 원인과 입력을 다시 확인한 뒤 다음 작업을 정한다.</a:t>
             </a:r>
           </a:p>
         </p:txBody>
@@ -17359,7 +16825,7 @@
                 <a:latin typeface="맑은 고딕"/>
                 <a:ea typeface="맑은 고딕"/>
               </a:rPr>
-              <a:t>에이전트의 실패는 </a:t>
+              <a:t>에이전트는 앞서 읽은 자료와 수정한 파일을 바탕으로 다음 작업을 진행하므로, </a:t>
             </a:r>
             <a:r>
               <a:rPr sz="1800" b="1">
@@ -17369,7 +16835,7 @@
                 <a:latin typeface="맑은 고딕"/>
                 <a:ea typeface="맑은 고딕"/>
               </a:rPr>
-              <a:t>그 순간의 실패로 끝나지 않는다</a:t>
+              <a:t>초기의 오류가 후속 작업에 영향을 줄 수 있다</a:t>
             </a:r>
             <a:r>
               <a:rPr sz="1800" b="0">
@@ -17379,7 +16845,7 @@
                 <a:latin typeface="맑은 고딕"/>
                 <a:ea typeface="맑은 고딕"/>
               </a:rPr>
-              <a:t>. 앞의 결과 위에 다음 수를 쌓기 때문이다.</a:t>
+              <a:t>.</a:t>
             </a:r>
           </a:p>
           <a:p>
@@ -17442,7 +16908,27 @@
                 <a:latin typeface="맑은 고딕"/>
                 <a:ea typeface="맑은 고딕"/>
               </a:rPr>
-              <a:t>"Agents are stateful and errors compound. Agents can run for long periods of time, maintaining state across many tool calls.", [Anthropic 2025a]</a:t>
+              <a:t>"Agents are stateful and errors compound. Agents can run for long periods of time, maintaining state across many tool calls."</a:t>
+            </a:r>
+            <a:r>
+              <a:rPr sz="1000" b="0">
+                <a:solidFill>
+                  <a:srgbClr val="000000"/>
+                </a:solidFill>
+                <a:latin typeface="맑은 고딕"/>
+                <a:ea typeface="맑은 고딕"/>
+              </a:rPr>
+              <a:t>, </a:t>
+            </a:r>
+            <a:r>
+              <a:rPr sz="1000" b="0">
+                <a:solidFill>
+                  <a:srgbClr val="000000"/>
+                </a:solidFill>
+                <a:latin typeface="맑은 고딕"/>
+                <a:ea typeface="맑은 고딕"/>
+              </a:rPr>
+              <a:t>[Anthropic 2025a]</a:t>
             </a:r>
           </a:p>
           <a:p>
@@ -17541,6 +17027,16 @@
               <a:buChar char=""/>
             </a:pPr>
             <a:r>
+              <a:rPr sz="1800" b="1">
+                <a:solidFill>
+                  <a:srgbClr val="000000"/>
+                </a:solidFill>
+                <a:latin typeface="맑은 고딕"/>
+                <a:ea typeface="맑은 고딕"/>
+              </a:rPr>
+              <a:t>오류 누적</a:t>
+            </a:r>
+            <a:r>
               <a:rPr sz="1800" b="0">
                 <a:solidFill>
                   <a:srgbClr val="000000"/>
@@ -17548,27 +17044,17 @@
                 <a:latin typeface="맑은 고딕"/>
                 <a:ea typeface="맑은 고딕"/>
               </a:rPr>
-              <a:t>첫 수에서 이름을 잘못 지으면 </a:t>
-            </a:r>
-            <a:r>
-              <a:rPr sz="1800" b="1">
-                <a:solidFill>
-                  <a:srgbClr val="000000"/>
-                </a:solidFill>
-                <a:latin typeface="맑은 고딕"/>
-                <a:ea typeface="맑은 고딕"/>
-              </a:rPr>
-              <a:t>그 이름 위에</a:t>
-            </a:r>
-            <a:r>
-              <a:rPr sz="1800" b="0">
-                <a:solidFill>
-                  <a:srgbClr val="000000"/>
-                </a:solidFill>
-                <a:latin typeface="맑은 고딕"/>
-                <a:ea typeface="맑은 고딕"/>
-              </a:rPr>
-              <a:t> 파일과 테스트가 쌓인다. 뒤에서 고치는 값이 커진다.</a:t>
+              <a:t> —</a:t>
+            </a:r>
+            <a:r>
+              <a:rPr sz="1600" b="0">
+                <a:solidFill>
+                  <a:srgbClr val="000000"/>
+                </a:solidFill>
+                <a:latin typeface="맑은 고딕"/>
+                <a:ea typeface="맑은 고딕"/>
+              </a:rPr>
+              <a:t> 잘못 정한 이름을 여러 파일과 테스트에서 사용하면, 나중에 수정할 범위가 커진다.</a:t>
             </a:r>
           </a:p>
           <a:p>
@@ -17584,6 +17070,16 @@
               <a:buChar char=""/>
             </a:pPr>
             <a:r>
+              <a:rPr sz="1800" b="1">
+                <a:solidFill>
+                  <a:srgbClr val="000000"/>
+                </a:solidFill>
+                <a:latin typeface="맑은 고딕"/>
+                <a:ea typeface="맑은 고딕"/>
+              </a:rPr>
+              <a:t>조기 검증</a:t>
+            </a:r>
+            <a:r>
               <a:rPr sz="1800" b="0">
                 <a:solidFill>
                   <a:srgbClr val="000000"/>
@@ -17591,27 +17087,17 @@
                 <a:latin typeface="맑은 고딕"/>
                 <a:ea typeface="맑은 고딕"/>
               </a:rPr>
-              <a:t>그래서 실패는 </a:t>
-            </a:r>
-            <a:r>
-              <a:rPr sz="1800" b="1">
-                <a:solidFill>
-                  <a:srgbClr val="000000"/>
-                </a:solidFill>
-                <a:latin typeface="맑은 고딕"/>
-                <a:ea typeface="맑은 고딕"/>
-              </a:rPr>
-              <a:t>빨리</a:t>
-            </a:r>
-            <a:r>
-              <a:rPr sz="1800" b="0">
-                <a:solidFill>
-                  <a:srgbClr val="000000"/>
-                </a:solidFill>
-                <a:latin typeface="맑은 고딕"/>
-                <a:ea typeface="맑은 고딕"/>
-              </a:rPr>
-              <a:t> 드러나야 한다. 센서를 루프 안에 두는 이유가 여기에도 있다.</a:t>
+              <a:t> —</a:t>
+            </a:r>
+            <a:r>
+              <a:rPr sz="1600" b="0">
+                <a:solidFill>
+                  <a:srgbClr val="000000"/>
+                </a:solidFill>
+                <a:latin typeface="맑은 고딕"/>
+                <a:ea typeface="맑은 고딕"/>
+              </a:rPr>
+              <a:t> 작업 단위마다 검사하면 오류가 다른 코드로 퍼지기 전에 수정할 수 있다.</a:t>
             </a:r>
           </a:p>
           <a:p>
@@ -17627,6 +17113,16 @@
               <a:buChar char=""/>
             </a:pPr>
             <a:r>
+              <a:rPr sz="1800" b="1">
+                <a:solidFill>
+                  <a:srgbClr val="000000"/>
+                </a:solidFill>
+                <a:latin typeface="맑은 고딕"/>
+                <a:ea typeface="맑은 고딕"/>
+              </a:rPr>
+              <a:t>중단 대비</a:t>
+            </a:r>
+            <a:r>
               <a:rPr sz="1800" b="0">
                 <a:solidFill>
                   <a:srgbClr val="000000"/>
@@ -17634,27 +17130,17 @@
                 <a:latin typeface="맑은 고딕"/>
                 <a:ea typeface="맑은 고딕"/>
               </a:rPr>
-              <a:t>오래 도는 작업일수록 </a:t>
-            </a:r>
-            <a:r>
-              <a:rPr sz="1800" b="1">
-                <a:solidFill>
-                  <a:srgbClr val="000000"/>
-                </a:solidFill>
-                <a:latin typeface="맑은 고딕"/>
-                <a:ea typeface="맑은 고딕"/>
-              </a:rPr>
-              <a:t>중간에 끊길 확률</a:t>
-            </a:r>
-            <a:r>
-              <a:rPr sz="1800" b="0">
-                <a:solidFill>
-                  <a:srgbClr val="000000"/>
-                </a:solidFill>
-                <a:latin typeface="맑은 고딕"/>
-                <a:ea typeface="맑은 고딕"/>
-              </a:rPr>
-              <a:t>이 커진다. 끊김은 예외가 아니라 조건이다.</a:t>
+              <a:t> —</a:t>
+            </a:r>
+            <a:r>
+              <a:rPr sz="1600" b="0">
+                <a:solidFill>
+                  <a:srgbClr val="000000"/>
+                </a:solidFill>
+                <a:latin typeface="맑은 고딕"/>
+                <a:ea typeface="맑은 고딕"/>
+              </a:rPr>
+              <a:t> 긴 작업은 도구 오류나 세션 종료로 끊길 수 있으므로, 중간 결과와 진행 상황을 남겨야 한다.</a:t>
             </a:r>
           </a:p>
         </p:txBody>
@@ -17840,8 +17326,8 @@
           </p:nvPr>
         </p:nvGraphicFramePr>
         <p:xfrm>
-          <a:off x="2096326" y="3847985"/>
-          <a:ext cx="4937760" cy="3873500"/>
+          <a:off x="1677226" y="3573665"/>
+          <a:ext cx="5775960" cy="3873500"/>
         </p:xfrm>
         <a:graphic>
           <a:graphicData uri="http://schemas.openxmlformats.org/drawingml/2006/table">
@@ -17849,8 +17335,8 @@
               <a:tblPr/>
               <a:tblGrid>
                 <a:gridCol w="947420"/>
+                <a:gridCol w="2456180"/>
                 <a:gridCol w="2372360"/>
-                <a:gridCol w="1617980"/>
               </a:tblGrid>
               <a:tr h="288000">
                 <a:tc>
@@ -17871,7 +17357,7 @@
                           <a:ea typeface="맑은 고딕" panose="020B0503020000020004" pitchFamily="34" charset="-127"/>
                           <a:cs typeface="맑은 고딕"/>
                         </a:rPr>
-                        <a:t>자리</a:t>
+                        <a:t>기록</a:t>
                       </a:r>
                     </a:p>
                   </a:txBody>
@@ -17933,7 +17419,7 @@
                           <a:ea typeface="맑은 고딕" panose="020B0503020000020004" pitchFamily="34" charset="-127"/>
                           <a:cs typeface="맑은 고딕"/>
                         </a:rPr>
-                        <a:t>남는 것</a:t>
+                        <a:t>남기는 내용</a:t>
                       </a:r>
                     </a:p>
                   </a:txBody>
@@ -18003,7 +17489,7 @@
                           <a:ea typeface="맑은 고딕" panose="020B0503020000020004" pitchFamily="34" charset="-127"/>
                           <a:cs typeface="맑은 고딕"/>
                         </a:rPr>
-                        <a:t>이어 갈 때 읽는 것</a:t>
+                        <a:t>재개할 때 확인할 것</a:t>
                       </a:r>
                     </a:p>
                   </a:txBody>
@@ -18129,7 +17615,7 @@
                           <a:ea typeface="맑은 고딕" panose="020B0503020000020004" pitchFamily="34" charset="-127"/>
                           <a:cs typeface="맑은 고딕"/>
                         </a:rPr>
-                        <a:t>작업 단위마다의 코드와 테스트</a:t>
+                        <a:t>검증한 작업 단위의 코드·테스트</a:t>
                       </a:r>
                     </a:p>
                   </a:txBody>
@@ -18185,7 +17671,7 @@
                           <a:ea typeface="맑은 고딕" panose="020B0503020000020004" pitchFamily="34" charset="-127"/>
                           <a:cs typeface="맑은 고딕"/>
                         </a:rPr>
-                        <a:t>마지막 녹색 상태</a:t>
+                        <a:t>마지막으로 검사를 통과한 변경</a:t>
                       </a:r>
                     </a:p>
                   </a:txBody>
@@ -18297,7 +17783,7 @@
                           <a:ea typeface="맑은 고딕" panose="020B0503020000020004" pitchFamily="34" charset="-127"/>
                           <a:cs typeface="맑은 고딕"/>
                         </a:rPr>
-                        <a:t>한 일과 남은 일과 멈춘 이유</a:t>
+                        <a:t>완료·미완료 작업과 중단 이유</a:t>
                       </a:r>
                     </a:p>
                   </a:txBody>
@@ -18353,7 +17839,7 @@
                           <a:ea typeface="맑은 고딕" panose="020B0503020000020004" pitchFamily="34" charset="-127"/>
                           <a:cs typeface="맑은 고딕"/>
                         </a:rPr>
-                        <a:t>다음 수의 출발점</a:t>
+                        <a:t>이어 할 일과 남은 문제</a:t>
                       </a:r>
                     </a:p>
                   </a:txBody>
@@ -18411,7 +17897,7 @@
         <p:spPr>
           <a:xfrm>
             <a:off x="365760" y="960120"/>
-            <a:ext cx="8412480" cy="2545491"/>
+            <a:ext cx="8412480" cy="2288454"/>
           </a:xfrm>
           <a:prstGeom prst="rect">
             <a:avLst/>
@@ -18441,7 +17927,7 @@
                 <a:latin typeface="맑은 고딕"/>
                 <a:ea typeface="맑은 고딕"/>
               </a:rPr>
-              <a:t>끊긴 작업은 </a:t>
+              <a:t>중단된 작업은 </a:t>
             </a:r>
             <a:r>
               <a:rPr sz="1800" b="1">
@@ -18451,7 +17937,7 @@
                 <a:latin typeface="맑은 고딕"/>
                 <a:ea typeface="맑은 고딕"/>
               </a:rPr>
-              <a:t>처음부터가 아니라 이어서</a:t>
+              <a:t>검증된 코드와 진행 기록</a:t>
             </a:r>
             <a:r>
               <a:rPr sz="1800" b="0">
@@ -18461,7 +17947,7 @@
                 <a:latin typeface="맑은 고딕"/>
                 <a:ea typeface="맑은 고딕"/>
               </a:rPr>
-              <a:t> 간다. 그러려면 진행이 저장되어 있어야 한다.</a:t>
+              <a:t>을 확인하고 재개한다.</a:t>
             </a:r>
           </a:p>
           <a:p>
@@ -18524,7 +18010,27 @@
                 <a:latin typeface="맑은 고딕"/>
                 <a:ea typeface="맑은 고딕"/>
               </a:rPr>
-              <a:t>"restarts are expensive and frustrating for users. Instead, we built systems that can resume from where the agent was when the errors occurred.", [Anthropic 2025a]</a:t>
+              <a:t>"restarts are expensive and frustrating for users. Instead, we built systems that can resume from where the agent was when the errors occurred."</a:t>
+            </a:r>
+            <a:r>
+              <a:rPr sz="1000" b="0">
+                <a:solidFill>
+                  <a:srgbClr val="000000"/>
+                </a:solidFill>
+                <a:latin typeface="맑은 고딕"/>
+                <a:ea typeface="맑은 고딕"/>
+              </a:rPr>
+              <a:t>, </a:t>
+            </a:r>
+            <a:r>
+              <a:rPr sz="1000" b="0">
+                <a:solidFill>
+                  <a:srgbClr val="000000"/>
+                </a:solidFill>
+                <a:latin typeface="맑은 고딕"/>
+                <a:ea typeface="맑은 고딕"/>
+              </a:rPr>
+              <a:t>[Anthropic 2025a]</a:t>
             </a:r>
           </a:p>
           <a:p>
@@ -18691,7 +18197,7 @@
         </p:nvSpPr>
         <p:spPr>
           <a:xfrm>
-            <a:off x="365760" y="3549535"/>
+            <a:off x="365760" y="3275215"/>
             <a:ext cx="8412480" cy="222250"/>
           </a:xfrm>
           <a:prstGeom prst="rect">
@@ -18721,7 +18227,7 @@
                 <a:latin typeface="맑은 고딕"/>
                 <a:ea typeface="맑은 고딕"/>
               </a:rPr>
-              <a:t>"주문한다"가 진행을 남기는 두 자리</a:t>
+              <a:t>"주문한다"의 작업 재개에 필요한 기록</a:t>
             </a:r>
           </a:p>
         </p:txBody>
@@ -18740,7 +18246,7 @@
         </p:nvSpPr>
         <p:spPr>
           <a:xfrm>
-            <a:off x="365760" y="4940585"/>
+            <a:off x="365760" y="4666265"/>
             <a:ext cx="8412480" cy="1178518"/>
           </a:xfrm>
           <a:prstGeom prst="rect">
@@ -18766,6 +18272,16 @@
               <a:buChar char=""/>
             </a:pPr>
             <a:r>
+              <a:rPr sz="1800" b="1">
+                <a:solidFill>
+                  <a:srgbClr val="000000"/>
+                </a:solidFill>
+                <a:latin typeface="맑은 고딕"/>
+                <a:ea typeface="맑은 고딕"/>
+              </a:rPr>
+              <a:t>되돌림의 기준</a:t>
+            </a:r>
+            <a:r>
               <a:rPr sz="1800" b="0">
                 <a:solidFill>
                   <a:srgbClr val="000000"/>
@@ -18773,27 +18289,17 @@
                 <a:latin typeface="맑은 고딕"/>
                 <a:ea typeface="맑은 고딕"/>
               </a:rPr>
-              <a:t>되돌림의 단위도 같다. </a:t>
-            </a:r>
-            <a:r>
-              <a:rPr sz="1800" b="1">
-                <a:solidFill>
-                  <a:srgbClr val="000000"/>
-                </a:solidFill>
-                <a:latin typeface="맑은 고딕"/>
-                <a:ea typeface="맑은 고딕"/>
-              </a:rPr>
-              <a:t>커밋 하나</a:t>
-            </a:r>
-            <a:r>
-              <a:rPr sz="1800" b="0">
-                <a:solidFill>
-                  <a:srgbClr val="000000"/>
-                </a:solidFill>
-                <a:latin typeface="맑은 고딕"/>
-                <a:ea typeface="맑은 고딕"/>
-              </a:rPr>
-              <a:t>를 지우면 그 작업 단위만 사라진다.</a:t>
+              <a:t> —</a:t>
+            </a:r>
+            <a:r>
+              <a:rPr sz="1600" b="0">
+                <a:solidFill>
+                  <a:srgbClr val="000000"/>
+                </a:solidFill>
+                <a:latin typeface="맑은 고딕"/>
+                <a:ea typeface="맑은 고딕"/>
+              </a:rPr>
+              <a:t> 커밋과 미완료 변경을 구분하고, 문제가 생긴 작업 단위를 되돌려 검증한다.</a:t>
             </a:r>
           </a:p>
           <a:p>
@@ -18809,6 +18315,16 @@
               <a:buChar char=""/>
             </a:pPr>
             <a:r>
+              <a:rPr sz="1800" b="1">
+                <a:solidFill>
+                  <a:srgbClr val="000000"/>
+                </a:solidFill>
+                <a:latin typeface="맑은 고딕"/>
+                <a:ea typeface="맑은 고딕"/>
+              </a:rPr>
+              <a:t>작업 인계</a:t>
+            </a:r>
+            <a:r>
               <a:rPr sz="1800" b="0">
                 <a:solidFill>
                   <a:srgbClr val="000000"/>
@@ -18816,27 +18332,17 @@
                 <a:latin typeface="맑은 고딕"/>
                 <a:ea typeface="맑은 고딕"/>
               </a:rPr>
-              <a:t>진행 기록은 사람에게도 쓸모가 있다. 멈춘 작업을 </a:t>
-            </a:r>
-            <a:r>
-              <a:rPr sz="1800" b="1">
-                <a:solidFill>
-                  <a:srgbClr val="000000"/>
-                </a:solidFill>
-                <a:latin typeface="맑은 고딕"/>
-                <a:ea typeface="맑은 고딕"/>
-              </a:rPr>
-              <a:t>사람이 이어받을</a:t>
-            </a:r>
-            <a:r>
-              <a:rPr sz="1800" b="0">
-                <a:solidFill>
-                  <a:srgbClr val="000000"/>
-                </a:solidFill>
-                <a:latin typeface="맑은 고딕"/>
-                <a:ea typeface="맑은 고딕"/>
-              </a:rPr>
-              <a:t> 때 읽는 것이 같다.</a:t>
+              <a:t> —</a:t>
+            </a:r>
+            <a:r>
+              <a:rPr sz="1600" b="0">
+                <a:solidFill>
+                  <a:srgbClr val="000000"/>
+                </a:solidFill>
+                <a:latin typeface="맑은 고딕"/>
+                <a:ea typeface="맑은 고딕"/>
+              </a:rPr>
+              <a:t> 사람도 같은 기록으로 현재 상태와 다음 작업을 확인한다.</a:t>
             </a:r>
           </a:p>
         </p:txBody>
@@ -19064,7 +18570,7 @@
                 <a:latin typeface="맑은 고딕"/>
                 <a:ea typeface="맑은 고딕"/>
               </a:rPr>
-              <a:t>왜 그렇게 했는지 남아 있지 않으면, 실패는 </a:t>
+              <a:t>진행 기록이 </a:t>
             </a:r>
             <a:r>
               <a:rPr sz="1800" b="1">
@@ -19074,7 +18580,7 @@
                 <a:latin typeface="맑은 고딕"/>
                 <a:ea typeface="맑은 고딕"/>
               </a:rPr>
-              <a:t>다시 겪어 보는 수밖에</a:t>
+              <a:t>어디까지 했는지</a:t>
             </a:r>
             <a:r>
               <a:rPr sz="1800" b="0">
@@ -19084,7 +18590,27 @@
                 <a:latin typeface="맑은 고딕"/>
                 <a:ea typeface="맑은 고딕"/>
               </a:rPr>
-              <a:t> 없다.</a:t>
+              <a:t>를 알려 준다면, 추적 기록은 </a:t>
+            </a:r>
+            <a:r>
+              <a:rPr sz="1800" b="1">
+                <a:solidFill>
+                  <a:srgbClr val="000000"/>
+                </a:solidFill>
+                <a:latin typeface="맑은 고딕"/>
+                <a:ea typeface="맑은 고딕"/>
+              </a:rPr>
+              <a:t>어떤 자료와 도구를 사용했는지</a:t>
+            </a:r>
+            <a:r>
+              <a:rPr sz="1800" b="0">
+                <a:solidFill>
+                  <a:srgbClr val="000000"/>
+                </a:solidFill>
+                <a:latin typeface="맑은 고딕"/>
+                <a:ea typeface="맑은 고딕"/>
+              </a:rPr>
+              <a:t>를 확인하는 데 쓰인다.</a:t>
             </a:r>
           </a:p>
           <a:p>
@@ -19147,7 +18673,27 @@
                 <a:latin typeface="맑은 고딕"/>
                 <a:ea typeface="맑은 고딕"/>
               </a:rPr>
-              <a:t>"A robust framework generates detailed traces and logs, exposing the entire reasoning trajectory: the model's internal monologue, the tool it chose, the parameters it generated, and the result it observed.", [Blount 외 2026]</a:t>
+              <a:t>"A robust framework generates detailed traces and logs, exposing the entire reasoning trajectory: the model's internal monologue, the tool it chose, the parameters it generated, and the result it observed."</a:t>
+            </a:r>
+            <a:r>
+              <a:rPr sz="1000" b="0">
+                <a:solidFill>
+                  <a:srgbClr val="000000"/>
+                </a:solidFill>
+                <a:latin typeface="맑은 고딕"/>
+                <a:ea typeface="맑은 고딕"/>
+              </a:rPr>
+              <a:t>, </a:t>
+            </a:r>
+            <a:r>
+              <a:rPr sz="1000" b="0">
+                <a:solidFill>
+                  <a:srgbClr val="000000"/>
+                </a:solidFill>
+                <a:latin typeface="맑은 고딕"/>
+                <a:ea typeface="맑은 고딕"/>
+              </a:rPr>
+              <a:t>[Blount 외 2026]</a:t>
             </a:r>
           </a:p>
           <a:p>
@@ -19246,6 +18792,16 @@
               <a:buChar char=""/>
             </a:pPr>
             <a:r>
+              <a:rPr sz="1800" b="1">
+                <a:solidFill>
+                  <a:srgbClr val="000000"/>
+                </a:solidFill>
+                <a:latin typeface="맑은 고딕"/>
+                <a:ea typeface="맑은 고딕"/>
+              </a:rPr>
+              <a:t>진단에 필요한 기록</a:t>
+            </a:r>
+            <a:r>
               <a:rPr sz="1800" b="0">
                 <a:solidFill>
                   <a:srgbClr val="000000"/>
@@ -19253,27 +18809,17 @@
                 <a:latin typeface="맑은 고딕"/>
                 <a:ea typeface="맑은 고딕"/>
               </a:rPr>
-              <a:t>추적이 답하는 질문은 </a:t>
-            </a:r>
-            <a:r>
-              <a:rPr sz="1800" b="1">
-                <a:solidFill>
-                  <a:srgbClr val="000000"/>
-                </a:solidFill>
-                <a:latin typeface="맑은 고딕"/>
-                <a:ea typeface="맑은 고딕"/>
-              </a:rPr>
-              <a:t>무엇을 읽었고 무엇을 불렀는가</a:t>
-            </a:r>
-            <a:r>
-              <a:rPr sz="1800" b="0">
-                <a:solidFill>
-                  <a:srgbClr val="000000"/>
-                </a:solidFill>
-                <a:latin typeface="맑은 고딕"/>
-                <a:ea typeface="맑은 고딕"/>
-              </a:rPr>
-              <a:t>다. 결과만 보면 "왜"가 비어 있다.</a:t>
+              <a:t> —</a:t>
+            </a:r>
+            <a:r>
+              <a:rPr sz="1600" b="0">
+                <a:solidFill>
+                  <a:srgbClr val="000000"/>
+                </a:solidFill>
+                <a:latin typeface="맑은 고딕"/>
+                <a:ea typeface="맑은 고딕"/>
+              </a:rPr>
+              <a:t> 읽은 문서, 호출한 도구와 인자, 반환 결과를 확인한다. 도구의 실행 기록과 모델 내부의 추론은 구분한다.</a:t>
             </a:r>
           </a:p>
           <a:p>
@@ -19289,6 +18835,16 @@
               <a:buChar char=""/>
             </a:pPr>
             <a:r>
+              <a:rPr sz="1800" b="1">
+                <a:solidFill>
+                  <a:srgbClr val="000000"/>
+                </a:solidFill>
+                <a:latin typeface="맑은 고딕"/>
+                <a:ea typeface="맑은 고딕"/>
+              </a:rPr>
+              <a:t>"주문한다"의 확인 사항</a:t>
+            </a:r>
+            <a:r>
               <a:rPr sz="1800" b="0">
                 <a:solidFill>
                   <a:srgbClr val="000000"/>
@@ -19296,7 +18852,7 @@
                 <a:latin typeface="맑은 고딕"/>
                 <a:ea typeface="맑은 고딕"/>
               </a:rPr>
-              <a:t>"주문한다"의 추적에서 읽은 것은 하나다 —</a:t>
+              <a:t> —</a:t>
             </a:r>
             <a:r>
               <a:rPr sz="1600" b="0">
@@ -19306,27 +18862,7 @@
                 <a:latin typeface="맑은 고딕"/>
                 <a:ea typeface="맑은 고딕"/>
               </a:rPr>
-              <a:t> 에이전트가 </a:t>
-            </a:r>
-            <a:r>
-              <a:rPr sz="1600" b="1">
-                <a:solidFill>
-                  <a:srgbClr val="000000"/>
-                </a:solidFill>
-                <a:latin typeface="맑은 고딕"/>
-                <a:ea typeface="맑은 고딕"/>
-              </a:rPr>
-              <a:t>상태 기계 문서를 읽은 뒤</a:t>
-            </a:r>
-            <a:r>
-              <a:rPr sz="1600" b="0">
-                <a:solidFill>
-                  <a:srgbClr val="000000"/>
-                </a:solidFill>
-                <a:latin typeface="맑은 고딕"/>
-                <a:ea typeface="맑은 고딕"/>
-              </a:rPr>
-              <a:t> 자기 전이 없이 구현했다는 사실이다.</a:t>
+              <a:t> 에이전트가 읽은 상태 기계와 실제 변경을 비교해, 빠진 전이가 구현에도 반영됐는지 확인한다.</a:t>
             </a:r>
           </a:p>
           <a:p>
@@ -19342,6 +18878,16 @@
               <a:buChar char=""/>
             </a:pPr>
             <a:r>
+              <a:rPr sz="1800" b="1">
+                <a:solidFill>
+                  <a:srgbClr val="000000"/>
+                </a:solidFill>
+                <a:latin typeface="맑은 고딕"/>
+                <a:ea typeface="맑은 고딕"/>
+              </a:rPr>
+              <a:t>실행별 기록</a:t>
+            </a:r>
+            <a:r>
               <a:rPr sz="1800" b="0">
                 <a:solidFill>
                   <a:srgbClr val="000000"/>
@@ -19349,27 +18895,17 @@
                 <a:latin typeface="맑은 고딕"/>
                 <a:ea typeface="맑은 고딕"/>
               </a:rPr>
-              <a:t>같은 프롬프트로도 실행마다 달라지므로, 실패한 </a:t>
-            </a:r>
-            <a:r>
-              <a:rPr sz="1800" b="1">
-                <a:solidFill>
-                  <a:srgbClr val="000000"/>
-                </a:solidFill>
-                <a:latin typeface="맑은 고딕"/>
-                <a:ea typeface="맑은 고딕"/>
-              </a:rPr>
-              <a:t>그 실행의 기록</a:t>
-            </a:r>
-            <a:r>
-              <a:rPr sz="1800" b="0">
-                <a:solidFill>
-                  <a:srgbClr val="000000"/>
-                </a:solidFill>
-                <a:latin typeface="맑은 고딕"/>
-                <a:ea typeface="맑은 고딕"/>
-              </a:rPr>
-              <a:t>이 있어야 한다.</a:t>
+              <a:t> —</a:t>
+            </a:r>
+            <a:r>
+              <a:rPr sz="1600" b="0">
+                <a:solidFill>
+                  <a:srgbClr val="000000"/>
+                </a:solidFill>
+                <a:latin typeface="맑은 고딕"/>
+                <a:ea typeface="맑은 고딕"/>
+              </a:rPr>
+              <a:t> 같은 지시에도 결과가 달라질 수 있으므로 실패한 실행의 기록을 보관한다. 기록만으로 원인을 단정할 수 없으면 입력과 코드를 함께 검토한다.</a:t>
             </a:r>
           </a:p>
         </p:txBody>

--- a/courses/ai-native/sessions/s10.pptx
+++ b/courses/ai-native/sessions/s10.pptx
@@ -4469,7 +4469,7 @@
                       </a:r>
                     </a:p>
                   </a:txBody>
-                  <a:tcPr marL="6750" marR="6750" marT="6750" marB="0" anchor="ctr">
+                  <a:tcPr marL="6750" marR="6750" marT="6750" marB="6750" anchor="ctr">
                     <a:lnL>
                       <a:noFill/>
                     </a:lnL>
@@ -4531,7 +4531,7 @@
                       </a:r>
                     </a:p>
                   </a:txBody>
-                  <a:tcPr marL="6750" marR="6750" marT="6750" marB="0" anchor="ctr">
+                  <a:tcPr marL="6750" marR="6750" marT="6750" marB="6750" anchor="ctr">
                     <a:lnL w="9525" cap="flat" cmpd="sng" algn="ctr">
                       <a:solidFill>
                         <a:schemeClr val="bg1">
@@ -4601,7 +4601,7 @@
                       </a:r>
                     </a:p>
                   </a:txBody>
-                  <a:tcPr marL="6750" marR="6750" marT="6750" marB="0" anchor="ctr">
+                  <a:tcPr marL="6750" marR="6750" marT="6750" marB="6750" anchor="ctr">
                     <a:lnL w="9525" cap="flat" cmpd="sng" algn="ctr">
                       <a:solidFill>
                         <a:schemeClr val="bg1">
@@ -4671,7 +4671,7 @@
                       </a:r>
                     </a:p>
                   </a:txBody>
-                  <a:tcPr marL="6750" marR="6750" marT="6750" marB="0" anchor="ctr">
+                  <a:tcPr marL="6750" marR="6750" marT="6750" marB="6750" anchor="ctr">
                     <a:lnL w="9525" cap="flat" cmpd="sng" algn="ctr">
                       <a:solidFill>
                         <a:schemeClr val="bg1">
@@ -4743,7 +4743,7 @@
                       </a:r>
                     </a:p>
                   </a:txBody>
-                  <a:tcPr marL="81005" marR="6750" marT="6750" marB="0" anchor="ctr">
+                  <a:tcPr marL="81005" marR="6750" marT="6750" marB="6750" anchor="ctr">
                     <a:lnL>
                       <a:noFill/>
                     </a:lnL>
@@ -4797,7 +4797,7 @@
                       </a:r>
                     </a:p>
                   </a:txBody>
-                  <a:tcPr marL="81005" marR="6750" marT="6750" marB="0" anchor="ctr">
+                  <a:tcPr marL="81005" marR="6750" marT="6750" marB="6750" anchor="ctr">
                     <a:lnL>
                       <a:noFill/>
                     </a:lnL>
@@ -4853,7 +4853,7 @@
                       </a:r>
                     </a:p>
                   </a:txBody>
-                  <a:tcPr marL="81005" marR="6750" marT="6750" marB="0" anchor="ctr">
+                  <a:tcPr marL="81005" marR="6750" marT="6750" marB="6750" anchor="ctr">
                     <a:lnL>
                       <a:noFill/>
                     </a:lnL>
@@ -4909,7 +4909,7 @@
                       </a:r>
                     </a:p>
                   </a:txBody>
-                  <a:tcPr marL="81005" marR="6750" marT="6750" marB="0" anchor="ctr">
+                  <a:tcPr marL="81005" marR="6750" marT="6750" marB="6750" anchor="ctr">
                     <a:lnL>
                       <a:noFill/>
                     </a:lnL>
@@ -4967,7 +4967,7 @@
                       </a:r>
                     </a:p>
                   </a:txBody>
-                  <a:tcPr marL="81005" marR="6750" marT="6750" marB="0" anchor="ctr">
+                  <a:tcPr marL="81005" marR="6750" marT="6750" marB="6750" anchor="ctr">
                     <a:lnL>
                       <a:noFill/>
                     </a:lnL>
@@ -5021,7 +5021,7 @@
                       </a:r>
                     </a:p>
                   </a:txBody>
-                  <a:tcPr marL="81005" marR="6750" marT="6750" marB="0" anchor="ctr">
+                  <a:tcPr marL="81005" marR="6750" marT="6750" marB="6750" anchor="ctr">
                     <a:lnL>
                       <a:noFill/>
                     </a:lnL>
@@ -5077,7 +5077,7 @@
                       </a:r>
                     </a:p>
                   </a:txBody>
-                  <a:tcPr marL="81005" marR="6750" marT="6750" marB="0" anchor="ctr">
+                  <a:tcPr marL="81005" marR="6750" marT="6750" marB="6750" anchor="ctr">
                     <a:lnL>
                       <a:noFill/>
                     </a:lnL>
@@ -5133,7 +5133,7 @@
                       </a:r>
                     </a:p>
                   </a:txBody>
-                  <a:tcPr marL="81005" marR="6750" marT="6750" marB="0" anchor="ctr">
+                  <a:tcPr marL="81005" marR="6750" marT="6750" marB="6750" anchor="ctr">
                     <a:lnL>
                       <a:noFill/>
                     </a:lnL>
@@ -5191,7 +5191,7 @@
                       </a:r>
                     </a:p>
                   </a:txBody>
-                  <a:tcPr marL="81005" marR="6750" marT="6750" marB="0" anchor="ctr">
+                  <a:tcPr marL="81005" marR="6750" marT="6750" marB="6750" anchor="ctr">
                     <a:lnL>
                       <a:noFill/>
                     </a:lnL>
@@ -5245,7 +5245,7 @@
                       </a:r>
                     </a:p>
                   </a:txBody>
-                  <a:tcPr marL="81005" marR="6750" marT="6750" marB="0" anchor="ctr">
+                  <a:tcPr marL="81005" marR="6750" marT="6750" marB="6750" anchor="ctr">
                     <a:lnL>
                       <a:noFill/>
                     </a:lnL>
@@ -5301,7 +5301,7 @@
                       </a:r>
                     </a:p>
                   </a:txBody>
-                  <a:tcPr marL="81005" marR="6750" marT="6750" marB="0" anchor="ctr">
+                  <a:tcPr marL="81005" marR="6750" marT="6750" marB="6750" anchor="ctr">
                     <a:lnL>
                       <a:noFill/>
                     </a:lnL>
@@ -5357,7 +5357,7 @@
                       </a:r>
                     </a:p>
                   </a:txBody>
-                  <a:tcPr marL="81005" marR="6750" marT="6750" marB="0" anchor="ctr">
+                  <a:tcPr marL="81005" marR="6750" marT="6750" marB="6750" anchor="ctr">
                     <a:lnL>
                       <a:noFill/>
                     </a:lnL>
@@ -5415,7 +5415,7 @@
                       </a:r>
                     </a:p>
                   </a:txBody>
-                  <a:tcPr marL="81005" marR="6750" marT="6750" marB="0" anchor="ctr">
+                  <a:tcPr marL="81005" marR="6750" marT="6750" marB="6750" anchor="ctr">
                     <a:lnL>
                       <a:noFill/>
                     </a:lnL>
@@ -5469,7 +5469,7 @@
                       </a:r>
                     </a:p>
                   </a:txBody>
-                  <a:tcPr marL="81005" marR="6750" marT="6750" marB="0" anchor="ctr">
+                  <a:tcPr marL="81005" marR="6750" marT="6750" marB="6750" anchor="ctr">
                     <a:lnL>
                       <a:noFill/>
                     </a:lnL>
@@ -5525,7 +5525,7 @@
                       </a:r>
                     </a:p>
                   </a:txBody>
-                  <a:tcPr marL="81005" marR="6750" marT="6750" marB="0" anchor="ctr">
+                  <a:tcPr marL="81005" marR="6750" marT="6750" marB="6750" anchor="ctr">
                     <a:lnL>
                       <a:noFill/>
                     </a:lnL>
@@ -5581,7 +5581,7 @@
                       </a:r>
                     </a:p>
                   </a:txBody>
-                  <a:tcPr marL="81005" marR="6750" marT="6750" marB="0" anchor="ctr">
+                  <a:tcPr marL="81005" marR="6750" marT="6750" marB="6750" anchor="ctr">
                     <a:lnL>
                       <a:noFill/>
                     </a:lnL>
@@ -5639,7 +5639,7 @@
                       </a:r>
                     </a:p>
                   </a:txBody>
-                  <a:tcPr marL="81005" marR="6750" marT="6750" marB="0" anchor="ctr">
+                  <a:tcPr marL="81005" marR="6750" marT="6750" marB="6750" anchor="ctr">
                     <a:lnL>
                       <a:noFill/>
                     </a:lnL>
@@ -5693,7 +5693,7 @@
                       </a:r>
                     </a:p>
                   </a:txBody>
-                  <a:tcPr marL="81005" marR="6750" marT="6750" marB="0" anchor="ctr">
+                  <a:tcPr marL="81005" marR="6750" marT="6750" marB="6750" anchor="ctr">
                     <a:lnL>
                       <a:noFill/>
                     </a:lnL>
@@ -5749,7 +5749,7 @@
                       </a:r>
                     </a:p>
                   </a:txBody>
-                  <a:tcPr marL="81005" marR="6750" marT="6750" marB="0" anchor="ctr">
+                  <a:tcPr marL="81005" marR="6750" marT="6750" marB="6750" anchor="ctr">
                     <a:lnL>
                       <a:noFill/>
                     </a:lnL>
@@ -5805,7 +5805,7 @@
                       </a:r>
                     </a:p>
                   </a:txBody>
-                  <a:tcPr marL="81005" marR="6750" marT="6750" marB="0" anchor="ctr">
+                  <a:tcPr marL="81005" marR="6750" marT="6750" marB="6750" anchor="ctr">
                     <a:lnL>
                       <a:noFill/>
                     </a:lnL>
@@ -6367,7 +6367,7 @@
                       </a:r>
                     </a:p>
                   </a:txBody>
-                  <a:tcPr marL="6750" marR="6750" marT="6750" marB="0" anchor="ctr">
+                  <a:tcPr marL="6750" marR="6750" marT="6750" marB="6750" anchor="ctr">
                     <a:lnL>
                       <a:noFill/>
                     </a:lnL>
@@ -6429,7 +6429,7 @@
                       </a:r>
                     </a:p>
                   </a:txBody>
-                  <a:tcPr marL="6750" marR="6750" marT="6750" marB="0" anchor="ctr">
+                  <a:tcPr marL="6750" marR="6750" marT="6750" marB="6750" anchor="ctr">
                     <a:lnL w="9525" cap="flat" cmpd="sng" algn="ctr">
                       <a:solidFill>
                         <a:schemeClr val="bg1">
@@ -6499,7 +6499,7 @@
                       </a:r>
                     </a:p>
                   </a:txBody>
-                  <a:tcPr marL="6750" marR="6750" marT="6750" marB="0" anchor="ctr">
+                  <a:tcPr marL="6750" marR="6750" marT="6750" marB="6750" anchor="ctr">
                     <a:lnL w="9525" cap="flat" cmpd="sng" algn="ctr">
                       <a:solidFill>
                         <a:schemeClr val="bg1">
@@ -6571,7 +6571,7 @@
                       </a:r>
                     </a:p>
                   </a:txBody>
-                  <a:tcPr marL="81005" marR="6750" marT="6750" marB="0" anchor="ctr">
+                  <a:tcPr marL="81005" marR="6750" marT="6750" marB="6750" anchor="ctr">
                     <a:lnL>
                       <a:noFill/>
                     </a:lnL>
@@ -6625,7 +6625,7 @@
                       </a:r>
                     </a:p>
                   </a:txBody>
-                  <a:tcPr marL="81005" marR="6750" marT="6750" marB="0" anchor="ctr">
+                  <a:tcPr marL="81005" marR="6750" marT="6750" marB="6750" anchor="ctr">
                     <a:lnL>
                       <a:noFill/>
                     </a:lnL>
@@ -6681,7 +6681,7 @@
                       </a:r>
                     </a:p>
                   </a:txBody>
-                  <a:tcPr marL="81005" marR="6750" marT="6750" marB="0" anchor="ctr">
+                  <a:tcPr marL="81005" marR="6750" marT="6750" marB="6750" anchor="ctr">
                     <a:lnL>
                       <a:noFill/>
                     </a:lnL>
@@ -6739,7 +6739,7 @@
                       </a:r>
                     </a:p>
                   </a:txBody>
-                  <a:tcPr marL="81005" marR="6750" marT="6750" marB="0" anchor="ctr">
+                  <a:tcPr marL="81005" marR="6750" marT="6750" marB="6750" anchor="ctr">
                     <a:lnL>
                       <a:noFill/>
                     </a:lnL>
@@ -6793,7 +6793,7 @@
                       </a:r>
                     </a:p>
                   </a:txBody>
-                  <a:tcPr marL="81005" marR="6750" marT="6750" marB="0" anchor="ctr">
+                  <a:tcPr marL="81005" marR="6750" marT="6750" marB="6750" anchor="ctr">
                     <a:lnL>
                       <a:noFill/>
                     </a:lnL>
@@ -6849,7 +6849,7 @@
                       </a:r>
                     </a:p>
                   </a:txBody>
-                  <a:tcPr marL="81005" marR="6750" marT="6750" marB="0" anchor="ctr">
+                  <a:tcPr marL="81005" marR="6750" marT="6750" marB="6750" anchor="ctr">
                     <a:lnL>
                       <a:noFill/>
                     </a:lnL>
@@ -6907,7 +6907,7 @@
                       </a:r>
                     </a:p>
                   </a:txBody>
-                  <a:tcPr marL="81005" marR="6750" marT="6750" marB="0" anchor="ctr">
+                  <a:tcPr marL="81005" marR="6750" marT="6750" marB="6750" anchor="ctr">
                     <a:lnL>
                       <a:noFill/>
                     </a:lnL>
@@ -6961,7 +6961,7 @@
                       </a:r>
                     </a:p>
                   </a:txBody>
-                  <a:tcPr marL="81005" marR="6750" marT="6750" marB="0" anchor="ctr">
+                  <a:tcPr marL="81005" marR="6750" marT="6750" marB="6750" anchor="ctr">
                     <a:lnL>
                       <a:noFill/>
                     </a:lnL>
@@ -7017,7 +7017,7 @@
                       </a:r>
                     </a:p>
                   </a:txBody>
-                  <a:tcPr marL="81005" marR="6750" marT="6750" marB="0" anchor="ctr">
+                  <a:tcPr marL="81005" marR="6750" marT="6750" marB="6750" anchor="ctr">
                     <a:lnL>
                       <a:noFill/>
                     </a:lnL>
@@ -7075,7 +7075,7 @@
                       </a:r>
                     </a:p>
                   </a:txBody>
-                  <a:tcPr marL="81005" marR="6750" marT="6750" marB="0" anchor="ctr">
+                  <a:tcPr marL="81005" marR="6750" marT="6750" marB="6750" anchor="ctr">
                     <a:lnL>
                       <a:noFill/>
                     </a:lnL>
@@ -7129,7 +7129,7 @@
                       </a:r>
                     </a:p>
                   </a:txBody>
-                  <a:tcPr marL="81005" marR="6750" marT="6750" marB="0" anchor="ctr">
+                  <a:tcPr marL="81005" marR="6750" marT="6750" marB="6750" anchor="ctr">
                     <a:lnL>
                       <a:noFill/>
                     </a:lnL>
@@ -7185,7 +7185,7 @@
                       </a:r>
                     </a:p>
                   </a:txBody>
-                  <a:tcPr marL="81005" marR="6750" marT="6750" marB="0" anchor="ctr">
+                  <a:tcPr marL="81005" marR="6750" marT="6750" marB="6750" anchor="ctr">
                     <a:lnL>
                       <a:noFill/>
                     </a:lnL>
@@ -7822,7 +7822,7 @@
                       </a:r>
                     </a:p>
                   </a:txBody>
-                  <a:tcPr marL="6750" marR="6750" marT="6750" marB="0" anchor="ctr">
+                  <a:tcPr marL="6750" marR="6750" marT="6750" marB="6750" anchor="ctr">
                     <a:lnL>
                       <a:noFill/>
                     </a:lnL>
@@ -7884,7 +7884,7 @@
                       </a:r>
                     </a:p>
                   </a:txBody>
-                  <a:tcPr marL="6750" marR="6750" marT="6750" marB="0" anchor="ctr">
+                  <a:tcPr marL="6750" marR="6750" marT="6750" marB="6750" anchor="ctr">
                     <a:lnL w="9525" cap="flat" cmpd="sng" algn="ctr">
                       <a:solidFill>
                         <a:schemeClr val="bg1">
@@ -7954,7 +7954,7 @@
                       </a:r>
                     </a:p>
                   </a:txBody>
-                  <a:tcPr marL="6750" marR="6750" marT="6750" marB="0" anchor="ctr">
+                  <a:tcPr marL="6750" marR="6750" marT="6750" marB="6750" anchor="ctr">
                     <a:lnL w="9525" cap="flat" cmpd="sng" algn="ctr">
                       <a:solidFill>
                         <a:schemeClr val="bg1">
@@ -8026,7 +8026,7 @@
                       </a:r>
                     </a:p>
                   </a:txBody>
-                  <a:tcPr marL="81005" marR="6750" marT="6750" marB="0" anchor="ctr">
+                  <a:tcPr marL="81005" marR="6750" marT="6750" marB="6750" anchor="ctr">
                     <a:lnL>
                       <a:noFill/>
                     </a:lnL>
@@ -8080,7 +8080,7 @@
                       </a:r>
                     </a:p>
                   </a:txBody>
-                  <a:tcPr marL="81005" marR="6750" marT="6750" marB="0" anchor="ctr">
+                  <a:tcPr marL="81005" marR="6750" marT="6750" marB="6750" anchor="ctr">
                     <a:lnL>
                       <a:noFill/>
                     </a:lnL>
@@ -8136,7 +8136,7 @@
                       </a:r>
                     </a:p>
                   </a:txBody>
-                  <a:tcPr marL="81005" marR="6750" marT="6750" marB="0" anchor="ctr">
+                  <a:tcPr marL="81005" marR="6750" marT="6750" marB="6750" anchor="ctr">
                     <a:lnL>
                       <a:noFill/>
                     </a:lnL>
@@ -8194,7 +8194,7 @@
                       </a:r>
                     </a:p>
                   </a:txBody>
-                  <a:tcPr marL="81005" marR="6750" marT="6750" marB="0" anchor="ctr">
+                  <a:tcPr marL="81005" marR="6750" marT="6750" marB="6750" anchor="ctr">
                     <a:lnL>
                       <a:noFill/>
                     </a:lnL>
@@ -8248,7 +8248,7 @@
                       </a:r>
                     </a:p>
                   </a:txBody>
-                  <a:tcPr marL="81005" marR="6750" marT="6750" marB="0" anchor="ctr">
+                  <a:tcPr marL="81005" marR="6750" marT="6750" marB="6750" anchor="ctr">
                     <a:lnL>
                       <a:noFill/>
                     </a:lnL>
@@ -8304,7 +8304,7 @@
                       </a:r>
                     </a:p>
                   </a:txBody>
-                  <a:tcPr marL="81005" marR="6750" marT="6750" marB="0" anchor="ctr">
+                  <a:tcPr marL="81005" marR="6750" marT="6750" marB="6750" anchor="ctr">
                     <a:lnL>
                       <a:noFill/>
                     </a:lnL>
@@ -8362,7 +8362,7 @@
                       </a:r>
                     </a:p>
                   </a:txBody>
-                  <a:tcPr marL="81005" marR="6750" marT="6750" marB="0" anchor="ctr">
+                  <a:tcPr marL="81005" marR="6750" marT="6750" marB="6750" anchor="ctr">
                     <a:lnL>
                       <a:noFill/>
                     </a:lnL>
@@ -8416,7 +8416,7 @@
                       </a:r>
                     </a:p>
                   </a:txBody>
-                  <a:tcPr marL="81005" marR="6750" marT="6750" marB="0" anchor="ctr">
+                  <a:tcPr marL="81005" marR="6750" marT="6750" marB="6750" anchor="ctr">
                     <a:lnL>
                       <a:noFill/>
                     </a:lnL>
@@ -8472,7 +8472,7 @@
                       </a:r>
                     </a:p>
                   </a:txBody>
-                  <a:tcPr marL="81005" marR="6750" marT="6750" marB="0" anchor="ctr">
+                  <a:tcPr marL="81005" marR="6750" marT="6750" marB="6750" anchor="ctr">
                     <a:lnL>
                       <a:noFill/>
                     </a:lnL>
@@ -8530,7 +8530,7 @@
                       </a:r>
                     </a:p>
                   </a:txBody>
-                  <a:tcPr marL="81005" marR="6750" marT="6750" marB="0" anchor="ctr">
+                  <a:tcPr marL="81005" marR="6750" marT="6750" marB="6750" anchor="ctr">
                     <a:lnL>
                       <a:noFill/>
                     </a:lnL>
@@ -8584,7 +8584,7 @@
                       </a:r>
                     </a:p>
                   </a:txBody>
-                  <a:tcPr marL="81005" marR="6750" marT="6750" marB="0" anchor="ctr">
+                  <a:tcPr marL="81005" marR="6750" marT="6750" marB="6750" anchor="ctr">
                     <a:lnL>
                       <a:noFill/>
                     </a:lnL>
@@ -8640,7 +8640,7 @@
                       </a:r>
                     </a:p>
                   </a:txBody>
-                  <a:tcPr marL="81005" marR="6750" marT="6750" marB="0" anchor="ctr">
+                  <a:tcPr marL="81005" marR="6750" marT="6750" marB="6750" anchor="ctr">
                     <a:lnL>
                       <a:noFill/>
                     </a:lnL>
@@ -10342,8 +10342,8 @@
           </p:nvPr>
         </p:nvGraphicFramePr>
         <p:xfrm>
-          <a:off x="1341946" y="3061046"/>
-          <a:ext cx="6446520" cy="3873500"/>
+          <a:off x="1202246" y="3061046"/>
+          <a:ext cx="6725920" cy="3873500"/>
         </p:xfrm>
         <a:graphic>
           <a:graphicData uri="http://schemas.openxmlformats.org/drawingml/2006/table">
@@ -10351,7 +10351,7 @@
               <a:tblPr/>
               <a:tblGrid>
                 <a:gridCol w="1087120"/>
-                <a:gridCol w="3685540"/>
+                <a:gridCol w="3964940"/>
                 <a:gridCol w="1673860"/>
               </a:tblGrid>
               <a:tr h="288000">
@@ -10377,7 +10377,7 @@
                       </a:r>
                     </a:p>
                   </a:txBody>
-                  <a:tcPr marL="6750" marR="6750" marT="6750" marB="0" anchor="ctr">
+                  <a:tcPr marL="6750" marR="6750" marT="6750" marB="6750" anchor="ctr">
                     <a:lnL>
                       <a:noFill/>
                     </a:lnL>
@@ -10439,7 +10439,7 @@
                       </a:r>
                     </a:p>
                   </a:txBody>
-                  <a:tcPr marL="6750" marR="6750" marT="6750" marB="0" anchor="ctr">
+                  <a:tcPr marL="6750" marR="6750" marT="6750" marB="6750" anchor="ctr">
                     <a:lnL w="9525" cap="flat" cmpd="sng" algn="ctr">
                       <a:solidFill>
                         <a:schemeClr val="bg1">
@@ -10509,7 +10509,7 @@
                       </a:r>
                     </a:p>
                   </a:txBody>
-                  <a:tcPr marL="6750" marR="6750" marT="6750" marB="0" anchor="ctr">
+                  <a:tcPr marL="6750" marR="6750" marT="6750" marB="6750" anchor="ctr">
                     <a:lnL w="9525" cap="flat" cmpd="sng" algn="ctr">
                       <a:solidFill>
                         <a:schemeClr val="bg1">
@@ -10581,7 +10581,7 @@
                       </a:r>
                     </a:p>
                   </a:txBody>
-                  <a:tcPr marL="81005" marR="6750" marT="6750" marB="0" anchor="ctr">
+                  <a:tcPr marL="81005" marR="6750" marT="6750" marB="6750" anchor="ctr">
                     <a:lnL>
                       <a:noFill/>
                     </a:lnL>
@@ -10635,7 +10635,7 @@
                       </a:r>
                     </a:p>
                   </a:txBody>
-                  <a:tcPr marL="81005" marR="6750" marT="6750" marB="0" anchor="ctr">
+                  <a:tcPr marL="81005" marR="6750" marT="6750" marB="6750" anchor="ctr">
                     <a:lnL>
                       <a:noFill/>
                     </a:lnL>
@@ -10691,7 +10691,7 @@
                       </a:r>
                     </a:p>
                   </a:txBody>
-                  <a:tcPr marL="81005" marR="6750" marT="6750" marB="0" anchor="ctr">
+                  <a:tcPr marL="81005" marR="6750" marT="6750" marB="6750" anchor="ctr">
                     <a:lnL>
                       <a:noFill/>
                     </a:lnL>
@@ -10749,7 +10749,7 @@
                       </a:r>
                     </a:p>
                   </a:txBody>
-                  <a:tcPr marL="81005" marR="6750" marT="6750" marB="0" anchor="ctr">
+                  <a:tcPr marL="81005" marR="6750" marT="6750" marB="6750" anchor="ctr">
                     <a:lnL>
                       <a:noFill/>
                     </a:lnL>
@@ -10799,11 +10799,11 @@
                           <a:ea typeface="맑은 고딕" panose="020B0503020000020004" pitchFamily="34" charset="-127"/>
                           <a:cs typeface="맑은 고딕"/>
                         </a:rPr>
-                        <a:t>가짜 데이터를 썼고 실제 정보가 섞이지 않았는가?</a:t>
+                        <a:t>가짜 데이터를 사용했고 실제 정보가 섞이지 않았는가?</a:t>
                       </a:r>
                     </a:p>
                   </a:txBody>
-                  <a:tcPr marL="81005" marR="6750" marT="6750" marB="0" anchor="ctr">
+                  <a:tcPr marL="81005" marR="6750" marT="6750" marB="6750" anchor="ctr">
                     <a:lnL>
                       <a:noFill/>
                     </a:lnL>
@@ -10859,7 +10859,7 @@
                       </a:r>
                     </a:p>
                   </a:txBody>
-                  <a:tcPr marL="81005" marR="6750" marT="6750" marB="0" anchor="ctr">
+                  <a:tcPr marL="81005" marR="6750" marT="6750" marB="6750" anchor="ctr">
                     <a:lnL>
                       <a:noFill/>
                     </a:lnL>
@@ -10917,7 +10917,7 @@
                       </a:r>
                     </a:p>
                   </a:txBody>
-                  <a:tcPr marL="81005" marR="6750" marT="6750" marB="0" anchor="ctr">
+                  <a:tcPr marL="81005" marR="6750" marT="6750" marB="6750" anchor="ctr">
                     <a:lnL>
                       <a:noFill/>
                     </a:lnL>
@@ -10971,7 +10971,7 @@
                       </a:r>
                     </a:p>
                   </a:txBody>
-                  <a:tcPr marL="81005" marR="6750" marT="6750" marB="0" anchor="ctr">
+                  <a:tcPr marL="81005" marR="6750" marT="6750" marB="6750" anchor="ctr">
                     <a:lnL>
                       <a:noFill/>
                     </a:lnL>
@@ -11027,7 +11027,7 @@
                       </a:r>
                     </a:p>
                   </a:txBody>
-                  <a:tcPr marL="81005" marR="6750" marT="6750" marB="0" anchor="ctr">
+                  <a:tcPr marL="81005" marR="6750" marT="6750" marB="6750" anchor="ctr">
                     <a:lnL>
                       <a:noFill/>
                     </a:lnL>
@@ -11085,7 +11085,7 @@
                       </a:r>
                     </a:p>
                   </a:txBody>
-                  <a:tcPr marL="81005" marR="6750" marT="6750" marB="0" anchor="ctr">
+                  <a:tcPr marL="81005" marR="6750" marT="6750" marB="6750" anchor="ctr">
                     <a:lnL>
                       <a:noFill/>
                     </a:lnL>
@@ -11139,7 +11139,7 @@
                       </a:r>
                     </a:p>
                   </a:txBody>
-                  <a:tcPr marL="81005" marR="6750" marT="6750" marB="0" anchor="ctr">
+                  <a:tcPr marL="81005" marR="6750" marT="6750" marB="6750" anchor="ctr">
                     <a:lnL>
                       <a:noFill/>
                     </a:lnL>
@@ -11195,7 +11195,7 @@
                       </a:r>
                     </a:p>
                   </a:txBody>
-                  <a:tcPr marL="81005" marR="6750" marT="6750" marB="0" anchor="ctr">
+                  <a:tcPr marL="81005" marR="6750" marT="6750" marB="6750" anchor="ctr">
                     <a:lnL>
                       <a:noFill/>
                     </a:lnL>
@@ -11785,8 +11785,8 @@
           </p:nvPr>
         </p:nvGraphicFramePr>
         <p:xfrm>
-          <a:off x="1747076" y="2112010"/>
-          <a:ext cx="5636260" cy="3873500"/>
+          <a:off x="1677226" y="2112010"/>
+          <a:ext cx="5775960" cy="3873500"/>
         </p:xfrm>
         <a:graphic>
           <a:graphicData uri="http://schemas.openxmlformats.org/drawingml/2006/table">
@@ -11794,7 +11794,7 @@
               <a:tblPr/>
               <a:tblGrid>
                 <a:gridCol w="1087120"/>
-                <a:gridCol w="2679700"/>
+                <a:gridCol w="2819400"/>
                 <a:gridCol w="1869440"/>
               </a:tblGrid>
               <a:tr h="288000">
@@ -11820,7 +11820,7 @@
                       </a:r>
                     </a:p>
                   </a:txBody>
-                  <a:tcPr marL="6750" marR="6750" marT="6750" marB="0" anchor="ctr">
+                  <a:tcPr marL="6750" marR="6750" marT="6750" marB="6750" anchor="ctr">
                     <a:lnL>
                       <a:noFill/>
                     </a:lnL>
@@ -11882,7 +11882,7 @@
                       </a:r>
                     </a:p>
                   </a:txBody>
-                  <a:tcPr marL="6750" marR="6750" marT="6750" marB="0" anchor="ctr">
+                  <a:tcPr marL="6750" marR="6750" marT="6750" marB="6750" anchor="ctr">
                     <a:lnL w="9525" cap="flat" cmpd="sng" algn="ctr">
                       <a:solidFill>
                         <a:schemeClr val="bg1">
@@ -11952,7 +11952,7 @@
                       </a:r>
                     </a:p>
                   </a:txBody>
-                  <a:tcPr marL="6750" marR="6750" marT="6750" marB="0" anchor="ctr">
+                  <a:tcPr marL="6750" marR="6750" marT="6750" marB="6750" anchor="ctr">
                     <a:lnL w="9525" cap="flat" cmpd="sng" algn="ctr">
                       <a:solidFill>
                         <a:schemeClr val="bg1">
@@ -12024,7 +12024,7 @@
                       </a:r>
                     </a:p>
                   </a:txBody>
-                  <a:tcPr marL="81005" marR="6750" marT="6750" marB="0" anchor="ctr">
+                  <a:tcPr marL="81005" marR="6750" marT="6750" marB="6750" anchor="ctr">
                     <a:lnL>
                       <a:noFill/>
                     </a:lnL>
@@ -12078,7 +12078,7 @@
                       </a:r>
                     </a:p>
                   </a:txBody>
-                  <a:tcPr marL="81005" marR="6750" marT="6750" marB="0" anchor="ctr">
+                  <a:tcPr marL="81005" marR="6750" marT="6750" marB="6750" anchor="ctr">
                     <a:lnL>
                       <a:noFill/>
                     </a:lnL>
@@ -12134,7 +12134,7 @@
                       </a:r>
                     </a:p>
                   </a:txBody>
-                  <a:tcPr marL="81005" marR="6750" marT="6750" marB="0" anchor="ctr">
+                  <a:tcPr marL="81005" marR="6750" marT="6750" marB="6750" anchor="ctr">
                     <a:lnL>
                       <a:noFill/>
                     </a:lnL>
@@ -12192,7 +12192,7 @@
                       </a:r>
                     </a:p>
                   </a:txBody>
-                  <a:tcPr marL="81005" marR="6750" marT="6750" marB="0" anchor="ctr">
+                  <a:tcPr marL="81005" marR="6750" marT="6750" marB="6750" anchor="ctr">
                     <a:lnL>
                       <a:noFill/>
                     </a:lnL>
@@ -12246,7 +12246,7 @@
                       </a:r>
                     </a:p>
                   </a:txBody>
-                  <a:tcPr marL="81005" marR="6750" marT="6750" marB="0" anchor="ctr">
+                  <a:tcPr marL="81005" marR="6750" marT="6750" marB="6750" anchor="ctr">
                     <a:lnL>
                       <a:noFill/>
                     </a:lnL>
@@ -12302,7 +12302,7 @@
                       </a:r>
                     </a:p>
                   </a:txBody>
-                  <a:tcPr marL="81005" marR="6750" marT="6750" marB="0" anchor="ctr">
+                  <a:tcPr marL="81005" marR="6750" marT="6750" marB="6750" anchor="ctr">
                     <a:lnL>
                       <a:noFill/>
                     </a:lnL>
@@ -12360,7 +12360,7 @@
                       </a:r>
                     </a:p>
                   </a:txBody>
-                  <a:tcPr marL="81005" marR="6750" marT="6750" marB="0" anchor="ctr">
+                  <a:tcPr marL="81005" marR="6750" marT="6750" marB="6750" anchor="ctr">
                     <a:lnL>
                       <a:noFill/>
                     </a:lnL>
@@ -12414,7 +12414,7 @@
                       </a:r>
                     </a:p>
                   </a:txBody>
-                  <a:tcPr marL="81005" marR="6750" marT="6750" marB="0" anchor="ctr">
+                  <a:tcPr marL="81005" marR="6750" marT="6750" marB="6750" anchor="ctr">
                     <a:lnL>
                       <a:noFill/>
                     </a:lnL>
@@ -12470,7 +12470,7 @@
                       </a:r>
                     </a:p>
                   </a:txBody>
-                  <a:tcPr marL="81005" marR="6750" marT="6750" marB="0" anchor="ctr">
+                  <a:tcPr marL="81005" marR="6750" marT="6750" marB="6750" anchor="ctr">
                     <a:lnL>
                       <a:noFill/>
                     </a:lnL>
@@ -12528,7 +12528,7 @@
                       </a:r>
                     </a:p>
                   </a:txBody>
-                  <a:tcPr marL="81005" marR="6750" marT="6750" marB="0" anchor="ctr">
+                  <a:tcPr marL="81005" marR="6750" marT="6750" marB="6750" anchor="ctr">
                     <a:lnL>
                       <a:noFill/>
                     </a:lnL>
@@ -12578,11 +12578,11 @@
                           <a:ea typeface="맑은 고딕" panose="020B0503020000020004" pitchFamily="34" charset="-127"/>
                           <a:cs typeface="맑은 고딕"/>
                         </a:rPr>
-                        <a:t>다시 쓸 검사와 과제가 생겼는가?</a:t>
+                        <a:t>다시 사용할 검사와 과제가 생겼는가?</a:t>
                       </a:r>
                     </a:p>
                   </a:txBody>
-                  <a:tcPr marL="81005" marR="6750" marT="6750" marB="0" anchor="ctr">
+                  <a:tcPr marL="81005" marR="6750" marT="6750" marB="6750" anchor="ctr">
                     <a:lnL>
                       <a:noFill/>
                     </a:lnL>
@@ -12638,7 +12638,7 @@
                       </a:r>
                     </a:p>
                   </a:txBody>
-                  <a:tcPr marL="81005" marR="6750" marT="6750" marB="0" anchor="ctr">
+                  <a:tcPr marL="81005" marR="6750" marT="6750" marB="6750" anchor="ctr">
                     <a:lnL>
                       <a:noFill/>
                     </a:lnL>
@@ -13704,7 +13704,7 @@
                       </a:r>
                     </a:p>
                   </a:txBody>
-                  <a:tcPr marL="6750" marR="6750" marT="6750" marB="0" anchor="ctr">
+                  <a:tcPr marL="6750" marR="6750" marT="6750" marB="6750" anchor="ctr">
                     <a:lnL>
                       <a:noFill/>
                     </a:lnL>
@@ -13766,7 +13766,7 @@
                       </a:r>
                     </a:p>
                   </a:txBody>
-                  <a:tcPr marL="6750" marR="6750" marT="6750" marB="0" anchor="ctr">
+                  <a:tcPr marL="6750" marR="6750" marT="6750" marB="6750" anchor="ctr">
                     <a:lnL w="9525" cap="flat" cmpd="sng" algn="ctr">
                       <a:solidFill>
                         <a:schemeClr val="bg1">
@@ -13836,7 +13836,7 @@
                       </a:r>
                     </a:p>
                   </a:txBody>
-                  <a:tcPr marL="6750" marR="6750" marT="6750" marB="0" anchor="ctr">
+                  <a:tcPr marL="6750" marR="6750" marT="6750" marB="6750" anchor="ctr">
                     <a:lnL w="9525" cap="flat" cmpd="sng" algn="ctr">
                       <a:solidFill>
                         <a:schemeClr val="bg1">
@@ -13908,7 +13908,7 @@
                       </a:r>
                     </a:p>
                   </a:txBody>
-                  <a:tcPr marL="81005" marR="6750" marT="6750" marB="0" anchor="ctr">
+                  <a:tcPr marL="81005" marR="6750" marT="6750" marB="6750" anchor="ctr">
                     <a:lnL>
                       <a:noFill/>
                     </a:lnL>
@@ -13962,7 +13962,7 @@
                       </a:r>
                     </a:p>
                   </a:txBody>
-                  <a:tcPr marL="81005" marR="6750" marT="6750" marB="0" anchor="ctr">
+                  <a:tcPr marL="81005" marR="6750" marT="6750" marB="6750" anchor="ctr">
                     <a:lnL>
                       <a:noFill/>
                     </a:lnL>
@@ -14018,7 +14018,7 @@
                       </a:r>
                     </a:p>
                   </a:txBody>
-                  <a:tcPr marL="81005" marR="6750" marT="6750" marB="0" anchor="ctr">
+                  <a:tcPr marL="81005" marR="6750" marT="6750" marB="6750" anchor="ctr">
                     <a:lnL>
                       <a:noFill/>
                     </a:lnL>
@@ -14076,7 +14076,7 @@
                       </a:r>
                     </a:p>
                   </a:txBody>
-                  <a:tcPr marL="81005" marR="6750" marT="6750" marB="0" anchor="ctr">
+                  <a:tcPr marL="81005" marR="6750" marT="6750" marB="6750" anchor="ctr">
                     <a:lnL>
                       <a:noFill/>
                     </a:lnL>
@@ -14130,7 +14130,7 @@
                       </a:r>
                     </a:p>
                   </a:txBody>
-                  <a:tcPr marL="81005" marR="6750" marT="6750" marB="0" anchor="ctr">
+                  <a:tcPr marL="81005" marR="6750" marT="6750" marB="6750" anchor="ctr">
                     <a:lnL>
                       <a:noFill/>
                     </a:lnL>
@@ -14186,7 +14186,7 @@
                       </a:r>
                     </a:p>
                   </a:txBody>
-                  <a:tcPr marL="81005" marR="6750" marT="6750" marB="0" anchor="ctr">
+                  <a:tcPr marL="81005" marR="6750" marT="6750" marB="6750" anchor="ctr">
                     <a:lnL>
                       <a:noFill/>
                     </a:lnL>
@@ -14244,7 +14244,7 @@
                       </a:r>
                     </a:p>
                   </a:txBody>
-                  <a:tcPr marL="81005" marR="6750" marT="6750" marB="0" anchor="ctr">
+                  <a:tcPr marL="81005" marR="6750" marT="6750" marB="6750" anchor="ctr">
                     <a:lnL>
                       <a:noFill/>
                     </a:lnL>
@@ -14298,7 +14298,7 @@
                       </a:r>
                     </a:p>
                   </a:txBody>
-                  <a:tcPr marL="81005" marR="6750" marT="6750" marB="0" anchor="ctr">
+                  <a:tcPr marL="81005" marR="6750" marT="6750" marB="6750" anchor="ctr">
                     <a:lnL>
                       <a:noFill/>
                     </a:lnL>
@@ -14354,7 +14354,7 @@
                       </a:r>
                     </a:p>
                   </a:txBody>
-                  <a:tcPr marL="81005" marR="6750" marT="6750" marB="0" anchor="ctr">
+                  <a:tcPr marL="81005" marR="6750" marT="6750" marB="6750" anchor="ctr">
                     <a:lnL>
                       <a:noFill/>
                     </a:lnL>
@@ -15904,7 +15904,7 @@
                 <a:latin typeface="맑은 고딕"/>
                 <a:ea typeface="맑은 고딕"/>
               </a:rPr>
-              <a:t> 판단하고, 그 판단의 근거와 함께 평가 세트를 MD 하나로 정리해라. 새 결정을 추가하지 말고 다섯 장을 넘지 않게 핵심만 남겨라.</a:t>
+              <a:t> 판단하고, 그 판단의 근거와 함께 평가 세트를 MD 하나로 정리해라. 새 결정을 추가하지 말고 5장을 넘지 않게 핵심만 남겨라.</a:t>
             </a:r>
           </a:p>
           <a:p>
@@ -17051,7 +17051,7 @@
                       </a:r>
                     </a:p>
                   </a:txBody>
-                  <a:tcPr marL="6750" marR="6750" marT="6750" marB="0" anchor="ctr">
+                  <a:tcPr marL="6750" marR="6750" marT="6750" marB="6750" anchor="ctr">
                     <a:lnL>
                       <a:noFill/>
                     </a:lnL>
@@ -17113,7 +17113,7 @@
                       </a:r>
                     </a:p>
                   </a:txBody>
-                  <a:tcPr marL="6750" marR="6750" marT="6750" marB="0" anchor="ctr">
+                  <a:tcPr marL="6750" marR="6750" marT="6750" marB="6750" anchor="ctr">
                     <a:lnL w="9525" cap="flat" cmpd="sng" algn="ctr">
                       <a:solidFill>
                         <a:schemeClr val="bg1">
@@ -17183,7 +17183,7 @@
                       </a:r>
                     </a:p>
                   </a:txBody>
-                  <a:tcPr marL="6750" marR="6750" marT="6750" marB="0" anchor="ctr">
+                  <a:tcPr marL="6750" marR="6750" marT="6750" marB="6750" anchor="ctr">
                     <a:lnL w="9525" cap="flat" cmpd="sng" algn="ctr">
                       <a:solidFill>
                         <a:schemeClr val="bg1">
@@ -17253,7 +17253,7 @@
                       </a:r>
                     </a:p>
                   </a:txBody>
-                  <a:tcPr marL="6750" marR="6750" marT="6750" marB="0" anchor="ctr">
+                  <a:tcPr marL="6750" marR="6750" marT="6750" marB="6750" anchor="ctr">
                     <a:lnL w="9525" cap="flat" cmpd="sng" algn="ctr">
                       <a:solidFill>
                         <a:schemeClr val="bg1">
@@ -17325,7 +17325,7 @@
                       </a:r>
                     </a:p>
                   </a:txBody>
-                  <a:tcPr marL="81005" marR="6750" marT="6750" marB="0" anchor="ctr">
+                  <a:tcPr marL="81005" marR="6750" marT="6750" marB="6750" anchor="ctr">
                     <a:lnL>
                       <a:noFill/>
                     </a:lnL>
@@ -17379,7 +17379,7 @@
                       </a:r>
                     </a:p>
                   </a:txBody>
-                  <a:tcPr marL="81005" marR="6750" marT="6750" marB="0" anchor="ctr">
+                  <a:tcPr marL="81005" marR="6750" marT="6750" marB="6750" anchor="ctr">
                     <a:lnL>
                       <a:noFill/>
                     </a:lnL>
@@ -17435,7 +17435,7 @@
                       </a:r>
                     </a:p>
                   </a:txBody>
-                  <a:tcPr marL="81005" marR="6750" marT="6750" marB="0" anchor="ctr">
+                  <a:tcPr marL="81005" marR="6750" marT="6750" marB="6750" anchor="ctr">
                     <a:lnL>
                       <a:noFill/>
                     </a:lnL>
@@ -17491,7 +17491,7 @@
                       </a:r>
                     </a:p>
                   </a:txBody>
-                  <a:tcPr marL="81005" marR="6750" marT="6750" marB="0" anchor="ctr">
+                  <a:tcPr marL="81005" marR="6750" marT="6750" marB="6750" anchor="ctr">
                     <a:lnL>
                       <a:noFill/>
                     </a:lnL>
@@ -17549,7 +17549,7 @@
                       </a:r>
                     </a:p>
                   </a:txBody>
-                  <a:tcPr marL="81005" marR="6750" marT="6750" marB="0" anchor="ctr">
+                  <a:tcPr marL="81005" marR="6750" marT="6750" marB="6750" anchor="ctr">
                     <a:lnL>
                       <a:noFill/>
                     </a:lnL>
@@ -17603,7 +17603,7 @@
                       </a:r>
                     </a:p>
                   </a:txBody>
-                  <a:tcPr marL="81005" marR="6750" marT="6750" marB="0" anchor="ctr">
+                  <a:tcPr marL="81005" marR="6750" marT="6750" marB="6750" anchor="ctr">
                     <a:lnL>
                       <a:noFill/>
                     </a:lnL>
@@ -17659,7 +17659,7 @@
                       </a:r>
                     </a:p>
                   </a:txBody>
-                  <a:tcPr marL="81005" marR="6750" marT="6750" marB="0" anchor="ctr">
+                  <a:tcPr marL="81005" marR="6750" marT="6750" marB="6750" anchor="ctr">
                     <a:lnL>
                       <a:noFill/>
                     </a:lnL>
@@ -17715,7 +17715,7 @@
                       </a:r>
                     </a:p>
                   </a:txBody>
-                  <a:tcPr marL="81005" marR="6750" marT="6750" marB="0" anchor="ctr">
+                  <a:tcPr marL="81005" marR="6750" marT="6750" marB="6750" anchor="ctr">
                     <a:lnL>
                       <a:noFill/>
                     </a:lnL>
@@ -17773,7 +17773,7 @@
                       </a:r>
                     </a:p>
                   </a:txBody>
-                  <a:tcPr marL="81005" marR="6750" marT="6750" marB="0" anchor="ctr">
+                  <a:tcPr marL="81005" marR="6750" marT="6750" marB="6750" anchor="ctr">
                     <a:lnL>
                       <a:noFill/>
                     </a:lnL>
@@ -17827,7 +17827,7 @@
                       </a:r>
                     </a:p>
                   </a:txBody>
-                  <a:tcPr marL="81005" marR="6750" marT="6750" marB="0" anchor="ctr">
+                  <a:tcPr marL="81005" marR="6750" marT="6750" marB="6750" anchor="ctr">
                     <a:lnL>
                       <a:noFill/>
                     </a:lnL>
@@ -17883,7 +17883,7 @@
                       </a:r>
                     </a:p>
                   </a:txBody>
-                  <a:tcPr marL="81005" marR="6750" marT="6750" marB="0" anchor="ctr">
+                  <a:tcPr marL="81005" marR="6750" marT="6750" marB="6750" anchor="ctr">
                     <a:lnL>
                       <a:noFill/>
                     </a:lnL>
@@ -17939,7 +17939,7 @@
                       </a:r>
                     </a:p>
                   </a:txBody>
-                  <a:tcPr marL="81005" marR="6750" marT="6750" marB="0" anchor="ctr">
+                  <a:tcPr marL="81005" marR="6750" marT="6750" marB="6750" anchor="ctr">
                     <a:lnL>
                       <a:noFill/>
                     </a:lnL>
@@ -17997,7 +17997,7 @@
                       </a:r>
                     </a:p>
                   </a:txBody>
-                  <a:tcPr marL="81005" marR="6750" marT="6750" marB="0" anchor="ctr">
+                  <a:tcPr marL="81005" marR="6750" marT="6750" marB="6750" anchor="ctr">
                     <a:lnL>
                       <a:noFill/>
                     </a:lnL>
@@ -18051,7 +18051,7 @@
                       </a:r>
                     </a:p>
                   </a:txBody>
-                  <a:tcPr marL="81005" marR="6750" marT="6750" marB="0" anchor="ctr">
+                  <a:tcPr marL="81005" marR="6750" marT="6750" marB="6750" anchor="ctr">
                     <a:lnL>
                       <a:noFill/>
                     </a:lnL>
@@ -18107,7 +18107,7 @@
                       </a:r>
                     </a:p>
                   </a:txBody>
-                  <a:tcPr marL="81005" marR="6750" marT="6750" marB="0" anchor="ctr">
+                  <a:tcPr marL="81005" marR="6750" marT="6750" marB="6750" anchor="ctr">
                     <a:lnL>
                       <a:noFill/>
                     </a:lnL>
@@ -18163,7 +18163,7 @@
                       </a:r>
                     </a:p>
                   </a:txBody>
-                  <a:tcPr marL="81005" marR="6750" marT="6750" marB="0" anchor="ctr">
+                  <a:tcPr marL="81005" marR="6750" marT="6750" marB="6750" anchor="ctr">
                     <a:lnL>
                       <a:noFill/>
                     </a:lnL>
@@ -18221,7 +18221,7 @@
                       </a:r>
                     </a:p>
                   </a:txBody>
-                  <a:tcPr marL="81005" marR="6750" marT="6750" marB="0" anchor="ctr">
+                  <a:tcPr marL="81005" marR="6750" marT="6750" marB="6750" anchor="ctr">
                     <a:lnL>
                       <a:noFill/>
                     </a:lnL>
@@ -18275,7 +18275,7 @@
                       </a:r>
                     </a:p>
                   </a:txBody>
-                  <a:tcPr marL="81005" marR="6750" marT="6750" marB="0" anchor="ctr">
+                  <a:tcPr marL="81005" marR="6750" marT="6750" marB="6750" anchor="ctr">
                     <a:lnL>
                       <a:noFill/>
                     </a:lnL>
@@ -18331,7 +18331,7 @@
                       </a:r>
                     </a:p>
                   </a:txBody>
-                  <a:tcPr marL="81005" marR="6750" marT="6750" marB="0" anchor="ctr">
+                  <a:tcPr marL="81005" marR="6750" marT="6750" marB="6750" anchor="ctr">
                     <a:lnL>
                       <a:noFill/>
                     </a:lnL>
@@ -18387,7 +18387,7 @@
                       </a:r>
                     </a:p>
                   </a:txBody>
-                  <a:tcPr marL="81005" marR="6750" marT="6750" marB="0" anchor="ctr">
+                  <a:tcPr marL="81005" marR="6750" marT="6750" marB="6750" anchor="ctr">
                     <a:lnL>
                       <a:noFill/>
                     </a:lnL>
@@ -19217,7 +19217,7 @@
                       </a:r>
                     </a:p>
                   </a:txBody>
-                  <a:tcPr marL="6750" marR="6750" marT="6750" marB="0" anchor="ctr">
+                  <a:tcPr marL="6750" marR="6750" marT="6750" marB="6750" anchor="ctr">
                     <a:lnL>
                       <a:noFill/>
                     </a:lnL>
@@ -19279,7 +19279,7 @@
                       </a:r>
                     </a:p>
                   </a:txBody>
-                  <a:tcPr marL="6750" marR="6750" marT="6750" marB="0" anchor="ctr">
+                  <a:tcPr marL="6750" marR="6750" marT="6750" marB="6750" anchor="ctr">
                     <a:lnL w="9525" cap="flat" cmpd="sng" algn="ctr">
                       <a:solidFill>
                         <a:schemeClr val="bg1">
@@ -19349,7 +19349,7 @@
                       </a:r>
                     </a:p>
                   </a:txBody>
-                  <a:tcPr marL="6750" marR="6750" marT="6750" marB="0" anchor="ctr">
+                  <a:tcPr marL="6750" marR="6750" marT="6750" marB="6750" anchor="ctr">
                     <a:lnL w="9525" cap="flat" cmpd="sng" algn="ctr">
                       <a:solidFill>
                         <a:schemeClr val="bg1">
@@ -19421,7 +19421,7 @@
                       </a:r>
                     </a:p>
                   </a:txBody>
-                  <a:tcPr marL="81005" marR="6750" marT="6750" marB="0" anchor="ctr">
+                  <a:tcPr marL="81005" marR="6750" marT="6750" marB="6750" anchor="ctr">
                     <a:lnL>
                       <a:noFill/>
                     </a:lnL>
@@ -19475,7 +19475,7 @@
                       </a:r>
                     </a:p>
                   </a:txBody>
-                  <a:tcPr marL="81005" marR="6750" marT="6750" marB="0" anchor="ctr">
+                  <a:tcPr marL="81005" marR="6750" marT="6750" marB="6750" anchor="ctr">
                     <a:lnL>
                       <a:noFill/>
                     </a:lnL>
@@ -19531,7 +19531,7 @@
                       </a:r>
                     </a:p>
                   </a:txBody>
-                  <a:tcPr marL="81005" marR="6750" marT="6750" marB="0" anchor="ctr">
+                  <a:tcPr marL="81005" marR="6750" marT="6750" marB="6750" anchor="ctr">
                     <a:lnL>
                       <a:noFill/>
                     </a:lnL>
@@ -19589,7 +19589,7 @@
                       </a:r>
                     </a:p>
                   </a:txBody>
-                  <a:tcPr marL="81005" marR="6750" marT="6750" marB="0" anchor="ctr">
+                  <a:tcPr marL="81005" marR="6750" marT="6750" marB="6750" anchor="ctr">
                     <a:lnL>
                       <a:noFill/>
                     </a:lnL>
@@ -19643,7 +19643,7 @@
                       </a:r>
                     </a:p>
                   </a:txBody>
-                  <a:tcPr marL="81005" marR="6750" marT="6750" marB="0" anchor="ctr">
+                  <a:tcPr marL="81005" marR="6750" marT="6750" marB="6750" anchor="ctr">
                     <a:lnL>
                       <a:noFill/>
                     </a:lnL>
@@ -19699,7 +19699,7 @@
                       </a:r>
                     </a:p>
                   </a:txBody>
-                  <a:tcPr marL="81005" marR="6750" marT="6750" marB="0" anchor="ctr">
+                  <a:tcPr marL="81005" marR="6750" marT="6750" marB="6750" anchor="ctr">
                     <a:lnL>
                       <a:noFill/>
                     </a:lnL>
@@ -19753,11 +19753,11 @@
                           <a:ea typeface="맑은 고딕" panose="020B0503020000020004" pitchFamily="34" charset="-127"/>
                           <a:cs typeface="맑은 고딕"/>
                         </a:rPr>
-                        <a:t>코드·테스트 쓰기</a:t>
+                        <a:t>코드·테스트 작성</a:t>
                       </a:r>
                     </a:p>
                   </a:txBody>
-                  <a:tcPr marL="81005" marR="6750" marT="6750" marB="0" anchor="ctr">
+                  <a:tcPr marL="81005" marR="6750" marT="6750" marB="6750" anchor="ctr">
                     <a:lnL>
                       <a:noFill/>
                     </a:lnL>
@@ -19811,7 +19811,7 @@
                       </a:r>
                     </a:p>
                   </a:txBody>
-                  <a:tcPr marL="81005" marR="6750" marT="6750" marB="0" anchor="ctr">
+                  <a:tcPr marL="81005" marR="6750" marT="6750" marB="6750" anchor="ctr">
                     <a:lnL>
                       <a:noFill/>
                     </a:lnL>
@@ -19867,7 +19867,7 @@
                       </a:r>
                     </a:p>
                   </a:txBody>
-                  <a:tcPr marL="81005" marR="6750" marT="6750" marB="0" anchor="ctr">
+                  <a:tcPr marL="81005" marR="6750" marT="6750" marB="6750" anchor="ctr">
                     <a:lnL>
                       <a:noFill/>
                     </a:lnL>
@@ -19925,7 +19925,7 @@
                       </a:r>
                     </a:p>
                   </a:txBody>
-                  <a:tcPr marL="81005" marR="6750" marT="6750" marB="0" anchor="ctr">
+                  <a:tcPr marL="81005" marR="6750" marT="6750" marB="6750" anchor="ctr">
                     <a:lnL>
                       <a:noFill/>
                     </a:lnL>
@@ -19979,7 +19979,7 @@
                       </a:r>
                     </a:p>
                   </a:txBody>
-                  <a:tcPr marL="81005" marR="6750" marT="6750" marB="0" anchor="ctr">
+                  <a:tcPr marL="81005" marR="6750" marT="6750" marB="6750" anchor="ctr">
                     <a:lnL>
                       <a:noFill/>
                     </a:lnL>
@@ -20035,7 +20035,7 @@
                       </a:r>
                     </a:p>
                   </a:txBody>
-                  <a:tcPr marL="81005" marR="6750" marT="6750" marB="0" anchor="ctr">
+                  <a:tcPr marL="81005" marR="6750" marT="6750" marB="6750" anchor="ctr">
                     <a:lnL>
                       <a:noFill/>
                     </a:lnL>
@@ -20629,7 +20629,7 @@
                       </a:r>
                     </a:p>
                   </a:txBody>
-                  <a:tcPr marL="6750" marR="6750" marT="6750" marB="0" anchor="ctr">
+                  <a:tcPr marL="6750" marR="6750" marT="6750" marB="6750" anchor="ctr">
                     <a:lnL>
                       <a:noFill/>
                     </a:lnL>
@@ -20691,7 +20691,7 @@
                       </a:r>
                     </a:p>
                   </a:txBody>
-                  <a:tcPr marL="6750" marR="6750" marT="6750" marB="0" anchor="ctr">
+                  <a:tcPr marL="6750" marR="6750" marT="6750" marB="6750" anchor="ctr">
                     <a:lnL w="9525" cap="flat" cmpd="sng" algn="ctr">
                       <a:solidFill>
                         <a:schemeClr val="bg1">
@@ -20761,7 +20761,7 @@
                       </a:r>
                     </a:p>
                   </a:txBody>
-                  <a:tcPr marL="6750" marR="6750" marT="6750" marB="0" anchor="ctr">
+                  <a:tcPr marL="6750" marR="6750" marT="6750" marB="6750" anchor="ctr">
                     <a:lnL w="9525" cap="flat" cmpd="sng" algn="ctr">
                       <a:solidFill>
                         <a:schemeClr val="bg1">
@@ -20833,7 +20833,7 @@
                       </a:r>
                     </a:p>
                   </a:txBody>
-                  <a:tcPr marL="81005" marR="6750" marT="6750" marB="0" anchor="ctr">
+                  <a:tcPr marL="81005" marR="6750" marT="6750" marB="6750" anchor="ctr">
                     <a:lnL>
                       <a:noFill/>
                     </a:lnL>
@@ -20887,7 +20887,7 @@
                       </a:r>
                     </a:p>
                   </a:txBody>
-                  <a:tcPr marL="81005" marR="6750" marT="6750" marB="0" anchor="ctr">
+                  <a:tcPr marL="81005" marR="6750" marT="6750" marB="6750" anchor="ctr">
                     <a:lnL>
                       <a:noFill/>
                     </a:lnL>
@@ -20943,7 +20943,7 @@
                       </a:r>
                     </a:p>
                   </a:txBody>
-                  <a:tcPr marL="81005" marR="6750" marT="6750" marB="0" anchor="ctr">
+                  <a:tcPr marL="81005" marR="6750" marT="6750" marB="6750" anchor="ctr">
                     <a:lnL>
                       <a:noFill/>
                     </a:lnL>
@@ -21001,7 +21001,7 @@
                       </a:r>
                     </a:p>
                   </a:txBody>
-                  <a:tcPr marL="81005" marR="6750" marT="6750" marB="0" anchor="ctr">
+                  <a:tcPr marL="81005" marR="6750" marT="6750" marB="6750" anchor="ctr">
                     <a:lnL>
                       <a:noFill/>
                     </a:lnL>
@@ -21055,7 +21055,7 @@
                       </a:r>
                     </a:p>
                   </a:txBody>
-                  <a:tcPr marL="81005" marR="6750" marT="6750" marB="0" anchor="ctr">
+                  <a:tcPr marL="81005" marR="6750" marT="6750" marB="6750" anchor="ctr">
                     <a:lnL>
                       <a:noFill/>
                     </a:lnL>
@@ -21107,11 +21107,11 @@
                           <a:ea typeface="맑은 고딕" panose="020B0503020000020004" pitchFamily="34" charset="-127"/>
                           <a:cs typeface="맑은 고딕"/>
                         </a:rPr>
-                        <a:t>한 번 쓸 일에 검사를 만든다</a:t>
+                        <a:t>한 번만 할 일에 검사를 만든다</a:t>
                       </a:r>
                     </a:p>
                   </a:txBody>
-                  <a:tcPr marL="81005" marR="6750" marT="6750" marB="0" anchor="ctr">
+                  <a:tcPr marL="81005" marR="6750" marT="6750" marB="6750" anchor="ctr">
                     <a:lnL>
                       <a:noFill/>
                     </a:lnL>
@@ -21169,7 +21169,7 @@
                       </a:r>
                     </a:p>
                   </a:txBody>
-                  <a:tcPr marL="81005" marR="6750" marT="6750" marB="0" anchor="ctr">
+                  <a:tcPr marL="81005" marR="6750" marT="6750" marB="6750" anchor="ctr">
                     <a:lnL>
                       <a:noFill/>
                     </a:lnL>
@@ -21223,7 +21223,7 @@
                       </a:r>
                     </a:p>
                   </a:txBody>
-                  <a:tcPr marL="81005" marR="6750" marT="6750" marB="0" anchor="ctr">
+                  <a:tcPr marL="81005" marR="6750" marT="6750" marB="6750" anchor="ctr">
                     <a:lnL>
                       <a:noFill/>
                     </a:lnL>
@@ -21279,7 +21279,7 @@
                       </a:r>
                     </a:p>
                   </a:txBody>
-                  <a:tcPr marL="81005" marR="6750" marT="6750" marB="0" anchor="ctr">
+                  <a:tcPr marL="81005" marR="6750" marT="6750" marB="6750" anchor="ctr">
                     <a:lnL>
                       <a:noFill/>
                     </a:lnL>
@@ -21373,7 +21373,7 @@
                 <a:latin typeface="맑은 고딕"/>
                 <a:ea typeface="맑은 고딕"/>
               </a:rPr>
-              <a:t>한 번 쓸 것인지 열 번 올 것인지</a:t>
+              <a:t>한 번만 할 일인지 열 번 올 일인지</a:t>
             </a:r>
             <a:r>
               <a:rPr sz="1800" b="0">
@@ -22663,7 +22663,7 @@
                 <a:latin typeface="맑은 고딕"/>
                 <a:ea typeface="맑은 고딕"/>
               </a:rPr>
-              <a:t> 그 벤치마크는 Python 프로젝트만 쓰고 열두 개뿐이며, 과제의 약 70%가 그중 셋에서 나온다.</a:t>
+              <a:t> 그 벤치마크는 Python 프로젝트만 사용하고 열두 개뿐이며, 과제의 약 70%가 그중 셋에서 나온다.</a:t>
             </a:r>
           </a:p>
           <a:p>
@@ -23009,7 +23009,7 @@
                 <a:latin typeface="맑은 고딕"/>
                 <a:ea typeface="맑은 고딕"/>
               </a:rPr>
-              <a:t>숙련 개발자가 AI 도구를 쓰면 쓰지 않을 때보다 </a:t>
+              <a:t>숙련 개발자가 AI 도구를 사용하면 사용하지 않을 때보다 </a:t>
             </a:r>
             <a:r>
               <a:rPr sz="1800" b="1">
@@ -23489,7 +23489,7 @@
                       </a:r>
                     </a:p>
                   </a:txBody>
-                  <a:tcPr marL="6750" marR="6750" marT="6750" marB="0" anchor="ctr">
+                  <a:tcPr marL="6750" marR="6750" marT="6750" marB="6750" anchor="ctr">
                     <a:lnL>
                       <a:noFill/>
                     </a:lnL>
@@ -23551,7 +23551,7 @@
                       </a:r>
                     </a:p>
                   </a:txBody>
-                  <a:tcPr marL="6750" marR="6750" marT="6750" marB="0" anchor="ctr">
+                  <a:tcPr marL="6750" marR="6750" marT="6750" marB="6750" anchor="ctr">
                     <a:lnL w="9525" cap="flat" cmpd="sng" algn="ctr">
                       <a:solidFill>
                         <a:schemeClr val="bg1">
@@ -23621,7 +23621,7 @@
                       </a:r>
                     </a:p>
                   </a:txBody>
-                  <a:tcPr marL="6750" marR="6750" marT="6750" marB="0" anchor="ctr">
+                  <a:tcPr marL="6750" marR="6750" marT="6750" marB="6750" anchor="ctr">
                     <a:lnL w="9525" cap="flat" cmpd="sng" algn="ctr">
                       <a:solidFill>
                         <a:schemeClr val="bg1">
@@ -23693,7 +23693,7 @@
                       </a:r>
                     </a:p>
                   </a:txBody>
-                  <a:tcPr marL="81005" marR="6750" marT="6750" marB="0" anchor="ctr">
+                  <a:tcPr marL="81005" marR="6750" marT="6750" marB="6750" anchor="ctr">
                     <a:lnL>
                       <a:noFill/>
                     </a:lnL>
@@ -23747,7 +23747,7 @@
                       </a:r>
                     </a:p>
                   </a:txBody>
-                  <a:tcPr marL="81005" marR="6750" marT="6750" marB="0" anchor="ctr">
+                  <a:tcPr marL="81005" marR="6750" marT="6750" marB="6750" anchor="ctr">
                     <a:lnL>
                       <a:noFill/>
                     </a:lnL>
@@ -23803,7 +23803,7 @@
                       </a:r>
                     </a:p>
                   </a:txBody>
-                  <a:tcPr marL="81005" marR="6750" marT="6750" marB="0" anchor="ctr">
+                  <a:tcPr marL="81005" marR="6750" marT="6750" marB="6750" anchor="ctr">
                     <a:lnL>
                       <a:noFill/>
                     </a:lnL>
@@ -23861,7 +23861,7 @@
                       </a:r>
                     </a:p>
                   </a:txBody>
-                  <a:tcPr marL="81005" marR="6750" marT="6750" marB="0" anchor="ctr">
+                  <a:tcPr marL="81005" marR="6750" marT="6750" marB="6750" anchor="ctr">
                     <a:lnL>
                       <a:noFill/>
                     </a:lnL>
@@ -23915,7 +23915,7 @@
                       </a:r>
                     </a:p>
                   </a:txBody>
-                  <a:tcPr marL="81005" marR="6750" marT="6750" marB="0" anchor="ctr">
+                  <a:tcPr marL="81005" marR="6750" marT="6750" marB="6750" anchor="ctr">
                     <a:lnL>
                       <a:noFill/>
                     </a:lnL>
@@ -23971,7 +23971,7 @@
                       </a:r>
                     </a:p>
                   </a:txBody>
-                  <a:tcPr marL="81005" marR="6750" marT="6750" marB="0" anchor="ctr">
+                  <a:tcPr marL="81005" marR="6750" marT="6750" marB="6750" anchor="ctr">
                     <a:lnL>
                       <a:noFill/>
                     </a:lnL>
@@ -24029,7 +24029,7 @@
                       </a:r>
                     </a:p>
                   </a:txBody>
-                  <a:tcPr marL="81005" marR="6750" marT="6750" marB="0" anchor="ctr">
+                  <a:tcPr marL="81005" marR="6750" marT="6750" marB="6750" anchor="ctr">
                     <a:lnL>
                       <a:noFill/>
                     </a:lnL>
@@ -24083,7 +24083,7 @@
                       </a:r>
                     </a:p>
                   </a:txBody>
-                  <a:tcPr marL="81005" marR="6750" marT="6750" marB="0" anchor="ctr">
+                  <a:tcPr marL="81005" marR="6750" marT="6750" marB="6750" anchor="ctr">
                     <a:lnL>
                       <a:noFill/>
                     </a:lnL>
@@ -24139,7 +24139,7 @@
                       </a:r>
                     </a:p>
                   </a:txBody>
-                  <a:tcPr marL="81005" marR="6750" marT="6750" marB="0" anchor="ctr">
+                  <a:tcPr marL="81005" marR="6750" marT="6750" marB="6750" anchor="ctr">
                     <a:lnL>
                       <a:noFill/>
                     </a:lnL>
@@ -24197,7 +24197,7 @@
                       </a:r>
                     </a:p>
                   </a:txBody>
-                  <a:tcPr marL="81005" marR="6750" marT="6750" marB="0" anchor="ctr">
+                  <a:tcPr marL="81005" marR="6750" marT="6750" marB="6750" anchor="ctr">
                     <a:lnL>
                       <a:noFill/>
                     </a:lnL>
@@ -24251,7 +24251,7 @@
                       </a:r>
                     </a:p>
                   </a:txBody>
-                  <a:tcPr marL="81005" marR="6750" marT="6750" marB="0" anchor="ctr">
+                  <a:tcPr marL="81005" marR="6750" marT="6750" marB="6750" anchor="ctr">
                     <a:lnL>
                       <a:noFill/>
                     </a:lnL>
@@ -24307,7 +24307,7 @@
                       </a:r>
                     </a:p>
                   </a:txBody>
-                  <a:tcPr marL="81005" marR="6750" marT="6750" marB="0" anchor="ctr">
+                  <a:tcPr marL="81005" marR="6750" marT="6750" marB="6750" anchor="ctr">
                     <a:lnL>
                       <a:noFill/>
                     </a:lnL>
@@ -24730,7 +24730,7 @@
                 <a:latin typeface="맑은 고딕"/>
                 <a:ea typeface="맑은 고딕"/>
               </a:rPr>
-              <a:t>세 가지 채점기</a:t>
+              <a:t>3가지 채점기</a:t>
             </a:r>
           </a:p>
           <a:p>
@@ -24882,7 +24882,7 @@
                       </a:r>
                     </a:p>
                   </a:txBody>
-                  <a:tcPr marL="6750" marR="6750" marT="6750" marB="0" anchor="ctr">
+                  <a:tcPr marL="6750" marR="6750" marT="6750" marB="6750" anchor="ctr">
                     <a:lnL>
                       <a:noFill/>
                     </a:lnL>
@@ -24944,7 +24944,7 @@
                       </a:r>
                     </a:p>
                   </a:txBody>
-                  <a:tcPr marL="6750" marR="6750" marT="6750" marB="0" anchor="ctr">
+                  <a:tcPr marL="6750" marR="6750" marT="6750" marB="6750" anchor="ctr">
                     <a:lnL w="9525" cap="flat" cmpd="sng" algn="ctr">
                       <a:solidFill>
                         <a:schemeClr val="bg1">
@@ -25014,7 +25014,7 @@
                       </a:r>
                     </a:p>
                   </a:txBody>
-                  <a:tcPr marL="6750" marR="6750" marT="6750" marB="0" anchor="ctr">
+                  <a:tcPr marL="6750" marR="6750" marT="6750" marB="6750" anchor="ctr">
                     <a:lnL w="9525" cap="flat" cmpd="sng" algn="ctr">
                       <a:solidFill>
                         <a:schemeClr val="bg1">
@@ -25084,7 +25084,7 @@
                       </a:r>
                     </a:p>
                   </a:txBody>
-                  <a:tcPr marL="6750" marR="6750" marT="6750" marB="0" anchor="ctr">
+                  <a:tcPr marL="6750" marR="6750" marT="6750" marB="6750" anchor="ctr">
                     <a:lnL w="9525" cap="flat" cmpd="sng" algn="ctr">
                       <a:solidFill>
                         <a:schemeClr val="bg1">
@@ -25156,7 +25156,7 @@
                       </a:r>
                     </a:p>
                   </a:txBody>
-                  <a:tcPr marL="81005" marR="6750" marT="6750" marB="0" anchor="ctr">
+                  <a:tcPr marL="81005" marR="6750" marT="6750" marB="6750" anchor="ctr">
                     <a:lnL>
                       <a:noFill/>
                     </a:lnL>
@@ -25210,7 +25210,7 @@
                       </a:r>
                     </a:p>
                   </a:txBody>
-                  <a:tcPr marL="81005" marR="6750" marT="6750" marB="0" anchor="ctr">
+                  <a:tcPr marL="81005" marR="6750" marT="6750" marB="6750" anchor="ctr">
                     <a:lnL>
                       <a:noFill/>
                     </a:lnL>
@@ -25266,7 +25266,7 @@
                       </a:r>
                     </a:p>
                   </a:txBody>
-                  <a:tcPr marL="81005" marR="6750" marT="6750" marB="0" anchor="ctr">
+                  <a:tcPr marL="81005" marR="6750" marT="6750" marB="6750" anchor="ctr">
                     <a:lnL>
                       <a:noFill/>
                     </a:lnL>
@@ -25322,7 +25322,7 @@
                       </a:r>
                     </a:p>
                   </a:txBody>
-                  <a:tcPr marL="81005" marR="6750" marT="6750" marB="0" anchor="ctr">
+                  <a:tcPr marL="81005" marR="6750" marT="6750" marB="6750" anchor="ctr">
                     <a:lnL>
                       <a:noFill/>
                     </a:lnL>
@@ -25380,7 +25380,7 @@
                       </a:r>
                     </a:p>
                   </a:txBody>
-                  <a:tcPr marL="81005" marR="6750" marT="6750" marB="0" anchor="ctr">
+                  <a:tcPr marL="81005" marR="6750" marT="6750" marB="6750" anchor="ctr">
                     <a:lnL>
                       <a:noFill/>
                     </a:lnL>
@@ -25434,7 +25434,7 @@
                       </a:r>
                     </a:p>
                   </a:txBody>
-                  <a:tcPr marL="81005" marR="6750" marT="6750" marB="0" anchor="ctr">
+                  <a:tcPr marL="81005" marR="6750" marT="6750" marB="6750" anchor="ctr">
                     <a:lnL>
                       <a:noFill/>
                     </a:lnL>
@@ -25490,7 +25490,7 @@
                       </a:r>
                     </a:p>
                   </a:txBody>
-                  <a:tcPr marL="81005" marR="6750" marT="6750" marB="0" anchor="ctr">
+                  <a:tcPr marL="81005" marR="6750" marT="6750" marB="6750" anchor="ctr">
                     <a:lnL>
                       <a:noFill/>
                     </a:lnL>
@@ -25546,7 +25546,7 @@
                       </a:r>
                     </a:p>
                   </a:txBody>
-                  <a:tcPr marL="81005" marR="6750" marT="6750" marB="0" anchor="ctr">
+                  <a:tcPr marL="81005" marR="6750" marT="6750" marB="6750" anchor="ctr">
                     <a:lnL>
                       <a:noFill/>
                     </a:lnL>
@@ -25604,7 +25604,7 @@
                       </a:r>
                     </a:p>
                   </a:txBody>
-                  <a:tcPr marL="81005" marR="6750" marT="6750" marB="0" anchor="ctr">
+                  <a:tcPr marL="81005" marR="6750" marT="6750" marB="6750" anchor="ctr">
                     <a:lnL>
                       <a:noFill/>
                     </a:lnL>
@@ -25658,7 +25658,7 @@
                       </a:r>
                     </a:p>
                   </a:txBody>
-                  <a:tcPr marL="81005" marR="6750" marT="6750" marB="0" anchor="ctr">
+                  <a:tcPr marL="81005" marR="6750" marT="6750" marB="6750" anchor="ctr">
                     <a:lnL>
                       <a:noFill/>
                     </a:lnL>
@@ -25714,7 +25714,7 @@
                       </a:r>
                     </a:p>
                   </a:txBody>
-                  <a:tcPr marL="81005" marR="6750" marT="6750" marB="0" anchor="ctr">
+                  <a:tcPr marL="81005" marR="6750" marT="6750" marB="6750" anchor="ctr">
                     <a:lnL>
                       <a:noFill/>
                     </a:lnL>
@@ -25770,7 +25770,7 @@
                       </a:r>
                     </a:p>
                   </a:txBody>
-                  <a:tcPr marL="81005" marR="6750" marT="6750" marB="0" anchor="ctr">
+                  <a:tcPr marL="81005" marR="6750" marT="6750" marB="6750" anchor="ctr">
                     <a:lnL>
                       <a:noFill/>
                     </a:lnL>
@@ -25917,7 +25917,7 @@
                 <a:latin typeface="맑은 고딕"/>
                 <a:ea typeface="맑은 고딕"/>
               </a:rPr>
-              <a:t>의 세 가지 채점기를 함께 쓴다</a:t>
+              <a:t>의 3가지 채점기를 함께 사용한다</a:t>
             </a:r>
             <a:r>
               <a:rPr sz="1000" b="0">
@@ -26123,7 +26123,7 @@
                 <a:latin typeface="맑은 고딕"/>
                 <a:ea typeface="맑은 고딕"/>
               </a:rPr>
-              <a:t>이미 만든 검사를 다시 쓴다</a:t>
+              <a:t>이미 만든 검사를 다시 사용한다</a:t>
             </a:r>
             <a:r>
               <a:rPr sz="1800" b="0">

--- a/courses/ai-native/sessions/s10.pptx
+++ b/courses/ai-native/sessions/s10.pptx
@@ -866,7 +866,7 @@
             <a:pPr lvl="0"/>
             <a:r>
               <a:rPr lang="ko-KR" sz="1200"/>
-              <a:t>"세션 02. LLM이라는 재료"의 가장 단순한 충분한 형태와 같은 판단이다. 자율성도 검사도 증거가 허락할 때 바꾼다.</a:t>
+              <a:t>"세션 02. LLM이라는 도구"의 가장 단순한 충분한 형태와 같은 판단이다. 자율성도 검사도 증거가 허락할 때 바꾼다.</a:t>
             </a:r>
           </a:p>
         </p:txBody>
@@ -1602,7 +1602,7 @@
             <a:pPr lvl="0"/>
             <a:r>
               <a:rPr lang="ko-KR" sz="1200"/>
-              <a:t>토큰이 어떻게 드는지(맥락이 호출마다 다시 들어간다, 캐싱, 반복 횟수)는 "세션 02. LLM이라는 재료"의 「03. 비용의 구조」가 다뤘다. 여기서는 사람의 시간까지 합친 득실을 본다.</a:t>
+              <a:t>토큰이 어떻게 드는지(맥락이 호출마다 다시 들어간다, 캐싱, 반복 횟수)는 "세션 02. LLM이라는 도구"의 「03. 비용의 구조」가 다뤘다. 여기서는 사람의 시간까지 합친 득실을 본다.</a:t>
             </a:r>
           </a:p>
           <a:p>

--- a/courses/ai-native/sessions/s10.pptx
+++ b/courses/ai-native/sessions/s10.pptx
@@ -4434,7 +4434,7 @@
         </p:nvGraphicFramePr>
         <p:xfrm>
           <a:off x="1639126" y="2112010"/>
-          <a:ext cx="5852160" cy="3873500"/>
+          <a:ext cx="5852160" cy="1728000"/>
         </p:xfrm>
         <a:graphic>
           <a:graphicData uri="http://schemas.openxmlformats.org/drawingml/2006/table">
@@ -6333,7 +6333,7 @@
         </p:nvGraphicFramePr>
         <p:xfrm>
           <a:off x="1956626" y="2898948"/>
-          <a:ext cx="5217160" cy="3873500"/>
+          <a:ext cx="5217160" cy="1440000"/>
         </p:xfrm>
         <a:graphic>
           <a:graphicData uri="http://schemas.openxmlformats.org/drawingml/2006/table">
@@ -7788,7 +7788,7 @@
         </p:nvGraphicFramePr>
         <p:xfrm>
           <a:off x="2249996" y="2112010"/>
-          <a:ext cx="4630420" cy="3873500"/>
+          <a:ext cx="4630420" cy="1440000"/>
         </p:xfrm>
         <a:graphic>
           <a:graphicData uri="http://schemas.openxmlformats.org/drawingml/2006/table">
@@ -10343,7 +10343,7 @@
         </p:nvGraphicFramePr>
         <p:xfrm>
           <a:off x="1202246" y="3061046"/>
-          <a:ext cx="6725920" cy="3873500"/>
+          <a:ext cx="6725920" cy="1440000"/>
         </p:xfrm>
         <a:graphic>
           <a:graphicData uri="http://schemas.openxmlformats.org/drawingml/2006/table">
@@ -11786,7 +11786,7 @@
         </p:nvGraphicFramePr>
         <p:xfrm>
           <a:off x="1677226" y="2112010"/>
-          <a:ext cx="5775960" cy="3873500"/>
+          <a:ext cx="5775960" cy="1440000"/>
         </p:xfrm>
         <a:graphic>
           <a:graphicData uri="http://schemas.openxmlformats.org/drawingml/2006/table">
@@ -13670,7 +13670,7 @@
         </p:nvGraphicFramePr>
         <p:xfrm>
           <a:off x="1174306" y="2112010"/>
-          <a:ext cx="6781800" cy="3873500"/>
+          <a:ext cx="6781800" cy="1152000"/>
         </p:xfrm>
         <a:graphic>
           <a:graphicData uri="http://schemas.openxmlformats.org/drawingml/2006/table">
@@ -17016,7 +17016,7 @@
         </p:nvGraphicFramePr>
         <p:xfrm>
           <a:off x="1721676" y="1887220"/>
-          <a:ext cx="5687060" cy="3873500"/>
+          <a:ext cx="5687060" cy="1728000"/>
         </p:xfrm>
         <a:graphic>
           <a:graphicData uri="http://schemas.openxmlformats.org/drawingml/2006/table">
@@ -19183,7 +19183,7 @@
         </p:nvGraphicFramePr>
         <p:xfrm>
           <a:off x="1663256" y="2112010"/>
-          <a:ext cx="5803900" cy="3873500"/>
+          <a:ext cx="5803900" cy="1440000"/>
         </p:xfrm>
         <a:graphic>
           <a:graphicData uri="http://schemas.openxmlformats.org/drawingml/2006/table">
@@ -20595,7 +20595,7 @@
         </p:nvGraphicFramePr>
         <p:xfrm>
           <a:off x="812356" y="2112010"/>
-          <a:ext cx="7505700" cy="3873500"/>
+          <a:ext cx="7505700" cy="1152000"/>
         </p:xfrm>
         <a:graphic>
           <a:graphicData uri="http://schemas.openxmlformats.org/drawingml/2006/table">
@@ -23455,7 +23455,7 @@
         </p:nvGraphicFramePr>
         <p:xfrm>
           <a:off x="1580706" y="2112010"/>
-          <a:ext cx="5969000" cy="3873500"/>
+          <a:ext cx="5969000" cy="1440000"/>
         </p:xfrm>
         <a:graphic>
           <a:graphicData uri="http://schemas.openxmlformats.org/drawingml/2006/table">
@@ -24847,7 +24847,7 @@
         </p:nvGraphicFramePr>
         <p:xfrm>
           <a:off x="869506" y="2786726"/>
-          <a:ext cx="7391400" cy="3873500"/>
+          <a:ext cx="7391400" cy="1152000"/>
         </p:xfrm>
         <a:graphic>
           <a:graphicData uri="http://schemas.openxmlformats.org/drawingml/2006/table">
